--- a/lecons/LSA/Geography of Cameroon/15_LSA_CAM_L15_Contrasts_in_Development_within_Cameroon.pptx
+++ b/lecons/LSA/Geography of Cameroon/15_LSA_CAM_L15_Contrasts_in_Development_within_Cameroon.pptx
@@ -68,9 +68,10 @@
     <p:sldId id="316" r:id="rId62"/>
     <p:sldId id="317" r:id="rId63"/>
     <p:sldId id="318" r:id="rId64"/>
+    <p:sldId id="319" r:id="rId65"/>
   </p:sldIdLst>
   <p:notesMasterIdLst>
-    <p:notesMasterId r:id="rId65"/>
+    <p:notesMasterId r:id="rId66"/>
   </p:notesMasterIdLst>
   <p:sldSz cx="12192000" cy="6858000"/>
   <p:notesSz cx="6858000" cy="12192000"/>
@@ -652,7 +653,7 @@
           <a:p>
             <a:r>
               <a:rPr lang="en-US" dirty="0"/>
-              <a:t>Listen carefully to this situation from real life. Hamadou, from Garoua, wants to become a software engineer. He discovers that the best courses, the technology companies and fast internet are in Yaoundé and Douala, where his cousin has already found an internship. Hamadou asks: "Why are some regions of Cameroon so much more developed than others, and what can be done about it?" Think about it, because I am going to ask you some questions.</a:t>
+              <a:t>Take your time to copy this part; we will continue together.</a:t>
             </a:r>
             <a:endParaRPr lang="en-US" dirty="0"/>
           </a:p>
@@ -740,7 +741,7 @@
           <a:p>
             <a:r>
               <a:rPr lang="en-US" dirty="0"/>
-              <a:t>Question 1: What is the problem in the situation? Think for a moment, then raise your hand to answer.</a:t>
+              <a:t>Listen carefully to this situation from real life. Hamadou, from Garoua, wants to become a software engineer. He discovers that the best courses, the technology companies and fast internet are in Yaoundé and Douala, where his cousin has already found an internship. Hamadou asks: "Why are some regions of Cameroon so much more developed than others, and what can be done about it?" Think about it, because I am going to ask you some questions.</a:t>
             </a:r>
             <a:endParaRPr lang="en-US" dirty="0"/>
           </a:p>
@@ -828,7 +829,7 @@
           <a:p>
             <a:r>
               <a:rPr lang="en-US" dirty="0"/>
-              <a:t>Good. Development is unequal between regions, and Hamadou wants to know why and what can be done.</a:t>
+              <a:t>Question 1: What is the problem in the situation? Think for a moment, then raise your hand to answer.</a:t>
             </a:r>
             <a:endParaRPr lang="en-US" dirty="0"/>
           </a:p>
@@ -916,7 +917,7 @@
           <a:p>
             <a:r>
               <a:rPr lang="en-US" dirty="0"/>
-              <a:t>Question 2: Where are the best opportunities? Think for a moment, then raise your hand to answer.</a:t>
+              <a:t>Good. Development is unequal between regions, and Hamadou wants to know why and what can be done.</a:t>
             </a:r>
             <a:endParaRPr lang="en-US" dirty="0"/>
           </a:p>
@@ -1004,7 +1005,7 @@
           <a:p>
             <a:r>
               <a:rPr lang="en-US" dirty="0"/>
-              <a:t>Good. In Yaoundé and Douala.</a:t>
+              <a:t>Question 2: Where are the best opportunities? Think for a moment, then raise your hand to answer.</a:t>
             </a:r>
             <a:endParaRPr lang="en-US" dirty="0"/>
           </a:p>
@@ -1092,7 +1093,7 @@
           <a:p>
             <a:r>
               <a:rPr lang="en-US" dirty="0"/>
-              <a:t>Question 3: What is this unequal development called? Think for a moment, then raise your hand to answer.</a:t>
+              <a:t>Good. In Yaoundé and Douala.</a:t>
             </a:r>
             <a:endParaRPr lang="en-US" dirty="0"/>
           </a:p>
@@ -1180,7 +1181,7 @@
           <a:p>
             <a:r>
               <a:rPr lang="en-US" dirty="0"/>
-              <a:t>Good. Regional inequality (contrasts in development).</a:t>
+              <a:t>Question 3: What is this unequal development called? Think for a moment, then raise your hand to answer.</a:t>
             </a:r>
             <a:endParaRPr lang="en-US" dirty="0"/>
           </a:p>
@@ -1268,7 +1269,7 @@
           <a:p>
             <a:r>
               <a:rPr lang="en-US" dirty="0"/>
-              <a:t>From this situation, the action we are working towards in this lesson is the following: take part in the development of your region and support balanced national development.</a:t>
+              <a:t>Good. Regional inequality (contrasts in development).</a:t>
             </a:r>
             <a:endParaRPr lang="en-US" dirty="0"/>
           </a:p>
@@ -1356,7 +1357,7 @@
           <a:p>
             <a:r>
               <a:rPr lang="en-US" dirty="0"/>
-              <a:t>Why is this lesson important for you? This lesson helps us to understand regional inequalities in Cameroon and the policies to reduce them.</a:t>
+              <a:t>From this situation, the action we are working towards in this lesson is the following: take part in the development of your region and support balanced national development.</a:t>
             </a:r>
             <a:endParaRPr lang="en-US" dirty="0"/>
           </a:p>
@@ -1444,7 +1445,7 @@
           <a:p>
             <a:r>
               <a:rPr lang="en-US" dirty="0"/>
-              <a:t>Activity 1. Look carefully at this diagram: a core and its periphery. Observe every detail before I ask the question.</a:t>
+              <a:t>Why is this lesson important for you? This lesson helps us to understand regional inequalities in Cameroon and the policies to reduce them.</a:t>
             </a:r>
             <a:endParaRPr lang="en-US" dirty="0"/>
           </a:p>
@@ -1620,7 +1621,7 @@
           <a:p>
             <a:r>
               <a:rPr lang="en-US" dirty="0"/>
-              <a:t>Here is the question for Activity 1: Where do skilled people and capital go in the core-periphery model? Take one minute to think and write your answer in your rough notebook.</a:t>
+              <a:t>Activity 1. Look carefully at this diagram: a core and its periphery. Observe every detail before I ask the question.</a:t>
             </a:r>
             <a:endParaRPr lang="en-US" dirty="0"/>
           </a:p>
@@ -1708,7 +1709,7 @@
           <a:p>
             <a:r>
               <a:rPr lang="en-US" dirty="0"/>
-              <a:t>Let us check the answer together. Towards the core (the most developed region).</a:t>
+              <a:t>Here is the question for Activity 1: Where do skilled people and capital go in the core-periphery model? Take one minute to think and write your answer in your rough notebook.</a:t>
             </a:r>
             <a:endParaRPr lang="en-US" dirty="0"/>
           </a:p>
@@ -1796,7 +1797,7 @@
           <a:p>
             <a:r>
               <a:rPr lang="en-US" dirty="0"/>
-              <a:t>Activity 2. Look carefully at this diagram: prosperous and lagging regions. Observe every detail before I ask the question.</a:t>
+              <a:t>Let us check the answer together. Towards the core (the most developed region).</a:t>
             </a:r>
             <a:endParaRPr lang="en-US" dirty="0"/>
           </a:p>
@@ -1884,7 +1885,7 @@
           <a:p>
             <a:r>
               <a:rPr lang="en-US" dirty="0"/>
-              <a:t>Here is the question for Activity 2: Is Douala a prosperous or a lagging region? Take one minute to think and write your answer in your rough notebook.</a:t>
+              <a:t>Activity 2. Look carefully at this diagram: prosperous and lagging regions. Observe every detail before I ask the question.</a:t>
             </a:r>
             <a:endParaRPr lang="en-US" dirty="0"/>
           </a:p>
@@ -1972,7 +1973,7 @@
           <a:p>
             <a:r>
               <a:rPr lang="en-US" dirty="0"/>
-              <a:t>Let us check the answer together. A prosperous region (a core).</a:t>
+              <a:t>Here is the question for Activity 2: Is Douala a prosperous or a lagging region? Take one minute to think and write your answer in your rough notebook.</a:t>
             </a:r>
             <a:endParaRPr lang="en-US" dirty="0"/>
           </a:p>
@@ -2060,7 +2061,7 @@
           <a:p>
             <a:r>
               <a:rPr lang="en-US" dirty="0"/>
-              <a:t>Activity 3. Look carefully at this diagram: coastal lowlands and Adamawa compared. Observe every detail before I ask the question.</a:t>
+              <a:t>Let us check the answer together. A prosperous region (a core).</a:t>
             </a:r>
             <a:endParaRPr lang="en-US" dirty="0"/>
           </a:p>
@@ -2148,7 +2149,7 @@
           <a:p>
             <a:r>
               <a:rPr lang="en-US" dirty="0"/>
-              <a:t>Here is the question for Activity 3: Which region has more schools and hospitals? Take one minute to think and write your answer in your rough notebook.</a:t>
+              <a:t>Activity 3. Look carefully at this diagram: coastal lowlands and Adamawa compared. Observe every detail before I ask the question.</a:t>
             </a:r>
             <a:endParaRPr lang="en-US" dirty="0"/>
           </a:p>
@@ -2236,7 +2237,7 @@
           <a:p>
             <a:r>
               <a:rPr lang="en-US" dirty="0"/>
-              <a:t>Let us check the answer together. The coastal lowlands (Littoral).</a:t>
+              <a:t>Here is the question for Activity 3: Which region has more schools and hospitals? Take one minute to think and write your answer in your rough notebook.</a:t>
             </a:r>
             <a:endParaRPr lang="en-US" dirty="0"/>
           </a:p>
@@ -2324,7 +2325,7 @@
           <a:p>
             <a:r>
               <a:rPr lang="en-US" dirty="0"/>
-              <a:t>Activity 4. Look carefully at this picture: douala. Observe every detail before I ask the question.</a:t>
+              <a:t>Let us check the answer together. The coastal lowlands (Littoral).</a:t>
             </a:r>
             <a:endParaRPr lang="en-US" dirty="0"/>
           </a:p>
@@ -2412,7 +2413,7 @@
           <a:p>
             <a:r>
               <a:rPr lang="en-US" dirty="0"/>
-              <a:t>Here is the question for Activity 4: Give one natural advantage of the coastal lowlands. Take one minute to think and write your answer in your rough notebook.</a:t>
+              <a:t>Activity 4. Look carefully at this picture: douala. Observe every detail before I ask the question.</a:t>
             </a:r>
             <a:endParaRPr lang="en-US" dirty="0"/>
           </a:p>
@@ -2588,7 +2589,7 @@
           <a:p>
             <a:r>
               <a:rPr lang="en-US" dirty="0"/>
-              <a:t>Let us check the answer together. Access to the sea (port), also oil and fertile soils.</a:t>
+              <a:t>Here is the question for Activity 4: Give one natural advantage of the coastal lowlands. Take one minute to think and write your answer in your rough notebook.</a:t>
             </a:r>
             <a:endParaRPr lang="en-US" dirty="0"/>
           </a:p>
@@ -2676,7 +2677,7 @@
           <a:p>
             <a:r>
               <a:rPr lang="en-US" dirty="0"/>
-              <a:t>Activity 5. Look carefully at this picture: a school. Observe every detail before I ask the question.</a:t>
+              <a:t>Let us check the answer together. Access to the sea (port), also oil and fertile soils.</a:t>
             </a:r>
             <a:endParaRPr lang="en-US" dirty="0"/>
           </a:p>
@@ -2764,7 +2765,7 @@
           <a:p>
             <a:r>
               <a:rPr lang="en-US" dirty="0"/>
-              <a:t>Here is the question for Activity 5: How can building schools in lagging regions reduce inequality? Take one minute to think and write your answer in your rough notebook.</a:t>
+              <a:t>Activity 5. Look carefully at this picture: a school. Observe every detail before I ask the question.</a:t>
             </a:r>
             <a:endParaRPr lang="en-US" dirty="0"/>
           </a:p>
@@ -2852,7 +2853,7 @@
           <a:p>
             <a:r>
               <a:rPr lang="en-US" dirty="0"/>
-              <a:t>Let us check the answer together. It trains local people, who can find better jobs and develop their region.</a:t>
+              <a:t>Here is the question for Activity 5: How can building schools in lagging regions reduce inequality? Take one minute to think and write your answer in your rough notebook.</a:t>
             </a:r>
             <a:endParaRPr lang="en-US" dirty="0"/>
           </a:p>
@@ -2940,7 +2941,7 @@
           <a:p>
             <a:r>
               <a:rPr lang="en-US" dirty="0"/>
-              <a:t>Now we are going to copy the board summary. Write the title and the headings neatly in your notebooks. I will give you enough time for each slide, so do not rush.</a:t>
+              <a:t>Let us check the answer together. It trains local people, who can find better jobs and develop their region.</a:t>
             </a:r>
             <a:endParaRPr lang="en-US" dirty="0"/>
           </a:p>
@@ -3028,7 +3029,7 @@
           <a:p>
             <a:r>
               <a:rPr lang="en-US" dirty="0"/>
-              <a:t>Let us copy the definitions. The key terms of this lesson are defined as follows. On this slide we have Development and Regional inequality. Write each point on a new line, with the key term first, and explain it in your own words when we revise. When you finish, we go to the next slide.</a:t>
+              <a:t>Now we are going to copy the board summary. Write the title and the headings neatly in your notebooks. I will give you enough time for each slide, so do not rush.</a:t>
             </a:r>
             <a:endParaRPr lang="en-US" dirty="0"/>
           </a:p>
@@ -3116,7 +3117,7 @@
           <a:p>
             <a:r>
               <a:rPr lang="en-US" dirty="0"/>
-              <a:t>We continue with the definitions. On this slide we have Core and Periphery. Write each point on a new line, with the key term first, and explain it in your own words when we revise.</a:t>
+              <a:t>Let us copy the definitions. The key terms of this lesson are defined as follows. On this slide we have Development and Regional inequality. Write each point on a new line, with the key term first, and explain it in your own words when we revise. When you finish, we go to the next slide.</a:t>
             </a:r>
             <a:endParaRPr lang="en-US" dirty="0"/>
           </a:p>
@@ -3204,7 +3205,7 @@
           <a:p>
             <a:r>
               <a:rPr lang="en-US" dirty="0"/>
-              <a:t>Let us copy Recall of the Models of Regional Inequality. The models of regional inequality are the following. Copy the point on Myrdal (cumulative causation, 1957) on the left, then draw the diagram on the right: core and periphery. Give it a title and label it clearly.</a:t>
+              <a:t>We continue with the definitions. On this slide we have Core and Periphery. Write each point on a new line, with the key term first, and explain it in your own words when we revise.</a:t>
             </a:r>
             <a:endParaRPr lang="en-US" dirty="0"/>
           </a:p>
@@ -3292,7 +3293,7 @@
           <a:p>
             <a:r>
               <a:rPr lang="en-US" dirty="0"/>
-              <a:t>We continue with Recall of the Models of Regional Inequality. On this slide we have Backwash and spread effects. Write each point on a new line, with the key term first, and explain it in your own words when we revise. When you finish, we go to the next slide.</a:t>
+              <a:t>Let us copy Recall of the Models of Regional Inequality. The models of regional inequality are the following. Copy the point on Myrdal (cumulative causation, 1957) on the left, then draw the diagram on the right: core and periphery. Give it a title and label it clearly.</a:t>
             </a:r>
             <a:endParaRPr lang="en-US" dirty="0"/>
           </a:p>
@@ -3380,7 +3381,7 @@
           <a:p>
             <a:r>
               <a:rPr lang="en-US" dirty="0"/>
-              <a:t>We continue with Recall of the Models of Regional Inequality. On this slide we have Friedmann (core-periphery, 1966). Write each point on a new line, with the key term first, and explain it in your own words when we revise.</a:t>
+              <a:t>We continue with Recall of the Models of Regional Inequality. On this slide we have Backwash and spread effects. Write each point on a new line, with the key term first, and explain it in your own words when we revise. When you finish, we go to the next slide.</a:t>
             </a:r>
             <a:endParaRPr lang="en-US" dirty="0"/>
           </a:p>
@@ -3556,7 +3557,7 @@
           <a:p>
             <a:r>
               <a:rPr lang="en-US" dirty="0"/>
-              <a:t>Let us copy The Contrasting Regions: Case Study. The case study compares the following two regions. Copy the point on Prosperous region: the Coastal lowlands on the left, then draw the diagram on the right: prosperous and lagging regions. Give it a title and label it clearly.</a:t>
+              <a:t>We continue with Recall of the Models of Regional Inequality. On this slide we have Friedmann (core-periphery, 1966). Write each point on a new line, with the key term first, and explain it in your own words when we revise.</a:t>
             </a:r>
             <a:endParaRPr lang="en-US" dirty="0"/>
           </a:p>
@@ -3644,7 +3645,7 @@
           <a:p>
             <a:r>
               <a:rPr lang="en-US" dirty="0"/>
-              <a:t>Copy the point on Lagging region: the Adamawa on the left, then draw the diagram on the right: the Adamawa Plateau. Give it a title and label it clearly.</a:t>
+              <a:t>Let us copy The Contrasting Regions: Case Study. The case study compares the following two regions. Copy the point on Prosperous region: the Coastal lowlands on the left, then draw the diagram on the right: prosperous and lagging regions. Give it a title and label it clearly.</a:t>
             </a:r>
             <a:endParaRPr lang="en-US" dirty="0"/>
           </a:p>
@@ -3732,7 +3733,7 @@
           <a:p>
             <a:r>
               <a:rPr lang="en-US" dirty="0"/>
-              <a:t>Let us copy Indicators of Differences in Development. The indicators of the differences between the two regions are the following. Copy the point on Income and poverty on the left, then draw the diagram on the right: indicators compared. Give it a title and label it clearly.</a:t>
+              <a:t>Copy the point on Lagging region: the Adamawa on the left, then draw the diagram on the right: the Adamawa Plateau. Give it a title and label it clearly.</a:t>
             </a:r>
             <a:endParaRPr lang="en-US" dirty="0"/>
           </a:p>
@@ -3820,7 +3821,7 @@
           <a:p>
             <a:r>
               <a:rPr lang="en-US" dirty="0"/>
-              <a:t>We continue with Indicators of Differences in Development. On this slide we have Employment and Education. Write each point on a new line, with the key term first, and explain it in your own words when we revise. When you finish, we go to the next slide.</a:t>
+              <a:t>Let us copy Indicators of Differences in Development. The indicators of the differences between the two regions are the following. Copy the point on Income and poverty on the left, then draw the diagram on the right: indicators compared. Give it a title and label it clearly.</a:t>
             </a:r>
             <a:endParaRPr lang="en-US" dirty="0"/>
           </a:p>
@@ -3908,7 +3909,7 @@
           <a:p>
             <a:r>
               <a:rPr lang="en-US" dirty="0"/>
-              <a:t>We continue with Indicators of Differences in Development. On this slide we have Health and Other infrastructure. Write each point on a new line, with the key term first, and explain it in your own words when we revise.</a:t>
+              <a:t>We continue with Indicators of Differences in Development. On this slide we have Employment and Education. Write each point on a new line, with the key term first, and explain it in your own words when we revise. When you finish, we go to the next slide.</a:t>
             </a:r>
             <a:endParaRPr lang="en-US" dirty="0"/>
           </a:p>
@@ -3996,7 +3997,7 @@
           <a:p>
             <a:r>
               <a:rPr lang="en-US" dirty="0"/>
-              <a:t>Let us copy Factors of the Inequality. The inequality is explained by the following factors. Copy the point on Natural resources and position on the left, then draw the diagram on the right: douala. Give it a title and label it clearly.</a:t>
+              <a:t>We continue with Indicators of Differences in Development. On this slide we have Health and Other infrastructure. Write each point on a new line, with the key term first, and explain it in your own words when we revise.</a:t>
             </a:r>
             <a:endParaRPr lang="en-US" dirty="0"/>
           </a:p>
@@ -4084,7 +4085,7 @@
           <a:p>
             <a:r>
               <a:rPr lang="en-US" dirty="0"/>
-              <a:t>We continue with Factors of the Inequality. On this slide we have Human resources and Historical factors. Write each point on a new line, with the key term first, and explain it in your own words when we revise. When you finish, we go to the next slide.</a:t>
+              <a:t>Let us copy Factors of the Inequality. The inequality is explained by the following factors. Copy the point on Natural resources and position on the left, then draw the diagram on the right: douala. Give it a title and label it clearly.</a:t>
             </a:r>
             <a:endParaRPr lang="en-US" dirty="0"/>
           </a:p>
@@ -4172,7 +4173,7 @@
           <a:p>
             <a:r>
               <a:rPr lang="en-US" dirty="0"/>
-              <a:t>We continue with Factors of the Inequality. On this slide we have Government policy and investment. Write each point on a new line, with the key term first, and explain it in your own words when we revise.</a:t>
+              <a:t>We continue with Factors of the Inequality. On this slide we have Human resources and Historical factors. Write each point on a new line, with the key term first, and explain it in your own words when we revise. When you finish, we go to the next slide.</a:t>
             </a:r>
             <a:endParaRPr lang="en-US" dirty="0"/>
           </a:p>
@@ -4260,7 +4261,7 @@
           <a:p>
             <a:r>
               <a:rPr lang="en-US" dirty="0"/>
-              <a:t>Let us copy Measures Attempted to Reduce Inequality. The measures attempted and their difficulties are the following. On this slide we have Political and administrative measures. Write each point on a new line, with the key term first, and explain it in your own words when we revise. When you finish, we go to the next slide.</a:t>
+              <a:t>We continue with Factors of the Inequality. On this slide we have Government policy and investment. Write each point on a new line, with the key term first, and explain it in your own words when we revise.</a:t>
             </a:r>
             <a:endParaRPr lang="en-US" dirty="0"/>
           </a:p>
@@ -4348,7 +4349,7 @@
           <a:p>
             <a:r>
               <a:rPr lang="en-US" dirty="0"/>
-              <a:t>We continue with Measures Attempted to Reduce Inequality. On this slide we have Infrastructure. Write each point on a new line, with the key term first, and explain it in your own words when we revise.</a:t>
+              <a:t>Let us copy Measures Attempted to Reduce Inequality. The measures attempted and their difficulties are the following. On this slide we have Political and administrative measures. Write each point on a new line, with the key term first, and explain it in your own words when we revise. When you finish, we go to the next slide.</a:t>
             </a:r>
             <a:endParaRPr lang="en-US" dirty="0"/>
           </a:p>
@@ -4524,7 +4525,7 @@
           <a:p>
             <a:r>
               <a:rPr lang="en-US" dirty="0"/>
-              <a:t>Copy the point on Education and health on the left, then draw the diagram on the right: a school. Give it a title and label it clearly.</a:t>
+              <a:t>We continue with Measures Attempted to Reduce Inequality. On this slide we have Infrastructure. Write each point on a new line, with the key term first, and explain it in your own words when we revise.</a:t>
             </a:r>
             <a:endParaRPr lang="en-US" dirty="0"/>
           </a:p>
@@ -4612,7 +4613,7 @@
           <a:p>
             <a:r>
               <a:rPr lang="en-US" dirty="0"/>
-              <a:t>We continue with Measures Attempted to Reduce Inequality. On this slide we have Development agencies and projects and Difficulties. Write each point on a new line, with the key term first, and explain it in your own words when we revise.</a:t>
+              <a:t>Copy the point on Education and health on the left, then draw the diagram on the right: a school. Give it a title and label it clearly.</a:t>
             </a:r>
             <a:endParaRPr lang="en-US" dirty="0"/>
           </a:p>
@@ -4700,7 +4701,7 @@
           <a:p>
             <a:r>
               <a:rPr lang="en-US" dirty="0"/>
-              <a:t>Now let us check what you have understood. Question 1: Distinguish between backwash and spread effects. Answer in your exercise book.</a:t>
+              <a:t>We continue with Measures Attempted to Reduce Inequality. On this slide we have Development agencies and projects and Difficulties. Write each point on a new line, with the key term first, and explain it in your own words when we revise.</a:t>
             </a:r>
             <a:endParaRPr lang="en-US" dirty="0"/>
           </a:p>
@@ -4788,7 +4789,7 @@
           <a:p>
             <a:r>
               <a:rPr lang="en-US" dirty="0"/>
-              <a:t>The expected answer is: backwash effects draw labour and capital from poor regions to the core; spread effects are the growth that spreads from the core to poorer regions. If you got it right, well done.</a:t>
+              <a:t>Now let us check what you have understood. Question 1: Distinguish between backwash and spread effects. Answer in your exercise book.</a:t>
             </a:r>
             <a:endParaRPr lang="en-US" dirty="0"/>
           </a:p>
@@ -4876,7 +4877,7 @@
           <a:p>
             <a:r>
               <a:rPr lang="en-US" dirty="0"/>
-              <a:t>Now let us check what you have understood. Question 2: Give two indicators that show that the coast is more developed than the Adamawa. Answer in your exercise book.</a:t>
+              <a:t>The expected answer is: backwash effects draw labour and capital from poor regions to the core; spread effects are the growth that spreads from the core to poorer regions. If you got it right, well done.</a:t>
             </a:r>
             <a:endParaRPr lang="en-US" dirty="0"/>
           </a:p>
@@ -4964,7 +4965,7 @@
           <a:p>
             <a:r>
               <a:rPr lang="en-US" dirty="0"/>
-              <a:t>The expected answer is: lower poverty and more schools and hospitals (also more formal jobs and better roads). If you got it right, well done.</a:t>
+              <a:t>Now let us check what you have understood. Question 2: Give two indicators that show that the coast is more developed than the Adamawa. Answer in your exercise book.</a:t>
             </a:r>
             <a:endParaRPr lang="en-US" dirty="0"/>
           </a:p>
@@ -5052,7 +5053,7 @@
           <a:p>
             <a:r>
               <a:rPr lang="en-US" dirty="0"/>
-              <a:t>Take your time to copy this part; we will continue together.</a:t>
+              <a:t>The expected answer is: lower poverty and more schools and hospitals (also more formal jobs and better roads). If you got it right, well done.</a:t>
             </a:r>
             <a:endParaRPr lang="en-US" dirty="0"/>
           </a:p>
@@ -5140,7 +5141,7 @@
           <a:p>
             <a:r>
               <a:rPr lang="en-US" dirty="0"/>
-              <a:t>For those who need more practice, fill in the blanks in your exercise book. The answers are: number 1, core; number 2, Myrdal; number 3, decentralisation.</a:t>
+              <a:t>Take your time to copy this part; we will continue together.</a:t>
             </a:r>
             <a:endParaRPr lang="en-US" dirty="0"/>
           </a:p>
@@ -5228,7 +5229,7 @@
           <a:p>
             <a:r>
               <a:rPr lang="en-US" dirty="0"/>
-              <a:t>For your homework: List three indicators of development. We shall correct it at the beginning of our next lesson.</a:t>
+              <a:t>For those who need more practice, fill in the blanks in your exercise book. The answers are: number 1, core; number 2, Myrdal; number 3, decentralisation.</a:t>
             </a:r>
             <a:endParaRPr lang="en-US" dirty="0"/>
           </a:p>
@@ -5316,7 +5317,7 @@
           <a:p>
             <a:r>
               <a:rPr lang="en-US" dirty="0"/>
-              <a:t>Let us play the bilingual game. I say a word in English, and you give me the French word. Then we do the reverse.</a:t>
+              <a:t>For your homework: List three indicators of development. We shall correct it at the beginning of our next lesson.</a:t>
             </a:r>
             <a:endParaRPr lang="en-US" dirty="0"/>
           </a:p>
@@ -5492,7 +5493,7 @@
           <a:p>
             <a:r>
               <a:rPr lang="en-US" dirty="0"/>
-              <a:t>I record this information in the official logbook of the class after the lesson.</a:t>
+              <a:t>Let us play the bilingual game. I say a word in English, and you give me the French word. Then we do the reverse.</a:t>
             </a:r>
             <a:endParaRPr lang="en-US" dirty="0"/>
           </a:p>
@@ -5580,7 +5581,7 @@
           <a:p>
             <a:r>
               <a:rPr lang="en-US" dirty="0"/>
-              <a:t>I complete the second page of the logbook: the matter taught, the evaluation, the homework and the attendance.</a:t>
+              <a:t>I record this information in the official logbook of the class after the lesson.</a:t>
             </a:r>
             <a:endParaRPr lang="en-US" dirty="0"/>
           </a:p>
@@ -5668,7 +5669,7 @@
           <a:p>
             <a:r>
               <a:rPr lang="en-US" dirty="0"/>
-              <a:t>This slide is for me, the teacher: it gives the timing of the lesson and what to do if the projector is not available.</a:t>
+              <a:t>I complete the second page of the logbook: the matter taught, the evaluation, the homework and the attendance.</a:t>
             </a:r>
             <a:endParaRPr lang="en-US" dirty="0"/>
           </a:p>
@@ -5756,7 +5757,7 @@
           <a:p>
             <a:r>
               <a:rPr lang="en-US" dirty="0"/>
-              <a:t>These are the references and picture credits used to prepare this lesson.</a:t>
+              <a:t>This slide is for me, the teacher: it gives the timing of the lesson and what to do if the projector is not available.</a:t>
             </a:r>
             <a:endParaRPr lang="en-US" dirty="0"/>
           </a:p>
@@ -5780,6 +5781,94 @@
             <a:fld id="{F7021451-1387-4CA6-816F-3879F97B5CBC}" type="slidenum">
               <a:rPr lang="en-US"/>
               <a:t>63</a:t>
+            </a:fld>
+            <a:endParaRPr lang="en-US"/>
+          </a:p>
+        </p:txBody>
+      </p:sp>
+    </p:spTree>
+    <p:extLst>
+      <p:ext uri="{BB962C8B-B14F-4D97-AF65-F5344CB8AC3E}">
+        <p14:creationId xmlns:p14="http://schemas.microsoft.com/office/powerpoint/2010/main" val="1024086991"/>
+      </p:ext>
+    </p:extLst>
+  </p:cSld>
+  <p:clrMapOvr>
+    <a:masterClrMapping/>
+  </p:clrMapOvr>
+</p:notes>
+</file>
+
+<file path=ppt/notesSlides/notesSlide64.xml><?xml version="1.0" encoding="utf-8"?>
+<p:notes xmlns:a="http://schemas.openxmlformats.org/drawingml/2006/main" xmlns:r="http://schemas.openxmlformats.org/officeDocument/2006/relationships" xmlns:p="http://schemas.openxmlformats.org/presentationml/2006/main">
+  <p:cSld>
+    <p:spTree>
+      <p:nvGrpSpPr>
+        <p:cNvPr id="1" name=""/>
+        <p:cNvGrpSpPr/>
+        <p:nvPr/>
+      </p:nvGrpSpPr>
+      <p:grpSpPr>
+        <a:xfrm>
+          <a:off x="0" y="0"/>
+          <a:ext cx="0" cy="0"/>
+          <a:chOff x="0" y="0"/>
+          <a:chExt cx="0" cy="0"/>
+        </a:xfrm>
+      </p:grpSpPr>
+      <p:sp>
+        <p:nvSpPr>
+          <p:cNvPr id="2" name="Slide Image Placeholder 1"/>
+          <p:cNvSpPr>
+            <a:spLocks noGrp="1" noRot="1" noChangeAspect="1"/>
+          </p:cNvSpPr>
+          <p:nvPr>
+            <p:ph type="sldImg"/>
+          </p:nvPr>
+        </p:nvSpPr>
+        <p:spPr/>
+      </p:sp>
+      <p:sp>
+        <p:nvSpPr>
+          <p:cNvPr id="3" name="Notes Placeholder 2"/>
+          <p:cNvSpPr>
+            <a:spLocks noGrp="1"/>
+          </p:cNvSpPr>
+          <p:nvPr>
+            <p:ph type="body" idx="1"/>
+          </p:nvPr>
+        </p:nvSpPr>
+        <p:spPr/>
+        <p:txBody>
+          <a:bodyPr/>
+          <a:lstStyle/>
+          <a:p>
+            <a:r>
+              <a:rPr lang="en-US" dirty="0"/>
+              <a:t>These are the references and picture credits used to prepare this lesson.</a:t>
+            </a:r>
+            <a:endParaRPr lang="en-US" dirty="0"/>
+          </a:p>
+        </p:txBody>
+      </p:sp>
+      <p:sp>
+        <p:nvSpPr>
+          <p:cNvPr id="4" name="Slide Number Placeholder 3"/>
+          <p:cNvSpPr>
+            <a:spLocks noGrp="1"/>
+          </p:cNvSpPr>
+          <p:nvPr>
+            <p:ph type="sldNum" sz="quarter" idx="10"/>
+          </p:nvPr>
+        </p:nvSpPr>
+        <p:spPr/>
+        <p:txBody>
+          <a:bodyPr/>
+          <a:lstStyle/>
+          <a:p>
+            <a:fld id="{F7021451-1387-4CA6-816F-3879F97B5CBC}" type="slidenum">
+              <a:rPr lang="en-US"/>
+              <a:t>64</a:t>
             </a:fld>
             <a:endParaRPr lang="en-US"/>
           </a:p>
@@ -7400,7 +7489,7 @@
         <p:spPr>
           <a:xfrm>
             <a:off x="0" y="658368"/>
-            <a:ext cx="2468880" cy="5833872"/>
+            <a:ext cx="3840480" cy="5833872"/>
           </a:xfrm>
           <a:prstGeom prst="rect">
             <a:avLst/>
@@ -7415,8 +7504,8 @@
         </p:nvSpPr>
         <p:spPr>
           <a:xfrm>
-            <a:off x="2697480" y="1005840"/>
-            <a:ext cx="9174175" cy="731520"/>
+            <a:off x="4069080" y="1005840"/>
+            <a:ext cx="7802575" cy="731520"/>
           </a:xfrm>
           <a:prstGeom prst="rect">
             <a:avLst/>
@@ -7456,8 +7545,8 @@
         </p:nvSpPr>
         <p:spPr>
           <a:xfrm>
-            <a:off x="2697480" y="1783080"/>
-            <a:ext cx="9174175" cy="4663440"/>
+            <a:off x="4069080" y="1783080"/>
+            <a:ext cx="7802575" cy="4663440"/>
           </a:xfrm>
           <a:prstGeom prst="rect">
             <a:avLst/>
@@ -7505,26 +7594,6 @@
                 <a:cs typeface="Times New Roman" pitchFamily="34" charset="-120"/>
               </a:rPr>
               <a:t>He discovers that the best courses, the technology companies and fast internet are in Yaoundé and Douala, where his cousin has already found an internship.</a:t>
-            </a:r>
-            <a:endParaRPr lang="en-US" sz="4000" dirty="0"/>
-          </a:p>
-          <a:p>
-            <a:pPr algn="l" indent="0" marL="0">
-              <a:spcAft>
-                <a:spcPts val="800"/>
-              </a:spcAft>
-              <a:buNone/>
-            </a:pPr>
-            <a:r>
-              <a:rPr lang="en-US" sz="4000" dirty="0">
-                <a:solidFill>
-                  <a:srgbClr val="111111"/>
-                </a:solidFill>
-                <a:latin typeface="Times New Roman" pitchFamily="34" charset="0"/>
-                <a:ea typeface="Times New Roman" pitchFamily="34" charset="-122"/>
-                <a:cs typeface="Times New Roman" pitchFamily="34" charset="-120"/>
-              </a:rPr>
-              <a:t>"</a:t>
             </a:r>
             <a:endParaRPr lang="en-US" sz="4000" dirty="0"/>
           </a:p>
@@ -7701,7 +7770,7 @@
                 <a:ea typeface="Times New Roman" pitchFamily="34" charset="-122"/>
                 <a:cs typeface="Times New Roman" pitchFamily="34" charset="-120"/>
               </a:rPr>
-              <a:t>Situation: Question 1</a:t>
+              <a:t>Situation in Real Life (continued)</a:t>
             </a:r>
             <a:endParaRPr lang="en-US" sz="3600" dirty="0"/>
           </a:p>
@@ -7743,7 +7812,7 @@
                 <a:ea typeface="Times New Roman" pitchFamily="34" charset="-122"/>
                 <a:cs typeface="Times New Roman" pitchFamily="34" charset="-120"/>
               </a:rPr>
-              <a:t>What is the problem in the situation?</a:t>
+              <a:t>Hamadou asks: "Why are some regions of Cameroon so much more developed than others, and what can be done about it?"</a:t>
             </a:r>
             <a:endParaRPr lang="en-US" sz="4000" dirty="0"/>
           </a:p>
@@ -7920,7 +7989,7 @@
                 <a:ea typeface="Times New Roman" pitchFamily="34" charset="-122"/>
                 <a:cs typeface="Times New Roman" pitchFamily="34" charset="-120"/>
               </a:rPr>
-              <a:t>Answer</a:t>
+              <a:t>Situation: Question 1</a:t>
             </a:r>
             <a:endParaRPr lang="en-US" sz="3600" dirty="0"/>
           </a:p>
@@ -7962,7 +8031,7 @@
                 <a:ea typeface="Times New Roman" pitchFamily="34" charset="-122"/>
                 <a:cs typeface="Times New Roman" pitchFamily="34" charset="-120"/>
               </a:rPr>
-              <a:t>Development is unequal between regions, and Hamadou wants to know why and what can be done.</a:t>
+              <a:t>What is the problem in the situation?</a:t>
             </a:r>
             <a:endParaRPr lang="en-US" sz="4000" dirty="0"/>
           </a:p>
@@ -8139,7 +8208,7 @@
                 <a:ea typeface="Times New Roman" pitchFamily="34" charset="-122"/>
                 <a:cs typeface="Times New Roman" pitchFamily="34" charset="-120"/>
               </a:rPr>
-              <a:t>Situation: Question 2</a:t>
+              <a:t>Answer</a:t>
             </a:r>
             <a:endParaRPr lang="en-US" sz="3600" dirty="0"/>
           </a:p>
@@ -8181,7 +8250,7 @@
                 <a:ea typeface="Times New Roman" pitchFamily="34" charset="-122"/>
                 <a:cs typeface="Times New Roman" pitchFamily="34" charset="-120"/>
               </a:rPr>
-              <a:t>Where are the best opportunities?</a:t>
+              <a:t>Development is unequal between regions, and Hamadou wants to know why and what can be done.</a:t>
             </a:r>
             <a:endParaRPr lang="en-US" sz="4000" dirty="0"/>
           </a:p>
@@ -8358,7 +8427,7 @@
                 <a:ea typeface="Times New Roman" pitchFamily="34" charset="-122"/>
                 <a:cs typeface="Times New Roman" pitchFamily="34" charset="-120"/>
               </a:rPr>
-              <a:t>Answer</a:t>
+              <a:t>Situation: Question 2</a:t>
             </a:r>
             <a:endParaRPr lang="en-US" sz="3600" dirty="0"/>
           </a:p>
@@ -8400,7 +8469,7 @@
                 <a:ea typeface="Times New Roman" pitchFamily="34" charset="-122"/>
                 <a:cs typeface="Times New Roman" pitchFamily="34" charset="-120"/>
               </a:rPr>
-              <a:t>In Yaoundé and Douala.</a:t>
+              <a:t>Where are the best opportunities?</a:t>
             </a:r>
             <a:endParaRPr lang="en-US" sz="4000" dirty="0"/>
           </a:p>
@@ -8577,7 +8646,7 @@
                 <a:ea typeface="Times New Roman" pitchFamily="34" charset="-122"/>
                 <a:cs typeface="Times New Roman" pitchFamily="34" charset="-120"/>
               </a:rPr>
-              <a:t>Situation: Question 3</a:t>
+              <a:t>Answer</a:t>
             </a:r>
             <a:endParaRPr lang="en-US" sz="3600" dirty="0"/>
           </a:p>
@@ -8619,7 +8688,7 @@
                 <a:ea typeface="Times New Roman" pitchFamily="34" charset="-122"/>
                 <a:cs typeface="Times New Roman" pitchFamily="34" charset="-120"/>
               </a:rPr>
-              <a:t>What is this unequal development called?</a:t>
+              <a:t>In Yaoundé and Douala.</a:t>
             </a:r>
             <a:endParaRPr lang="en-US" sz="4000" dirty="0"/>
           </a:p>
@@ -8796,7 +8865,7 @@
                 <a:ea typeface="Times New Roman" pitchFamily="34" charset="-122"/>
                 <a:cs typeface="Times New Roman" pitchFamily="34" charset="-120"/>
               </a:rPr>
-              <a:t>Possible Answer</a:t>
+              <a:t>Situation: Question 3</a:t>
             </a:r>
             <a:endParaRPr lang="en-US" sz="3600" dirty="0"/>
           </a:p>
@@ -8838,7 +8907,7 @@
                 <a:ea typeface="Times New Roman" pitchFamily="34" charset="-122"/>
                 <a:cs typeface="Times New Roman" pitchFamily="34" charset="-120"/>
               </a:rPr>
-              <a:t>Regional inequality (contrasts in development).</a:t>
+              <a:t>What is this unequal development called?</a:t>
             </a:r>
             <a:endParaRPr lang="en-US" sz="4000" dirty="0"/>
           </a:p>
@@ -8950,7 +9019,7 @@
                 <a:ea typeface="Calibri" pitchFamily="34" charset="-122"/>
                 <a:cs typeface="Calibri" pitchFamily="34" charset="-120"/>
               </a:rPr>
-              <a:t>ACTION TO TAKE</a:t>
+              <a:t>REAL-LIFE SITUATION</a:t>
             </a:r>
             <a:endParaRPr lang="en-US" sz="1400" dirty="0"/>
           </a:p>
@@ -9015,7 +9084,7 @@
                 <a:ea typeface="Times New Roman" pitchFamily="34" charset="-122"/>
                 <a:cs typeface="Times New Roman" pitchFamily="34" charset="-120"/>
               </a:rPr>
-              <a:t>Action to Take</a:t>
+              <a:t>Possible Answer</a:t>
             </a:r>
             <a:endParaRPr lang="en-US" sz="3600" dirty="0"/>
           </a:p>
@@ -9057,7 +9126,7 @@
                 <a:ea typeface="Times New Roman" pitchFamily="34" charset="-122"/>
                 <a:cs typeface="Times New Roman" pitchFamily="34" charset="-120"/>
               </a:rPr>
-              <a:t>Take part in the development of your region and support balanced national development.</a:t>
+              <a:t>Regional inequality (contrasts in development).</a:t>
             </a:r>
             <a:endParaRPr lang="en-US" sz="4000" dirty="0"/>
           </a:p>
@@ -9169,7 +9238,7 @@
                 <a:ea typeface="Calibri" pitchFamily="34" charset="-122"/>
                 <a:cs typeface="Calibri" pitchFamily="34" charset="-120"/>
               </a:rPr>
-              <a:t>JUSTIFICATION</a:t>
+              <a:t>ACTION TO TAKE</a:t>
             </a:r>
             <a:endParaRPr lang="en-US" sz="1400" dirty="0"/>
           </a:p>
@@ -9234,7 +9303,7 @@
                 <a:ea typeface="Times New Roman" pitchFamily="34" charset="-122"/>
                 <a:cs typeface="Times New Roman" pitchFamily="34" charset="-120"/>
               </a:rPr>
-              <a:t>Justification of the Lesson</a:t>
+              <a:t>Action to Take</a:t>
             </a:r>
             <a:endParaRPr lang="en-US" sz="3600" dirty="0"/>
           </a:p>
@@ -9276,7 +9345,7 @@
                 <a:ea typeface="Times New Roman" pitchFamily="34" charset="-122"/>
                 <a:cs typeface="Times New Roman" pitchFamily="34" charset="-120"/>
               </a:rPr>
-              <a:t>This lesson helps us to understand regional inequalities in Cameroon and the policies to reduce them.</a:t>
+              <a:t>Take part in the development of your region and support balanced national development.</a:t>
             </a:r>
             <a:endParaRPr lang="en-US" sz="4000" dirty="0"/>
           </a:p>
@@ -9388,54 +9457,15 @@
                 <a:ea typeface="Calibri" pitchFamily="34" charset="-122"/>
                 <a:cs typeface="Calibri" pitchFamily="34" charset="-120"/>
               </a:rPr>
-              <a:t>1. MODELS OF REGIONAL INEQUALITY</a:t>
+              <a:t>JUSTIFICATION</a:t>
             </a:r>
             <a:endParaRPr lang="en-US" sz="1400" dirty="0"/>
-          </a:p>
-        </p:txBody>
-      </p:sp>
-      <p:sp>
-        <p:nvSpPr>
-          <p:cNvPr id="3" name="Text 1"/>
-          <p:cNvSpPr/>
-          <p:nvPr/>
-        </p:nvSpPr>
-        <p:spPr>
-          <a:xfrm>
-            <a:off x="457200" y="1005840"/>
-            <a:ext cx="11277295" cy="731520"/>
-          </a:xfrm>
-          <a:prstGeom prst="rect">
-            <a:avLst/>
-          </a:prstGeom>
-          <a:noFill/>
-          <a:ln/>
-        </p:spPr>
-        <p:txBody>
-          <a:bodyPr wrap="square" lIns="0" tIns="0" rIns="0" bIns="0" rtlCol="0" anchor="ctr"/>
-          <a:lstStyle/>
-          <a:p>
-            <a:pPr algn="ctr" indent="0" marL="0">
-              <a:buNone/>
-            </a:pPr>
-            <a:r>
-              <a:rPr lang="en-US" sz="3600" b="1" dirty="0">
-                <a:solidFill>
-                  <a:srgbClr val="990011"/>
-                </a:solidFill>
-                <a:latin typeface="Times New Roman" pitchFamily="34" charset="0"/>
-                <a:ea typeface="Times New Roman" pitchFamily="34" charset="-122"/>
-                <a:cs typeface="Times New Roman" pitchFamily="34" charset="-120"/>
-              </a:rPr>
-              <a:t>Activity 1</a:t>
-            </a:r>
-            <a:endParaRPr lang="en-US" sz="3600" dirty="0"/>
           </a:p>
         </p:txBody>
       </p:sp>
       <p:pic>
         <p:nvPicPr>
-          <p:cNvPr id="4" name="Image 0" descr="/home/claude/f4/img/v2/core_periphery_big.png">    </p:cNvPr>
+          <p:cNvPr id="3" name="Image 0" descr="/home/claude/f4/img/minesec_sheet.png">    </p:cNvPr>
           <p:cNvPicPr>
             <a:picLocks noChangeAspect="1"/>
           </p:cNvPicPr>
@@ -9449,8 +9479,8 @@
         </p:blipFill>
         <p:spPr>
           <a:xfrm>
-            <a:off x="629930" y="1783080"/>
-            <a:ext cx="10931835" cy="4270248"/>
+            <a:off x="0" y="658368"/>
+            <a:ext cx="5120640" cy="5833872"/>
           </a:xfrm>
           <a:prstGeom prst="rect">
             <a:avLst/>
@@ -9459,14 +9489,14 @@
       </p:pic>
       <p:sp>
         <p:nvSpPr>
-          <p:cNvPr id="5" name="Text 2"/>
+          <p:cNvPr id="4" name="Text 1"/>
           <p:cNvSpPr/>
           <p:nvPr/>
         </p:nvSpPr>
         <p:spPr>
           <a:xfrm>
-            <a:off x="457200" y="6089904"/>
-            <a:ext cx="11277295" cy="347472"/>
+            <a:off x="5349240" y="1005840"/>
+            <a:ext cx="6522415" cy="731520"/>
           </a:xfrm>
           <a:prstGeom prst="rect">
             <a:avLst/>
@@ -9475,24 +9505,68 @@
           <a:ln/>
         </p:spPr>
         <p:txBody>
-          <a:bodyPr wrap="square" lIns="0" tIns="0" rIns="0" bIns="0" rtlCol="0" anchor="ctr"/>
+          <a:bodyPr wrap="square" lIns="0" tIns="0" rIns="0" bIns="0" rtlCol="0" anchor="ctr">
+            <a:normAutofit/>
+          </a:bodyPr>
           <a:lstStyle/>
           <a:p>
             <a:pPr algn="ctr" indent="0" marL="0">
               <a:buNone/>
             </a:pPr>
             <a:r>
-              <a:rPr lang="en-US" sz="1800" i="1" dirty="0">
-                <a:solidFill>
-                  <a:srgbClr val="555555"/>
+              <a:rPr lang="en-US" sz="3600" b="1" dirty="0">
+                <a:solidFill>
+                  <a:srgbClr val="990011"/>
                 </a:solidFill>
                 <a:latin typeface="Times New Roman" pitchFamily="34" charset="0"/>
                 <a:ea typeface="Times New Roman" pitchFamily="34" charset="-122"/>
                 <a:cs typeface="Times New Roman" pitchFamily="34" charset="-120"/>
               </a:rPr>
-              <a:t>A core and its periphery.</a:t>
-            </a:r>
-            <a:endParaRPr lang="en-US" sz="1800" dirty="0"/>
+              <a:t>Justification of the Lesson</a:t>
+            </a:r>
+            <a:endParaRPr lang="en-US" sz="3600" dirty="0"/>
+          </a:p>
+        </p:txBody>
+      </p:sp>
+      <p:sp>
+        <p:nvSpPr>
+          <p:cNvPr id="5" name="Text 2"/>
+          <p:cNvSpPr/>
+          <p:nvPr/>
+        </p:nvSpPr>
+        <p:spPr>
+          <a:xfrm>
+            <a:off x="5349240" y="1783080"/>
+            <a:ext cx="6522415" cy="4663440"/>
+          </a:xfrm>
+          <a:prstGeom prst="rect">
+            <a:avLst/>
+          </a:prstGeom>
+          <a:noFill/>
+          <a:ln/>
+        </p:spPr>
+        <p:txBody>
+          <a:bodyPr wrap="square" lIns="0" tIns="0" rIns="0" bIns="0" rtlCol="0" anchor="t"/>
+          <a:lstStyle/>
+          <a:p>
+            <a:pPr algn="l" indent="0" marL="0">
+              <a:spcAft>
+                <a:spcPts val="800"/>
+              </a:spcAft>
+              <a:buNone/>
+            </a:pPr>
+            <a:r>
+              <a:rPr lang="en-US" sz="4000" dirty="0">
+                <a:solidFill>
+                  <a:srgbClr val="111111"/>
+                </a:solidFill>
+                <a:latin typeface="Times New Roman" pitchFamily="34" charset="0"/>
+                <a:ea typeface="Times New Roman" pitchFamily="34" charset="-122"/>
+                <a:cs typeface="Times New Roman" pitchFamily="34" charset="-120"/>
+              </a:rPr>
+              <a:t>This lesson helps us to understand regional inequalities in Cameroon and the policies to reduce them.</a:t>
+            </a:r>
+            <a:endParaRPr lang="en-US" sz="4000" dirty="0"/>
           </a:p>
         </p:txBody>
       </p:sp>
@@ -10203,9 +10277,48 @@
           </a:p>
         </p:txBody>
       </p:sp>
+      <p:sp>
+        <p:nvSpPr>
+          <p:cNvPr id="3" name="Text 1"/>
+          <p:cNvSpPr/>
+          <p:nvPr/>
+        </p:nvSpPr>
+        <p:spPr>
+          <a:xfrm>
+            <a:off x="457200" y="1005840"/>
+            <a:ext cx="11277295" cy="731520"/>
+          </a:xfrm>
+          <a:prstGeom prst="rect">
+            <a:avLst/>
+          </a:prstGeom>
+          <a:noFill/>
+          <a:ln/>
+        </p:spPr>
+        <p:txBody>
+          <a:bodyPr wrap="square" lIns="0" tIns="0" rIns="0" bIns="0" rtlCol="0" anchor="ctr"/>
+          <a:lstStyle/>
+          <a:p>
+            <a:pPr algn="ctr" indent="0" marL="0">
+              <a:buNone/>
+            </a:pPr>
+            <a:r>
+              <a:rPr lang="en-US" sz="3600" b="1" dirty="0">
+                <a:solidFill>
+                  <a:srgbClr val="990011"/>
+                </a:solidFill>
+                <a:latin typeface="Times New Roman" pitchFamily="34" charset="0"/>
+                <a:ea typeface="Times New Roman" pitchFamily="34" charset="-122"/>
+                <a:cs typeface="Times New Roman" pitchFamily="34" charset="-120"/>
+              </a:rPr>
+              <a:t>Activity 1</a:t>
+            </a:r>
+            <a:endParaRPr lang="en-US" sz="3600" dirty="0"/>
+          </a:p>
+        </p:txBody>
+      </p:sp>
       <p:pic>
         <p:nvPicPr>
-          <p:cNvPr id="3" name="Image 0" descr="/home/claude/f4/img/minesec_sheet.png">    </p:cNvPr>
+          <p:cNvPr id="4" name="Image 0" descr="/home/claude/f4/img/v2/core_periphery_big.png">    </p:cNvPr>
           <p:cNvPicPr>
             <a:picLocks noChangeAspect="1"/>
           </p:cNvPicPr>
@@ -10219,8 +10332,8 @@
         </p:blipFill>
         <p:spPr>
           <a:xfrm>
-            <a:off x="0" y="658368"/>
-            <a:ext cx="5120640" cy="5833872"/>
+            <a:off x="629930" y="1783080"/>
+            <a:ext cx="10931835" cy="4270248"/>
           </a:xfrm>
           <a:prstGeom prst="rect">
             <a:avLst/>
@@ -10229,14 +10342,14 @@
       </p:pic>
       <p:sp>
         <p:nvSpPr>
-          <p:cNvPr id="4" name="Text 1"/>
+          <p:cNvPr id="5" name="Text 2"/>
           <p:cNvSpPr/>
           <p:nvPr/>
         </p:nvSpPr>
         <p:spPr>
           <a:xfrm>
-            <a:off x="5349240" y="1005840"/>
-            <a:ext cx="6522415" cy="731520"/>
+            <a:off x="457200" y="6089904"/>
+            <a:ext cx="11277295" cy="347472"/>
           </a:xfrm>
           <a:prstGeom prst="rect">
             <a:avLst/>
@@ -10245,68 +10358,24 @@
           <a:ln/>
         </p:spPr>
         <p:txBody>
-          <a:bodyPr wrap="square" lIns="0" tIns="0" rIns="0" bIns="0" rtlCol="0" anchor="ctr">
-            <a:normAutofit/>
-          </a:bodyPr>
+          <a:bodyPr wrap="square" lIns="0" tIns="0" rIns="0" bIns="0" rtlCol="0" anchor="ctr"/>
           <a:lstStyle/>
           <a:p>
             <a:pPr algn="ctr" indent="0" marL="0">
               <a:buNone/>
             </a:pPr>
             <a:r>
-              <a:rPr lang="en-US" sz="3600" b="1" dirty="0">
-                <a:solidFill>
-                  <a:srgbClr val="990011"/>
+              <a:rPr lang="en-US" sz="1800" i="1" dirty="0">
+                <a:solidFill>
+                  <a:srgbClr val="555555"/>
                 </a:solidFill>
                 <a:latin typeface="Times New Roman" pitchFamily="34" charset="0"/>
                 <a:ea typeface="Times New Roman" pitchFamily="34" charset="-122"/>
                 <a:cs typeface="Times New Roman" pitchFamily="34" charset="-120"/>
               </a:rPr>
-              <a:t>Activity 1: Question</a:t>
-            </a:r>
-            <a:endParaRPr lang="en-US" sz="3600" dirty="0"/>
-          </a:p>
-        </p:txBody>
-      </p:sp>
-      <p:sp>
-        <p:nvSpPr>
-          <p:cNvPr id="5" name="Text 2"/>
-          <p:cNvSpPr/>
-          <p:nvPr/>
-        </p:nvSpPr>
-        <p:spPr>
-          <a:xfrm>
-            <a:off x="5349240" y="1783080"/>
-            <a:ext cx="6522415" cy="4663440"/>
-          </a:xfrm>
-          <a:prstGeom prst="rect">
-            <a:avLst/>
-          </a:prstGeom>
-          <a:noFill/>
-          <a:ln/>
-        </p:spPr>
-        <p:txBody>
-          <a:bodyPr wrap="square" lIns="0" tIns="0" rIns="0" bIns="0" rtlCol="0" anchor="t"/>
-          <a:lstStyle/>
-          <a:p>
-            <a:pPr algn="l" indent="0" marL="0">
-              <a:spcAft>
-                <a:spcPts val="800"/>
-              </a:spcAft>
-              <a:buNone/>
-            </a:pPr>
-            <a:r>
-              <a:rPr lang="en-US" sz="4000" dirty="0">
-                <a:solidFill>
-                  <a:srgbClr val="111111"/>
-                </a:solidFill>
-                <a:latin typeface="Times New Roman" pitchFamily="34" charset="0"/>
-                <a:ea typeface="Times New Roman" pitchFamily="34" charset="-122"/>
-                <a:cs typeface="Times New Roman" pitchFamily="34" charset="-120"/>
-              </a:rPr>
-              <a:t>Where do skilled people and capital go in the core-periphery model?</a:t>
-            </a:r>
-            <a:endParaRPr lang="en-US" sz="4000" dirty="0"/>
+              <a:t>A core and its periphery.</a:t>
+            </a:r>
+            <a:endParaRPr lang="en-US" sz="1800" dirty="0"/>
           </a:p>
         </p:txBody>
       </p:sp>
@@ -10481,7 +10550,7 @@
                 <a:ea typeface="Times New Roman" pitchFamily="34" charset="-122"/>
                 <a:cs typeface="Times New Roman" pitchFamily="34" charset="-120"/>
               </a:rPr>
-              <a:t>Activity 1: Answer</a:t>
+              <a:t>Activity 1: Question</a:t>
             </a:r>
             <a:endParaRPr lang="en-US" sz="3600" dirty="0"/>
           </a:p>
@@ -10523,7 +10592,7 @@
                 <a:ea typeface="Times New Roman" pitchFamily="34" charset="-122"/>
                 <a:cs typeface="Times New Roman" pitchFamily="34" charset="-120"/>
               </a:rPr>
-              <a:t>Towards the core (the most developed region).</a:t>
+              <a:t>Where do skilled people and capital go in the core-periphery model?</a:t>
             </a:r>
             <a:endParaRPr lang="en-US" sz="4000" dirty="0"/>
           </a:p>
@@ -10635,54 +10704,15 @@
                 <a:ea typeface="Calibri" pitchFamily="34" charset="-122"/>
                 <a:cs typeface="Calibri" pitchFamily="34" charset="-120"/>
               </a:rPr>
-              <a:t>2. CONTRASTING REGIONS</a:t>
+              <a:t>1. MODELS OF REGIONAL INEQUALITY</a:t>
             </a:r>
             <a:endParaRPr lang="en-US" sz="1400" dirty="0"/>
-          </a:p>
-        </p:txBody>
-      </p:sp>
-      <p:sp>
-        <p:nvSpPr>
-          <p:cNvPr id="3" name="Text 1"/>
-          <p:cNvSpPr/>
-          <p:nvPr/>
-        </p:nvSpPr>
-        <p:spPr>
-          <a:xfrm>
-            <a:off x="457200" y="1005840"/>
-            <a:ext cx="11277295" cy="731520"/>
-          </a:xfrm>
-          <a:prstGeom prst="rect">
-            <a:avLst/>
-          </a:prstGeom>
-          <a:noFill/>
-          <a:ln/>
-        </p:spPr>
-        <p:txBody>
-          <a:bodyPr wrap="square" lIns="0" tIns="0" rIns="0" bIns="0" rtlCol="0" anchor="ctr"/>
-          <a:lstStyle/>
-          <a:p>
-            <a:pPr algn="ctr" indent="0" marL="0">
-              <a:buNone/>
-            </a:pPr>
-            <a:r>
-              <a:rPr lang="en-US" sz="3600" b="1" dirty="0">
-                <a:solidFill>
-                  <a:srgbClr val="990011"/>
-                </a:solidFill>
-                <a:latin typeface="Times New Roman" pitchFamily="34" charset="0"/>
-                <a:ea typeface="Times New Roman" pitchFamily="34" charset="-122"/>
-                <a:cs typeface="Times New Roman" pitchFamily="34" charset="-120"/>
-              </a:rPr>
-              <a:t>Activity 2</a:t>
-            </a:r>
-            <a:endParaRPr lang="en-US" sz="3600" dirty="0"/>
           </a:p>
         </p:txBody>
       </p:sp>
       <p:pic>
         <p:nvPicPr>
-          <p:cNvPr id="4" name="Image 0" descr="/home/claude/f4/img/v2/cmr_contrast_big.png">    </p:cNvPr>
+          <p:cNvPr id="3" name="Image 0" descr="/home/claude/f4/img/minesec_sheet.png">    </p:cNvPr>
           <p:cNvPicPr>
             <a:picLocks noChangeAspect="1"/>
           </p:cNvPicPr>
@@ -10696,8 +10726,8 @@
         </p:blipFill>
         <p:spPr>
           <a:xfrm>
-            <a:off x="1825600" y="1783080"/>
-            <a:ext cx="8540496" cy="4270248"/>
+            <a:off x="0" y="658368"/>
+            <a:ext cx="5120640" cy="5833872"/>
           </a:xfrm>
           <a:prstGeom prst="rect">
             <a:avLst/>
@@ -10706,14 +10736,14 @@
       </p:pic>
       <p:sp>
         <p:nvSpPr>
-          <p:cNvPr id="5" name="Text 2"/>
+          <p:cNvPr id="4" name="Text 1"/>
           <p:cNvSpPr/>
           <p:nvPr/>
         </p:nvSpPr>
         <p:spPr>
           <a:xfrm>
-            <a:off x="457200" y="6089904"/>
-            <a:ext cx="11277295" cy="347472"/>
+            <a:off x="5349240" y="1005840"/>
+            <a:ext cx="6522415" cy="731520"/>
           </a:xfrm>
           <a:prstGeom prst="rect">
             <a:avLst/>
@@ -10722,24 +10752,68 @@
           <a:ln/>
         </p:spPr>
         <p:txBody>
-          <a:bodyPr wrap="square" lIns="0" tIns="0" rIns="0" bIns="0" rtlCol="0" anchor="ctr"/>
+          <a:bodyPr wrap="square" lIns="0" tIns="0" rIns="0" bIns="0" rtlCol="0" anchor="ctr">
+            <a:normAutofit/>
+          </a:bodyPr>
           <a:lstStyle/>
           <a:p>
             <a:pPr algn="ctr" indent="0" marL="0">
               <a:buNone/>
             </a:pPr>
             <a:r>
-              <a:rPr lang="en-US" sz="1800" i="1" dirty="0">
-                <a:solidFill>
-                  <a:srgbClr val="555555"/>
+              <a:rPr lang="en-US" sz="3600" b="1" dirty="0">
+                <a:solidFill>
+                  <a:srgbClr val="990011"/>
                 </a:solidFill>
                 <a:latin typeface="Times New Roman" pitchFamily="34" charset="0"/>
                 <a:ea typeface="Times New Roman" pitchFamily="34" charset="-122"/>
                 <a:cs typeface="Times New Roman" pitchFamily="34" charset="-120"/>
               </a:rPr>
-              <a:t>Prosperous and lagging regions.</a:t>
-            </a:r>
-            <a:endParaRPr lang="en-US" sz="1800" dirty="0"/>
+              <a:t>Activity 1: Answer</a:t>
+            </a:r>
+            <a:endParaRPr lang="en-US" sz="3600" dirty="0"/>
+          </a:p>
+        </p:txBody>
+      </p:sp>
+      <p:sp>
+        <p:nvSpPr>
+          <p:cNvPr id="5" name="Text 2"/>
+          <p:cNvSpPr/>
+          <p:nvPr/>
+        </p:nvSpPr>
+        <p:spPr>
+          <a:xfrm>
+            <a:off x="5349240" y="1783080"/>
+            <a:ext cx="6522415" cy="4663440"/>
+          </a:xfrm>
+          <a:prstGeom prst="rect">
+            <a:avLst/>
+          </a:prstGeom>
+          <a:noFill/>
+          <a:ln/>
+        </p:spPr>
+        <p:txBody>
+          <a:bodyPr wrap="square" lIns="0" tIns="0" rIns="0" bIns="0" rtlCol="0" anchor="t"/>
+          <a:lstStyle/>
+          <a:p>
+            <a:pPr algn="l" indent="0" marL="0">
+              <a:spcAft>
+                <a:spcPts val="800"/>
+              </a:spcAft>
+              <a:buNone/>
+            </a:pPr>
+            <a:r>
+              <a:rPr lang="en-US" sz="4000" dirty="0">
+                <a:solidFill>
+                  <a:srgbClr val="111111"/>
+                </a:solidFill>
+                <a:latin typeface="Times New Roman" pitchFamily="34" charset="0"/>
+                <a:ea typeface="Times New Roman" pitchFamily="34" charset="-122"/>
+                <a:cs typeface="Times New Roman" pitchFamily="34" charset="-120"/>
+              </a:rPr>
+              <a:t>Towards the core (the most developed region).</a:t>
+            </a:r>
+            <a:endParaRPr lang="en-US" sz="4000" dirty="0"/>
           </a:p>
         </p:txBody>
       </p:sp>
@@ -10855,9 +10929,48 @@
           </a:p>
         </p:txBody>
       </p:sp>
+      <p:sp>
+        <p:nvSpPr>
+          <p:cNvPr id="3" name="Text 1"/>
+          <p:cNvSpPr/>
+          <p:nvPr/>
+        </p:nvSpPr>
+        <p:spPr>
+          <a:xfrm>
+            <a:off x="457200" y="1005840"/>
+            <a:ext cx="11277295" cy="731520"/>
+          </a:xfrm>
+          <a:prstGeom prst="rect">
+            <a:avLst/>
+          </a:prstGeom>
+          <a:noFill/>
+          <a:ln/>
+        </p:spPr>
+        <p:txBody>
+          <a:bodyPr wrap="square" lIns="0" tIns="0" rIns="0" bIns="0" rtlCol="0" anchor="ctr"/>
+          <a:lstStyle/>
+          <a:p>
+            <a:pPr algn="ctr" indent="0" marL="0">
+              <a:buNone/>
+            </a:pPr>
+            <a:r>
+              <a:rPr lang="en-US" sz="3600" b="1" dirty="0">
+                <a:solidFill>
+                  <a:srgbClr val="990011"/>
+                </a:solidFill>
+                <a:latin typeface="Times New Roman" pitchFamily="34" charset="0"/>
+                <a:ea typeface="Times New Roman" pitchFamily="34" charset="-122"/>
+                <a:cs typeface="Times New Roman" pitchFamily="34" charset="-120"/>
+              </a:rPr>
+              <a:t>Activity 2</a:t>
+            </a:r>
+            <a:endParaRPr lang="en-US" sz="3600" dirty="0"/>
+          </a:p>
+        </p:txBody>
+      </p:sp>
       <p:pic>
         <p:nvPicPr>
-          <p:cNvPr id="3" name="Image 0" descr="/home/claude/f4/img/minesec_sheet.png">    </p:cNvPr>
+          <p:cNvPr id="4" name="Image 0" descr="/home/claude/f4/img/v2/cmr_contrast_big.png">    </p:cNvPr>
           <p:cNvPicPr>
             <a:picLocks noChangeAspect="1"/>
           </p:cNvPicPr>
@@ -10871,8 +10984,8 @@
         </p:blipFill>
         <p:spPr>
           <a:xfrm>
-            <a:off x="0" y="658368"/>
-            <a:ext cx="5120640" cy="5833872"/>
+            <a:off x="1825600" y="1783080"/>
+            <a:ext cx="8540496" cy="4270248"/>
           </a:xfrm>
           <a:prstGeom prst="rect">
             <a:avLst/>
@@ -10881,14 +10994,14 @@
       </p:pic>
       <p:sp>
         <p:nvSpPr>
-          <p:cNvPr id="4" name="Text 1"/>
+          <p:cNvPr id="5" name="Text 2"/>
           <p:cNvSpPr/>
           <p:nvPr/>
         </p:nvSpPr>
         <p:spPr>
           <a:xfrm>
-            <a:off x="5349240" y="1005840"/>
-            <a:ext cx="6522415" cy="731520"/>
+            <a:off x="457200" y="6089904"/>
+            <a:ext cx="11277295" cy="347472"/>
           </a:xfrm>
           <a:prstGeom prst="rect">
             <a:avLst/>
@@ -10897,68 +11010,24 @@
           <a:ln/>
         </p:spPr>
         <p:txBody>
-          <a:bodyPr wrap="square" lIns="0" tIns="0" rIns="0" bIns="0" rtlCol="0" anchor="ctr">
-            <a:normAutofit/>
-          </a:bodyPr>
+          <a:bodyPr wrap="square" lIns="0" tIns="0" rIns="0" bIns="0" rtlCol="0" anchor="ctr"/>
           <a:lstStyle/>
           <a:p>
             <a:pPr algn="ctr" indent="0" marL="0">
               <a:buNone/>
             </a:pPr>
             <a:r>
-              <a:rPr lang="en-US" sz="3600" b="1" dirty="0">
-                <a:solidFill>
-                  <a:srgbClr val="990011"/>
+              <a:rPr lang="en-US" sz="1800" i="1" dirty="0">
+                <a:solidFill>
+                  <a:srgbClr val="555555"/>
                 </a:solidFill>
                 <a:latin typeface="Times New Roman" pitchFamily="34" charset="0"/>
                 <a:ea typeface="Times New Roman" pitchFamily="34" charset="-122"/>
                 <a:cs typeface="Times New Roman" pitchFamily="34" charset="-120"/>
               </a:rPr>
-              <a:t>Activity 2: Question</a:t>
-            </a:r>
-            <a:endParaRPr lang="en-US" sz="3600" dirty="0"/>
-          </a:p>
-        </p:txBody>
-      </p:sp>
-      <p:sp>
-        <p:nvSpPr>
-          <p:cNvPr id="5" name="Text 2"/>
-          <p:cNvSpPr/>
-          <p:nvPr/>
-        </p:nvSpPr>
-        <p:spPr>
-          <a:xfrm>
-            <a:off x="5349240" y="1783080"/>
-            <a:ext cx="6522415" cy="4663440"/>
-          </a:xfrm>
-          <a:prstGeom prst="rect">
-            <a:avLst/>
-          </a:prstGeom>
-          <a:noFill/>
-          <a:ln/>
-        </p:spPr>
-        <p:txBody>
-          <a:bodyPr wrap="square" lIns="0" tIns="0" rIns="0" bIns="0" rtlCol="0" anchor="t"/>
-          <a:lstStyle/>
-          <a:p>
-            <a:pPr algn="l" indent="0" marL="0">
-              <a:spcAft>
-                <a:spcPts val="800"/>
-              </a:spcAft>
-              <a:buNone/>
-            </a:pPr>
-            <a:r>
-              <a:rPr lang="en-US" sz="4000" dirty="0">
-                <a:solidFill>
-                  <a:srgbClr val="111111"/>
-                </a:solidFill>
-                <a:latin typeface="Times New Roman" pitchFamily="34" charset="0"/>
-                <a:ea typeface="Times New Roman" pitchFamily="34" charset="-122"/>
-                <a:cs typeface="Times New Roman" pitchFamily="34" charset="-120"/>
-              </a:rPr>
-              <a:t>Is Douala a prosperous or a lagging region?</a:t>
-            </a:r>
-            <a:endParaRPr lang="en-US" sz="4000" dirty="0"/>
+              <a:t>Prosperous and lagging regions.</a:t>
+            </a:r>
+            <a:endParaRPr lang="en-US" sz="1800" dirty="0"/>
           </a:p>
         </p:txBody>
       </p:sp>
@@ -11133,7 +11202,7 @@
                 <a:ea typeface="Times New Roman" pitchFamily="34" charset="-122"/>
                 <a:cs typeface="Times New Roman" pitchFamily="34" charset="-120"/>
               </a:rPr>
-              <a:t>Activity 2: Answer</a:t>
+              <a:t>Activity 2: Question</a:t>
             </a:r>
             <a:endParaRPr lang="en-US" sz="3600" dirty="0"/>
           </a:p>
@@ -11175,7 +11244,7 @@
                 <a:ea typeface="Times New Roman" pitchFamily="34" charset="-122"/>
                 <a:cs typeface="Times New Roman" pitchFamily="34" charset="-120"/>
               </a:rPr>
-              <a:t>A prosperous region (a core).</a:t>
+              <a:t>Is Douala a prosperous or a lagging region?</a:t>
             </a:r>
             <a:endParaRPr lang="en-US" sz="4000" dirty="0"/>
           </a:p>
@@ -11287,54 +11356,15 @@
                 <a:ea typeface="Calibri" pitchFamily="34" charset="-122"/>
                 <a:cs typeface="Calibri" pitchFamily="34" charset="-120"/>
               </a:rPr>
-              <a:t>3. INDICATORS</a:t>
+              <a:t>2. CONTRASTING REGIONS</a:t>
             </a:r>
             <a:endParaRPr lang="en-US" sz="1400" dirty="0"/>
-          </a:p>
-        </p:txBody>
-      </p:sp>
-      <p:sp>
-        <p:nvSpPr>
-          <p:cNvPr id="3" name="Text 1"/>
-          <p:cNvSpPr/>
-          <p:nvPr/>
-        </p:nvSpPr>
-        <p:spPr>
-          <a:xfrm>
-            <a:off x="457200" y="1005840"/>
-            <a:ext cx="11277295" cy="731520"/>
-          </a:xfrm>
-          <a:prstGeom prst="rect">
-            <a:avLst/>
-          </a:prstGeom>
-          <a:noFill/>
-          <a:ln/>
-        </p:spPr>
-        <p:txBody>
-          <a:bodyPr wrap="square" lIns="0" tIns="0" rIns="0" bIns="0" rtlCol="0" anchor="ctr"/>
-          <a:lstStyle/>
-          <a:p>
-            <a:pPr algn="ctr" indent="0" marL="0">
-              <a:buNone/>
-            </a:pPr>
-            <a:r>
-              <a:rPr lang="en-US" sz="3600" b="1" dirty="0">
-                <a:solidFill>
-                  <a:srgbClr val="990011"/>
-                </a:solidFill>
-                <a:latin typeface="Times New Roman" pitchFamily="34" charset="0"/>
-                <a:ea typeface="Times New Roman" pitchFamily="34" charset="-122"/>
-                <a:cs typeface="Times New Roman" pitchFamily="34" charset="-120"/>
-              </a:rPr>
-              <a:t>Activity 3</a:t>
-            </a:r>
-            <a:endParaRPr lang="en-US" sz="3600" dirty="0"/>
           </a:p>
         </p:txBody>
       </p:sp>
       <p:pic>
         <p:nvPicPr>
-          <p:cNvPr id="4" name="Image 0" descr="/home/claude/f4/img/v2/cmr_dev_table_big.png">    </p:cNvPr>
+          <p:cNvPr id="3" name="Image 0" descr="/home/claude/f4/img/minesec_sheet.png">    </p:cNvPr>
           <p:cNvPicPr>
             <a:picLocks noChangeAspect="1"/>
           </p:cNvPicPr>
@@ -11348,8 +11378,8 @@
         </p:blipFill>
         <p:spPr>
           <a:xfrm>
-            <a:off x="629930" y="1783080"/>
-            <a:ext cx="10931835" cy="4270248"/>
+            <a:off x="0" y="658368"/>
+            <a:ext cx="5120640" cy="5833872"/>
           </a:xfrm>
           <a:prstGeom prst="rect">
             <a:avLst/>
@@ -11358,14 +11388,14 @@
       </p:pic>
       <p:sp>
         <p:nvSpPr>
-          <p:cNvPr id="5" name="Text 2"/>
+          <p:cNvPr id="4" name="Text 1"/>
           <p:cNvSpPr/>
           <p:nvPr/>
         </p:nvSpPr>
         <p:spPr>
           <a:xfrm>
-            <a:off x="457200" y="6089904"/>
-            <a:ext cx="11277295" cy="347472"/>
+            <a:off x="5349240" y="1005840"/>
+            <a:ext cx="6522415" cy="731520"/>
           </a:xfrm>
           <a:prstGeom prst="rect">
             <a:avLst/>
@@ -11374,24 +11404,68 @@
           <a:ln/>
         </p:spPr>
         <p:txBody>
-          <a:bodyPr wrap="square" lIns="0" tIns="0" rIns="0" bIns="0" rtlCol="0" anchor="ctr"/>
+          <a:bodyPr wrap="square" lIns="0" tIns="0" rIns="0" bIns="0" rtlCol="0" anchor="ctr">
+            <a:normAutofit/>
+          </a:bodyPr>
           <a:lstStyle/>
           <a:p>
             <a:pPr algn="ctr" indent="0" marL="0">
               <a:buNone/>
             </a:pPr>
             <a:r>
-              <a:rPr lang="en-US" sz="1800" i="1" dirty="0">
-                <a:solidFill>
-                  <a:srgbClr val="555555"/>
+              <a:rPr lang="en-US" sz="3600" b="1" dirty="0">
+                <a:solidFill>
+                  <a:srgbClr val="990011"/>
                 </a:solidFill>
                 <a:latin typeface="Times New Roman" pitchFamily="34" charset="0"/>
                 <a:ea typeface="Times New Roman" pitchFamily="34" charset="-122"/>
                 <a:cs typeface="Times New Roman" pitchFamily="34" charset="-120"/>
               </a:rPr>
-              <a:t>Coastal lowlands and Adamawa compared.</a:t>
-            </a:r>
-            <a:endParaRPr lang="en-US" sz="1800" dirty="0"/>
+              <a:t>Activity 2: Answer</a:t>
+            </a:r>
+            <a:endParaRPr lang="en-US" sz="3600" dirty="0"/>
+          </a:p>
+        </p:txBody>
+      </p:sp>
+      <p:sp>
+        <p:nvSpPr>
+          <p:cNvPr id="5" name="Text 2"/>
+          <p:cNvSpPr/>
+          <p:nvPr/>
+        </p:nvSpPr>
+        <p:spPr>
+          <a:xfrm>
+            <a:off x="5349240" y="1783080"/>
+            <a:ext cx="6522415" cy="4663440"/>
+          </a:xfrm>
+          <a:prstGeom prst="rect">
+            <a:avLst/>
+          </a:prstGeom>
+          <a:noFill/>
+          <a:ln/>
+        </p:spPr>
+        <p:txBody>
+          <a:bodyPr wrap="square" lIns="0" tIns="0" rIns="0" bIns="0" rtlCol="0" anchor="t"/>
+          <a:lstStyle/>
+          <a:p>
+            <a:pPr algn="l" indent="0" marL="0">
+              <a:spcAft>
+                <a:spcPts val="800"/>
+              </a:spcAft>
+              <a:buNone/>
+            </a:pPr>
+            <a:r>
+              <a:rPr lang="en-US" sz="4000" dirty="0">
+                <a:solidFill>
+                  <a:srgbClr val="111111"/>
+                </a:solidFill>
+                <a:latin typeface="Times New Roman" pitchFamily="34" charset="0"/>
+                <a:ea typeface="Times New Roman" pitchFamily="34" charset="-122"/>
+                <a:cs typeface="Times New Roman" pitchFamily="34" charset="-120"/>
+              </a:rPr>
+              <a:t>A prosperous region (a core).</a:t>
+            </a:r>
+            <a:endParaRPr lang="en-US" sz="4000" dirty="0"/>
           </a:p>
         </p:txBody>
       </p:sp>
@@ -11507,9 +11581,48 @@
           </a:p>
         </p:txBody>
       </p:sp>
+      <p:sp>
+        <p:nvSpPr>
+          <p:cNvPr id="3" name="Text 1"/>
+          <p:cNvSpPr/>
+          <p:nvPr/>
+        </p:nvSpPr>
+        <p:spPr>
+          <a:xfrm>
+            <a:off x="457200" y="1005840"/>
+            <a:ext cx="11277295" cy="731520"/>
+          </a:xfrm>
+          <a:prstGeom prst="rect">
+            <a:avLst/>
+          </a:prstGeom>
+          <a:noFill/>
+          <a:ln/>
+        </p:spPr>
+        <p:txBody>
+          <a:bodyPr wrap="square" lIns="0" tIns="0" rIns="0" bIns="0" rtlCol="0" anchor="ctr"/>
+          <a:lstStyle/>
+          <a:p>
+            <a:pPr algn="ctr" indent="0" marL="0">
+              <a:buNone/>
+            </a:pPr>
+            <a:r>
+              <a:rPr lang="en-US" sz="3600" b="1" dirty="0">
+                <a:solidFill>
+                  <a:srgbClr val="990011"/>
+                </a:solidFill>
+                <a:latin typeface="Times New Roman" pitchFamily="34" charset="0"/>
+                <a:ea typeface="Times New Roman" pitchFamily="34" charset="-122"/>
+                <a:cs typeface="Times New Roman" pitchFamily="34" charset="-120"/>
+              </a:rPr>
+              <a:t>Activity 3</a:t>
+            </a:r>
+            <a:endParaRPr lang="en-US" sz="3600" dirty="0"/>
+          </a:p>
+        </p:txBody>
+      </p:sp>
       <p:pic>
         <p:nvPicPr>
-          <p:cNvPr id="3" name="Image 0" descr="/home/claude/f4/img/minesec_sheet.png">    </p:cNvPr>
+          <p:cNvPr id="4" name="Image 0" descr="/home/claude/f4/img/v2/cmr_dev_table_big.png">    </p:cNvPr>
           <p:cNvPicPr>
             <a:picLocks noChangeAspect="1"/>
           </p:cNvPicPr>
@@ -11523,8 +11636,8 @@
         </p:blipFill>
         <p:spPr>
           <a:xfrm>
-            <a:off x="0" y="658368"/>
-            <a:ext cx="5120640" cy="5833872"/>
+            <a:off x="629930" y="1783080"/>
+            <a:ext cx="10931835" cy="4270248"/>
           </a:xfrm>
           <a:prstGeom prst="rect">
             <a:avLst/>
@@ -11533,14 +11646,14 @@
       </p:pic>
       <p:sp>
         <p:nvSpPr>
-          <p:cNvPr id="4" name="Text 1"/>
+          <p:cNvPr id="5" name="Text 2"/>
           <p:cNvSpPr/>
           <p:nvPr/>
         </p:nvSpPr>
         <p:spPr>
           <a:xfrm>
-            <a:off x="5349240" y="1005840"/>
-            <a:ext cx="6522415" cy="731520"/>
+            <a:off x="457200" y="6089904"/>
+            <a:ext cx="11277295" cy="347472"/>
           </a:xfrm>
           <a:prstGeom prst="rect">
             <a:avLst/>
@@ -11549,68 +11662,24 @@
           <a:ln/>
         </p:spPr>
         <p:txBody>
-          <a:bodyPr wrap="square" lIns="0" tIns="0" rIns="0" bIns="0" rtlCol="0" anchor="ctr">
-            <a:normAutofit/>
-          </a:bodyPr>
+          <a:bodyPr wrap="square" lIns="0" tIns="0" rIns="0" bIns="0" rtlCol="0" anchor="ctr"/>
           <a:lstStyle/>
           <a:p>
             <a:pPr algn="ctr" indent="0" marL="0">
               <a:buNone/>
             </a:pPr>
             <a:r>
-              <a:rPr lang="en-US" sz="3600" b="1" dirty="0">
-                <a:solidFill>
-                  <a:srgbClr val="990011"/>
+              <a:rPr lang="en-US" sz="1800" i="1" dirty="0">
+                <a:solidFill>
+                  <a:srgbClr val="555555"/>
                 </a:solidFill>
                 <a:latin typeface="Times New Roman" pitchFamily="34" charset="0"/>
                 <a:ea typeface="Times New Roman" pitchFamily="34" charset="-122"/>
                 <a:cs typeface="Times New Roman" pitchFamily="34" charset="-120"/>
               </a:rPr>
-              <a:t>Activity 3: Question</a:t>
-            </a:r>
-            <a:endParaRPr lang="en-US" sz="3600" dirty="0"/>
-          </a:p>
-        </p:txBody>
-      </p:sp>
-      <p:sp>
-        <p:nvSpPr>
-          <p:cNvPr id="5" name="Text 2"/>
-          <p:cNvSpPr/>
-          <p:nvPr/>
-        </p:nvSpPr>
-        <p:spPr>
-          <a:xfrm>
-            <a:off x="5349240" y="1783080"/>
-            <a:ext cx="6522415" cy="4663440"/>
-          </a:xfrm>
-          <a:prstGeom prst="rect">
-            <a:avLst/>
-          </a:prstGeom>
-          <a:noFill/>
-          <a:ln/>
-        </p:spPr>
-        <p:txBody>
-          <a:bodyPr wrap="square" lIns="0" tIns="0" rIns="0" bIns="0" rtlCol="0" anchor="t"/>
-          <a:lstStyle/>
-          <a:p>
-            <a:pPr algn="l" indent="0" marL="0">
-              <a:spcAft>
-                <a:spcPts val="800"/>
-              </a:spcAft>
-              <a:buNone/>
-            </a:pPr>
-            <a:r>
-              <a:rPr lang="en-US" sz="4000" dirty="0">
-                <a:solidFill>
-                  <a:srgbClr val="111111"/>
-                </a:solidFill>
-                <a:latin typeface="Times New Roman" pitchFamily="34" charset="0"/>
-                <a:ea typeface="Times New Roman" pitchFamily="34" charset="-122"/>
-                <a:cs typeface="Times New Roman" pitchFamily="34" charset="-120"/>
-              </a:rPr>
-              <a:t>Which region has more schools and hospitals?</a:t>
-            </a:r>
-            <a:endParaRPr lang="en-US" sz="4000" dirty="0"/>
+              <a:t>Coastal lowlands and Adamawa compared.</a:t>
+            </a:r>
+            <a:endParaRPr lang="en-US" sz="1800" dirty="0"/>
           </a:p>
         </p:txBody>
       </p:sp>
@@ -11785,7 +11854,7 @@
                 <a:ea typeface="Times New Roman" pitchFamily="34" charset="-122"/>
                 <a:cs typeface="Times New Roman" pitchFamily="34" charset="-120"/>
               </a:rPr>
-              <a:t>Activity 3: Answer</a:t>
+              <a:t>Activity 3: Question</a:t>
             </a:r>
             <a:endParaRPr lang="en-US" sz="3600" dirty="0"/>
           </a:p>
@@ -11827,7 +11896,7 @@
                 <a:ea typeface="Times New Roman" pitchFamily="34" charset="-122"/>
                 <a:cs typeface="Times New Roman" pitchFamily="34" charset="-120"/>
               </a:rPr>
-              <a:t>The coastal lowlands (Littoral).</a:t>
+              <a:t>Which region has more schools and hospitals?</a:t>
             </a:r>
             <a:endParaRPr lang="en-US" sz="4000" dirty="0"/>
           </a:p>
@@ -11939,54 +12008,15 @@
                 <a:ea typeface="Calibri" pitchFamily="34" charset="-122"/>
                 <a:cs typeface="Calibri" pitchFamily="34" charset="-120"/>
               </a:rPr>
-              <a:t>4. FACTORS</a:t>
+              <a:t>3. INDICATORS</a:t>
             </a:r>
             <a:endParaRPr lang="en-US" sz="1400" dirty="0"/>
-          </a:p>
-        </p:txBody>
-      </p:sp>
-      <p:sp>
-        <p:nvSpPr>
-          <p:cNvPr id="3" name="Text 1"/>
-          <p:cNvSpPr/>
-          <p:nvPr/>
-        </p:nvSpPr>
-        <p:spPr>
-          <a:xfrm>
-            <a:off x="457200" y="1005840"/>
-            <a:ext cx="11277295" cy="731520"/>
-          </a:xfrm>
-          <a:prstGeom prst="rect">
-            <a:avLst/>
-          </a:prstGeom>
-          <a:noFill/>
-          <a:ln/>
-        </p:spPr>
-        <p:txBody>
-          <a:bodyPr wrap="square" lIns="0" tIns="0" rIns="0" bIns="0" rtlCol="0" anchor="ctr"/>
-          <a:lstStyle/>
-          <a:p>
-            <a:pPr algn="ctr" indent="0" marL="0">
-              <a:buNone/>
-            </a:pPr>
-            <a:r>
-              <a:rPr lang="en-US" sz="3600" b="1" dirty="0">
-                <a:solidFill>
-                  <a:srgbClr val="990011"/>
-                </a:solidFill>
-                <a:latin typeface="Times New Roman" pitchFamily="34" charset="0"/>
-                <a:ea typeface="Times New Roman" pitchFamily="34" charset="-122"/>
-                <a:cs typeface="Times New Roman" pitchFamily="34" charset="-120"/>
-              </a:rPr>
-              <a:t>Activity 4</a:t>
-            </a:r>
-            <a:endParaRPr lang="en-US" sz="3600" dirty="0"/>
           </a:p>
         </p:txBody>
       </p:sp>
       <p:pic>
         <p:nvPicPr>
-          <p:cNvPr id="4" name="Image 0" descr="/home/claude/f4/img/v2/lsa_douala.jpg">    </p:cNvPr>
+          <p:cNvPr id="3" name="Image 0" descr="/home/claude/f4/img/minesec_sheet.png">    </p:cNvPr>
           <p:cNvPicPr>
             <a:picLocks noChangeAspect="1"/>
           </p:cNvPicPr>
@@ -12000,8 +12030,8 @@
         </p:blipFill>
         <p:spPr>
           <a:xfrm>
-            <a:off x="2246610" y="1783080"/>
-            <a:ext cx="7698475" cy="4270248"/>
+            <a:off x="0" y="658368"/>
+            <a:ext cx="5120640" cy="5833872"/>
           </a:xfrm>
           <a:prstGeom prst="rect">
             <a:avLst/>
@@ -12010,14 +12040,14 @@
       </p:pic>
       <p:sp>
         <p:nvSpPr>
-          <p:cNvPr id="5" name="Text 2"/>
+          <p:cNvPr id="4" name="Text 1"/>
           <p:cNvSpPr/>
           <p:nvPr/>
         </p:nvSpPr>
         <p:spPr>
           <a:xfrm>
-            <a:off x="457200" y="6089904"/>
-            <a:ext cx="11277295" cy="347472"/>
+            <a:off x="5349240" y="1005840"/>
+            <a:ext cx="6522415" cy="731520"/>
           </a:xfrm>
           <a:prstGeom prst="rect">
             <a:avLst/>
@@ -12026,24 +12056,68 @@
           <a:ln/>
         </p:spPr>
         <p:txBody>
-          <a:bodyPr wrap="square" lIns="0" tIns="0" rIns="0" bIns="0" rtlCol="0" anchor="ctr"/>
+          <a:bodyPr wrap="square" lIns="0" tIns="0" rIns="0" bIns="0" rtlCol="0" anchor="ctr">
+            <a:normAutofit/>
+          </a:bodyPr>
           <a:lstStyle/>
           <a:p>
             <a:pPr algn="ctr" indent="0" marL="0">
               <a:buNone/>
             </a:pPr>
             <a:r>
-              <a:rPr lang="en-US" sz="1800" i="1" dirty="0">
-                <a:solidFill>
-                  <a:srgbClr val="555555"/>
+              <a:rPr lang="en-US" sz="3600" b="1" dirty="0">
+                <a:solidFill>
+                  <a:srgbClr val="990011"/>
                 </a:solidFill>
                 <a:latin typeface="Times New Roman" pitchFamily="34" charset="0"/>
                 <a:ea typeface="Times New Roman" pitchFamily="34" charset="-122"/>
                 <a:cs typeface="Times New Roman" pitchFamily="34" charset="-120"/>
               </a:rPr>
-              <a:t>Douala.</a:t>
-            </a:r>
-            <a:endParaRPr lang="en-US" sz="1800" dirty="0"/>
+              <a:t>Activity 3: Answer</a:t>
+            </a:r>
+            <a:endParaRPr lang="en-US" sz="3600" dirty="0"/>
+          </a:p>
+        </p:txBody>
+      </p:sp>
+      <p:sp>
+        <p:nvSpPr>
+          <p:cNvPr id="5" name="Text 2"/>
+          <p:cNvSpPr/>
+          <p:nvPr/>
+        </p:nvSpPr>
+        <p:spPr>
+          <a:xfrm>
+            <a:off x="5349240" y="1783080"/>
+            <a:ext cx="6522415" cy="4663440"/>
+          </a:xfrm>
+          <a:prstGeom prst="rect">
+            <a:avLst/>
+          </a:prstGeom>
+          <a:noFill/>
+          <a:ln/>
+        </p:spPr>
+        <p:txBody>
+          <a:bodyPr wrap="square" lIns="0" tIns="0" rIns="0" bIns="0" rtlCol="0" anchor="t"/>
+          <a:lstStyle/>
+          <a:p>
+            <a:pPr algn="l" indent="0" marL="0">
+              <a:spcAft>
+                <a:spcPts val="800"/>
+              </a:spcAft>
+              <a:buNone/>
+            </a:pPr>
+            <a:r>
+              <a:rPr lang="en-US" sz="4000" dirty="0">
+                <a:solidFill>
+                  <a:srgbClr val="111111"/>
+                </a:solidFill>
+                <a:latin typeface="Times New Roman" pitchFamily="34" charset="0"/>
+                <a:ea typeface="Times New Roman" pitchFamily="34" charset="-122"/>
+                <a:cs typeface="Times New Roman" pitchFamily="34" charset="-120"/>
+              </a:rPr>
+              <a:t>The coastal lowlands (Littoral).</a:t>
+            </a:r>
+            <a:endParaRPr lang="en-US" sz="4000" dirty="0"/>
           </a:p>
         </p:txBody>
       </p:sp>
@@ -12159,9 +12233,48 @@
           </a:p>
         </p:txBody>
       </p:sp>
+      <p:sp>
+        <p:nvSpPr>
+          <p:cNvPr id="3" name="Text 1"/>
+          <p:cNvSpPr/>
+          <p:nvPr/>
+        </p:nvSpPr>
+        <p:spPr>
+          <a:xfrm>
+            <a:off x="457200" y="1005840"/>
+            <a:ext cx="11277295" cy="731520"/>
+          </a:xfrm>
+          <a:prstGeom prst="rect">
+            <a:avLst/>
+          </a:prstGeom>
+          <a:noFill/>
+          <a:ln/>
+        </p:spPr>
+        <p:txBody>
+          <a:bodyPr wrap="square" lIns="0" tIns="0" rIns="0" bIns="0" rtlCol="0" anchor="ctr"/>
+          <a:lstStyle/>
+          <a:p>
+            <a:pPr algn="ctr" indent="0" marL="0">
+              <a:buNone/>
+            </a:pPr>
+            <a:r>
+              <a:rPr lang="en-US" sz="3600" b="1" dirty="0">
+                <a:solidFill>
+                  <a:srgbClr val="990011"/>
+                </a:solidFill>
+                <a:latin typeface="Times New Roman" pitchFamily="34" charset="0"/>
+                <a:ea typeface="Times New Roman" pitchFamily="34" charset="-122"/>
+                <a:cs typeface="Times New Roman" pitchFamily="34" charset="-120"/>
+              </a:rPr>
+              <a:t>Activity 4</a:t>
+            </a:r>
+            <a:endParaRPr lang="en-US" sz="3600" dirty="0"/>
+          </a:p>
+        </p:txBody>
+      </p:sp>
       <p:pic>
         <p:nvPicPr>
-          <p:cNvPr id="3" name="Image 0" descr="/home/claude/f4/img/minesec_sheet.png">    </p:cNvPr>
+          <p:cNvPr id="4" name="Image 0" descr="/home/claude/f4/img/v2/lsa_douala.jpg">    </p:cNvPr>
           <p:cNvPicPr>
             <a:picLocks noChangeAspect="1"/>
           </p:cNvPicPr>
@@ -12175,8 +12288,8 @@
         </p:blipFill>
         <p:spPr>
           <a:xfrm>
-            <a:off x="0" y="658368"/>
-            <a:ext cx="5120640" cy="5833872"/>
+            <a:off x="2246610" y="1783080"/>
+            <a:ext cx="7698475" cy="4270248"/>
           </a:xfrm>
           <a:prstGeom prst="rect">
             <a:avLst/>
@@ -12185,14 +12298,14 @@
       </p:pic>
       <p:sp>
         <p:nvSpPr>
-          <p:cNvPr id="4" name="Text 1"/>
+          <p:cNvPr id="5" name="Text 2"/>
           <p:cNvSpPr/>
           <p:nvPr/>
         </p:nvSpPr>
         <p:spPr>
           <a:xfrm>
-            <a:off x="5349240" y="1005840"/>
-            <a:ext cx="6522415" cy="731520"/>
+            <a:off x="457200" y="6089904"/>
+            <a:ext cx="11277295" cy="347472"/>
           </a:xfrm>
           <a:prstGeom prst="rect">
             <a:avLst/>
@@ -12201,68 +12314,24 @@
           <a:ln/>
         </p:spPr>
         <p:txBody>
-          <a:bodyPr wrap="square" lIns="0" tIns="0" rIns="0" bIns="0" rtlCol="0" anchor="ctr">
-            <a:normAutofit/>
-          </a:bodyPr>
+          <a:bodyPr wrap="square" lIns="0" tIns="0" rIns="0" bIns="0" rtlCol="0" anchor="ctr"/>
           <a:lstStyle/>
           <a:p>
             <a:pPr algn="ctr" indent="0" marL="0">
               <a:buNone/>
             </a:pPr>
             <a:r>
-              <a:rPr lang="en-US" sz="3600" b="1" dirty="0">
-                <a:solidFill>
-                  <a:srgbClr val="990011"/>
+              <a:rPr lang="en-US" sz="1800" i="1" dirty="0">
+                <a:solidFill>
+                  <a:srgbClr val="555555"/>
                 </a:solidFill>
                 <a:latin typeface="Times New Roman" pitchFamily="34" charset="0"/>
                 <a:ea typeface="Times New Roman" pitchFamily="34" charset="-122"/>
                 <a:cs typeface="Times New Roman" pitchFamily="34" charset="-120"/>
               </a:rPr>
-              <a:t>Activity 4: Question</a:t>
-            </a:r>
-            <a:endParaRPr lang="en-US" sz="3600" dirty="0"/>
-          </a:p>
-        </p:txBody>
-      </p:sp>
-      <p:sp>
-        <p:nvSpPr>
-          <p:cNvPr id="5" name="Text 2"/>
-          <p:cNvSpPr/>
-          <p:nvPr/>
-        </p:nvSpPr>
-        <p:spPr>
-          <a:xfrm>
-            <a:off x="5349240" y="1783080"/>
-            <a:ext cx="6522415" cy="4663440"/>
-          </a:xfrm>
-          <a:prstGeom prst="rect">
-            <a:avLst/>
-          </a:prstGeom>
-          <a:noFill/>
-          <a:ln/>
-        </p:spPr>
-        <p:txBody>
-          <a:bodyPr wrap="square" lIns="0" tIns="0" rIns="0" bIns="0" rtlCol="0" anchor="t"/>
-          <a:lstStyle/>
-          <a:p>
-            <a:pPr algn="l" indent="0" marL="0">
-              <a:spcAft>
-                <a:spcPts val="800"/>
-              </a:spcAft>
-              <a:buNone/>
-            </a:pPr>
-            <a:r>
-              <a:rPr lang="en-US" sz="4000" dirty="0">
-                <a:solidFill>
-                  <a:srgbClr val="111111"/>
-                </a:solidFill>
-                <a:latin typeface="Times New Roman" pitchFamily="34" charset="0"/>
-                <a:ea typeface="Times New Roman" pitchFamily="34" charset="-122"/>
-                <a:cs typeface="Times New Roman" pitchFamily="34" charset="-120"/>
-              </a:rPr>
-              <a:t>Give one natural advantage of the coastal lowlands.</a:t>
-            </a:r>
-            <a:endParaRPr lang="en-US" sz="4000" dirty="0"/>
+              <a:t>Douala.</a:t>
+            </a:r>
+            <a:endParaRPr lang="en-US" sz="1800" dirty="0"/>
           </a:p>
         </p:txBody>
       </p:sp>
@@ -13446,7 +13515,7 @@
                 <a:ea typeface="Times New Roman" pitchFamily="34" charset="-122"/>
                 <a:cs typeface="Times New Roman" pitchFamily="34" charset="-120"/>
               </a:rPr>
-              <a:t>Activity 4: Answer</a:t>
+              <a:t>Activity 4: Question</a:t>
             </a:r>
             <a:endParaRPr lang="en-US" sz="3600" dirty="0"/>
           </a:p>
@@ -13488,7 +13557,7 @@
                 <a:ea typeface="Times New Roman" pitchFamily="34" charset="-122"/>
                 <a:cs typeface="Times New Roman" pitchFamily="34" charset="-120"/>
               </a:rPr>
-              <a:t>Access to the sea (port), also oil and fertile soils.</a:t>
+              <a:t>Give one natural advantage of the coastal lowlands.</a:t>
             </a:r>
             <a:endParaRPr lang="en-US" sz="4000" dirty="0"/>
           </a:p>
@@ -13600,54 +13669,15 @@
                 <a:ea typeface="Calibri" pitchFamily="34" charset="-122"/>
                 <a:cs typeface="Calibri" pitchFamily="34" charset="-120"/>
               </a:rPr>
-              <a:t>5. MEASURES</a:t>
+              <a:t>4. FACTORS</a:t>
             </a:r>
             <a:endParaRPr lang="en-US" sz="1400" dirty="0"/>
-          </a:p>
-        </p:txBody>
-      </p:sp>
-      <p:sp>
-        <p:nvSpPr>
-          <p:cNvPr id="3" name="Text 1"/>
-          <p:cNvSpPr/>
-          <p:nvPr/>
-        </p:nvSpPr>
-        <p:spPr>
-          <a:xfrm>
-            <a:off x="457200" y="1005840"/>
-            <a:ext cx="11277295" cy="731520"/>
-          </a:xfrm>
-          <a:prstGeom prst="rect">
-            <a:avLst/>
-          </a:prstGeom>
-          <a:noFill/>
-          <a:ln/>
-        </p:spPr>
-        <p:txBody>
-          <a:bodyPr wrap="square" lIns="0" tIns="0" rIns="0" bIns="0" rtlCol="0" anchor="ctr"/>
-          <a:lstStyle/>
-          <a:p>
-            <a:pPr algn="ctr" indent="0" marL="0">
-              <a:buNone/>
-            </a:pPr>
-            <a:r>
-              <a:rPr lang="en-US" sz="3600" b="1" dirty="0">
-                <a:solidFill>
-                  <a:srgbClr val="990011"/>
-                </a:solidFill>
-                <a:latin typeface="Times New Roman" pitchFamily="34" charset="0"/>
-                <a:ea typeface="Times New Roman" pitchFamily="34" charset="-122"/>
-                <a:cs typeface="Times New Roman" pitchFamily="34" charset="-120"/>
-              </a:rPr>
-              <a:t>Activity 5</a:t>
-            </a:r>
-            <a:endParaRPr lang="en-US" sz="3600" dirty="0"/>
           </a:p>
         </p:txBody>
       </p:sp>
       <p:pic>
         <p:nvPicPr>
-          <p:cNvPr id="4" name="Image 0" descr="/home/claude/f4/img/v2/usa_school.jpg">    </p:cNvPr>
+          <p:cNvPr id="3" name="Image 0" descr="/home/claude/f4/img/minesec_sheet.png">    </p:cNvPr>
           <p:cNvPicPr>
             <a:picLocks noChangeAspect="1"/>
           </p:cNvPicPr>
@@ -13661,8 +13691,8 @@
         </p:blipFill>
         <p:spPr>
           <a:xfrm>
-            <a:off x="2246610" y="1783080"/>
-            <a:ext cx="7698475" cy="4270248"/>
+            <a:off x="0" y="658368"/>
+            <a:ext cx="5120640" cy="5833872"/>
           </a:xfrm>
           <a:prstGeom prst="rect">
             <a:avLst/>
@@ -13671,14 +13701,14 @@
       </p:pic>
       <p:sp>
         <p:nvSpPr>
-          <p:cNvPr id="5" name="Text 2"/>
+          <p:cNvPr id="4" name="Text 1"/>
           <p:cNvSpPr/>
           <p:nvPr/>
         </p:nvSpPr>
         <p:spPr>
           <a:xfrm>
-            <a:off x="457200" y="6089904"/>
-            <a:ext cx="11277295" cy="347472"/>
+            <a:off x="5349240" y="1005840"/>
+            <a:ext cx="6522415" cy="731520"/>
           </a:xfrm>
           <a:prstGeom prst="rect">
             <a:avLst/>
@@ -13687,24 +13717,68 @@
           <a:ln/>
         </p:spPr>
         <p:txBody>
-          <a:bodyPr wrap="square" lIns="0" tIns="0" rIns="0" bIns="0" rtlCol="0" anchor="ctr"/>
+          <a:bodyPr wrap="square" lIns="0" tIns="0" rIns="0" bIns="0" rtlCol="0" anchor="ctr">
+            <a:normAutofit/>
+          </a:bodyPr>
           <a:lstStyle/>
           <a:p>
             <a:pPr algn="ctr" indent="0" marL="0">
               <a:buNone/>
             </a:pPr>
             <a:r>
-              <a:rPr lang="en-US" sz="1800" i="1" dirty="0">
-                <a:solidFill>
-                  <a:srgbClr val="555555"/>
+              <a:rPr lang="en-US" sz="3600" b="1" dirty="0">
+                <a:solidFill>
+                  <a:srgbClr val="990011"/>
                 </a:solidFill>
                 <a:latin typeface="Times New Roman" pitchFamily="34" charset="0"/>
                 <a:ea typeface="Times New Roman" pitchFamily="34" charset="-122"/>
                 <a:cs typeface="Times New Roman" pitchFamily="34" charset="-120"/>
               </a:rPr>
-              <a:t>A school.</a:t>
-            </a:r>
-            <a:endParaRPr lang="en-US" sz="1800" dirty="0"/>
+              <a:t>Activity 4: Answer</a:t>
+            </a:r>
+            <a:endParaRPr lang="en-US" sz="3600" dirty="0"/>
+          </a:p>
+        </p:txBody>
+      </p:sp>
+      <p:sp>
+        <p:nvSpPr>
+          <p:cNvPr id="5" name="Text 2"/>
+          <p:cNvSpPr/>
+          <p:nvPr/>
+        </p:nvSpPr>
+        <p:spPr>
+          <a:xfrm>
+            <a:off x="5349240" y="1783080"/>
+            <a:ext cx="6522415" cy="4663440"/>
+          </a:xfrm>
+          <a:prstGeom prst="rect">
+            <a:avLst/>
+          </a:prstGeom>
+          <a:noFill/>
+          <a:ln/>
+        </p:spPr>
+        <p:txBody>
+          <a:bodyPr wrap="square" lIns="0" tIns="0" rIns="0" bIns="0" rtlCol="0" anchor="t"/>
+          <a:lstStyle/>
+          <a:p>
+            <a:pPr algn="l" indent="0" marL="0">
+              <a:spcAft>
+                <a:spcPts val="800"/>
+              </a:spcAft>
+              <a:buNone/>
+            </a:pPr>
+            <a:r>
+              <a:rPr lang="en-US" sz="4000" dirty="0">
+                <a:solidFill>
+                  <a:srgbClr val="111111"/>
+                </a:solidFill>
+                <a:latin typeface="Times New Roman" pitchFamily="34" charset="0"/>
+                <a:ea typeface="Times New Roman" pitchFamily="34" charset="-122"/>
+                <a:cs typeface="Times New Roman" pitchFamily="34" charset="-120"/>
+              </a:rPr>
+              <a:t>Access to the sea (port), also oil and fertile soils.</a:t>
+            </a:r>
+            <a:endParaRPr lang="en-US" sz="4000" dirty="0"/>
           </a:p>
         </p:txBody>
       </p:sp>
@@ -13820,9 +13894,48 @@
           </a:p>
         </p:txBody>
       </p:sp>
+      <p:sp>
+        <p:nvSpPr>
+          <p:cNvPr id="3" name="Text 1"/>
+          <p:cNvSpPr/>
+          <p:nvPr/>
+        </p:nvSpPr>
+        <p:spPr>
+          <a:xfrm>
+            <a:off x="457200" y="1005840"/>
+            <a:ext cx="11277295" cy="731520"/>
+          </a:xfrm>
+          <a:prstGeom prst="rect">
+            <a:avLst/>
+          </a:prstGeom>
+          <a:noFill/>
+          <a:ln/>
+        </p:spPr>
+        <p:txBody>
+          <a:bodyPr wrap="square" lIns="0" tIns="0" rIns="0" bIns="0" rtlCol="0" anchor="ctr"/>
+          <a:lstStyle/>
+          <a:p>
+            <a:pPr algn="ctr" indent="0" marL="0">
+              <a:buNone/>
+            </a:pPr>
+            <a:r>
+              <a:rPr lang="en-US" sz="3600" b="1" dirty="0">
+                <a:solidFill>
+                  <a:srgbClr val="990011"/>
+                </a:solidFill>
+                <a:latin typeface="Times New Roman" pitchFamily="34" charset="0"/>
+                <a:ea typeface="Times New Roman" pitchFamily="34" charset="-122"/>
+                <a:cs typeface="Times New Roman" pitchFamily="34" charset="-120"/>
+              </a:rPr>
+              <a:t>Activity 5</a:t>
+            </a:r>
+            <a:endParaRPr lang="en-US" sz="3600" dirty="0"/>
+          </a:p>
+        </p:txBody>
+      </p:sp>
       <p:pic>
         <p:nvPicPr>
-          <p:cNvPr id="3" name="Image 0" descr="/home/claude/f4/img/minesec_sheet.png">    </p:cNvPr>
+          <p:cNvPr id="4" name="Image 0" descr="/home/claude/f4/img/v2/usa_school.jpg">    </p:cNvPr>
           <p:cNvPicPr>
             <a:picLocks noChangeAspect="1"/>
           </p:cNvPicPr>
@@ -13836,8 +13949,8 @@
         </p:blipFill>
         <p:spPr>
           <a:xfrm>
-            <a:off x="0" y="658368"/>
-            <a:ext cx="5120640" cy="5833872"/>
+            <a:off x="2246610" y="1783080"/>
+            <a:ext cx="7698475" cy="4270248"/>
           </a:xfrm>
           <a:prstGeom prst="rect">
             <a:avLst/>
@@ -13846,14 +13959,14 @@
       </p:pic>
       <p:sp>
         <p:nvSpPr>
-          <p:cNvPr id="4" name="Text 1"/>
+          <p:cNvPr id="5" name="Text 2"/>
           <p:cNvSpPr/>
           <p:nvPr/>
         </p:nvSpPr>
         <p:spPr>
           <a:xfrm>
-            <a:off x="5349240" y="1005840"/>
-            <a:ext cx="6522415" cy="731520"/>
+            <a:off x="457200" y="6089904"/>
+            <a:ext cx="11277295" cy="347472"/>
           </a:xfrm>
           <a:prstGeom prst="rect">
             <a:avLst/>
@@ -13862,68 +13975,24 @@
           <a:ln/>
         </p:spPr>
         <p:txBody>
-          <a:bodyPr wrap="square" lIns="0" tIns="0" rIns="0" bIns="0" rtlCol="0" anchor="ctr">
-            <a:normAutofit/>
-          </a:bodyPr>
+          <a:bodyPr wrap="square" lIns="0" tIns="0" rIns="0" bIns="0" rtlCol="0" anchor="ctr"/>
           <a:lstStyle/>
           <a:p>
             <a:pPr algn="ctr" indent="0" marL="0">
               <a:buNone/>
             </a:pPr>
             <a:r>
-              <a:rPr lang="en-US" sz="3600" b="1" dirty="0">
-                <a:solidFill>
-                  <a:srgbClr val="990011"/>
+              <a:rPr lang="en-US" sz="1800" i="1" dirty="0">
+                <a:solidFill>
+                  <a:srgbClr val="555555"/>
                 </a:solidFill>
                 <a:latin typeface="Times New Roman" pitchFamily="34" charset="0"/>
                 <a:ea typeface="Times New Roman" pitchFamily="34" charset="-122"/>
                 <a:cs typeface="Times New Roman" pitchFamily="34" charset="-120"/>
               </a:rPr>
-              <a:t>Activity 5: Question</a:t>
-            </a:r>
-            <a:endParaRPr lang="en-US" sz="3600" dirty="0"/>
-          </a:p>
-        </p:txBody>
-      </p:sp>
-      <p:sp>
-        <p:nvSpPr>
-          <p:cNvPr id="5" name="Text 2"/>
-          <p:cNvSpPr/>
-          <p:nvPr/>
-        </p:nvSpPr>
-        <p:spPr>
-          <a:xfrm>
-            <a:off x="5349240" y="1783080"/>
-            <a:ext cx="6522415" cy="4663440"/>
-          </a:xfrm>
-          <a:prstGeom prst="rect">
-            <a:avLst/>
-          </a:prstGeom>
-          <a:noFill/>
-          <a:ln/>
-        </p:spPr>
-        <p:txBody>
-          <a:bodyPr wrap="square" lIns="0" tIns="0" rIns="0" bIns="0" rtlCol="0" anchor="t"/>
-          <a:lstStyle/>
-          <a:p>
-            <a:pPr algn="l" indent="0" marL="0">
-              <a:spcAft>
-                <a:spcPts val="800"/>
-              </a:spcAft>
-              <a:buNone/>
-            </a:pPr>
-            <a:r>
-              <a:rPr lang="en-US" sz="4000" dirty="0">
-                <a:solidFill>
-                  <a:srgbClr val="111111"/>
-                </a:solidFill>
-                <a:latin typeface="Times New Roman" pitchFamily="34" charset="0"/>
-                <a:ea typeface="Times New Roman" pitchFamily="34" charset="-122"/>
-                <a:cs typeface="Times New Roman" pitchFamily="34" charset="-120"/>
-              </a:rPr>
-              <a:t>How can building schools in lagging regions reduce inequality?</a:t>
-            </a:r>
-            <a:endParaRPr lang="en-US" sz="4000" dirty="0"/>
+              <a:t>A school.</a:t>
+            </a:r>
+            <a:endParaRPr lang="en-US" sz="1800" dirty="0"/>
           </a:p>
         </p:txBody>
       </p:sp>
@@ -14098,7 +14167,7 @@
                 <a:ea typeface="Times New Roman" pitchFamily="34" charset="-122"/>
                 <a:cs typeface="Times New Roman" pitchFamily="34" charset="-120"/>
               </a:rPr>
-              <a:t>Activity 5: Answer</a:t>
+              <a:t>Activity 5: Question</a:t>
             </a:r>
             <a:endParaRPr lang="en-US" sz="3600" dirty="0"/>
           </a:p>
@@ -14140,7 +14209,7 @@
                 <a:ea typeface="Times New Roman" pitchFamily="34" charset="-122"/>
                 <a:cs typeface="Times New Roman" pitchFamily="34" charset="-120"/>
               </a:rPr>
-              <a:t>It trains local people, who can find better jobs and develop their region.</a:t>
+              <a:t>How can building schools in lagging regions reduce inequality?</a:t>
             </a:r>
             <a:endParaRPr lang="en-US" sz="4000" dirty="0"/>
           </a:p>
@@ -14252,7 +14321,7 @@
                 <a:ea typeface="Calibri" pitchFamily="34" charset="-122"/>
                 <a:cs typeface="Calibri" pitchFamily="34" charset="-120"/>
               </a:rPr>
-              <a:t>BOARD SUMMARY</a:t>
+              <a:t>5. MEASURES</a:t>
             </a:r>
             <a:endParaRPr lang="en-US" sz="1400" dirty="0"/>
           </a:p>
@@ -14317,7 +14386,7 @@
                 <a:ea typeface="Times New Roman" pitchFamily="34" charset="-122"/>
                 <a:cs typeface="Times New Roman" pitchFamily="34" charset="-120"/>
               </a:rPr>
-              <a:t>Board Summary</a:t>
+              <a:t>Activity 5: Answer</a:t>
             </a:r>
             <a:endParaRPr lang="en-US" sz="3600" dirty="0"/>
           </a:p>
@@ -14351,7 +14420,7 @@
               <a:buNone/>
             </a:pPr>
             <a:r>
-              <a:rPr lang="en-US" sz="3200" b="1" dirty="0">
+              <a:rPr lang="en-US" sz="4000" dirty="0">
                 <a:solidFill>
                   <a:srgbClr val="111111"/>
                 </a:solidFill>
@@ -14359,49 +14428,9 @@
                 <a:ea typeface="Times New Roman" pitchFamily="34" charset="-122"/>
                 <a:cs typeface="Times New Roman" pitchFamily="34" charset="-120"/>
               </a:rPr>
-              <a:t>Topic: Geography of Cameroon</a:t>
-            </a:r>
-            <a:endParaRPr lang="en-US" sz="3200" dirty="0"/>
-          </a:p>
-          <a:p>
-            <a:pPr algn="l" indent="0" marL="0">
-              <a:spcAft>
-                <a:spcPts val="800"/>
-              </a:spcAft>
-              <a:buNone/>
-            </a:pPr>
-            <a:r>
-              <a:rPr lang="en-US" sz="3200" b="1" dirty="0">
-                <a:solidFill>
-                  <a:srgbClr val="111111"/>
-                </a:solidFill>
-                <a:latin typeface="Times New Roman" pitchFamily="34" charset="0"/>
-                <a:ea typeface="Times New Roman" pitchFamily="34" charset="-122"/>
-                <a:cs typeface="Times New Roman" pitchFamily="34" charset="-120"/>
-              </a:rPr>
-              <a:t>Sub-topic: Economic Activities and Development of Cameroon</a:t>
-            </a:r>
-            <a:endParaRPr lang="en-US" sz="3200" dirty="0"/>
-          </a:p>
-          <a:p>
-            <a:pPr algn="l" indent="0" marL="0">
-              <a:spcAft>
-                <a:spcPts val="800"/>
-              </a:spcAft>
-              <a:buNone/>
-            </a:pPr>
-            <a:r>
-              <a:rPr lang="en-US" sz="3200" b="1" dirty="0">
-                <a:solidFill>
-                  <a:srgbClr val="990011"/>
-                </a:solidFill>
-                <a:latin typeface="Times New Roman" pitchFamily="34" charset="0"/>
-                <a:ea typeface="Times New Roman" pitchFamily="34" charset="-122"/>
-                <a:cs typeface="Times New Roman" pitchFamily="34" charset="-120"/>
-              </a:rPr>
-              <a:t>Lesson 15: Contrasts in Development within Cameroon</a:t>
-            </a:r>
-            <a:endParaRPr lang="en-US" sz="3200" dirty="0"/>
+              <a:t>It trains local people, who can find better jobs and develop their region.</a:t>
+            </a:r>
+            <a:endParaRPr lang="en-US" sz="4000" dirty="0"/>
           </a:p>
         </p:txBody>
       </p:sp>
@@ -14534,7 +14563,7 @@
         <p:spPr>
           <a:xfrm>
             <a:off x="0" y="658368"/>
-            <a:ext cx="1463040" cy="5833872"/>
+            <a:ext cx="5120640" cy="5833872"/>
           </a:xfrm>
           <a:prstGeom prst="rect">
             <a:avLst/>
@@ -14549,8 +14578,8 @@
         </p:nvSpPr>
         <p:spPr>
           <a:xfrm>
-            <a:off x="1691640" y="1005840"/>
-            <a:ext cx="10180015" cy="731520"/>
+            <a:off x="5349240" y="1005840"/>
+            <a:ext cx="6522415" cy="731520"/>
           </a:xfrm>
           <a:prstGeom prst="rect">
             <a:avLst/>
@@ -14576,7 +14605,7 @@
                 <a:ea typeface="Times New Roman" pitchFamily="34" charset="-122"/>
                 <a:cs typeface="Times New Roman" pitchFamily="34" charset="-120"/>
               </a:rPr>
-              <a:t>DEFINITIONS</a:t>
+              <a:t>Board Summary</a:t>
             </a:r>
             <a:endParaRPr lang="en-US" sz="3600" dirty="0"/>
           </a:p>
@@ -14590,8 +14619,8 @@
         </p:nvSpPr>
         <p:spPr>
           <a:xfrm>
-            <a:off x="1691640" y="1783080"/>
-            <a:ext cx="10180015" cy="4663440"/>
+            <a:off x="5349240" y="1783080"/>
+            <a:ext cx="6522415" cy="4663440"/>
           </a:xfrm>
           <a:prstGeom prst="rect">
             <a:avLst/>
@@ -14610,7 +14639,7 @@
               <a:buNone/>
             </a:pPr>
             <a:r>
-              <a:rPr lang="en-US" sz="4000" i="1" dirty="0">
+              <a:rPr lang="en-US" sz="3200" b="1" dirty="0">
                 <a:solidFill>
                   <a:srgbClr val="111111"/>
                 </a:solidFill>
@@ -14618,9 +14647,9 @@
                 <a:ea typeface="Times New Roman" pitchFamily="34" charset="-122"/>
                 <a:cs typeface="Times New Roman" pitchFamily="34" charset="-120"/>
               </a:rPr>
-              <a:t>The key terms of this lesson are defined as follows:</a:t>
-            </a:r>
-            <a:endParaRPr lang="en-US" sz="4000" dirty="0"/>
+              <a:t>Topic: Geography of Cameroon</a:t>
+            </a:r>
+            <a:endParaRPr lang="en-US" sz="3200" dirty="0"/>
           </a:p>
           <a:p>
             <a:pPr algn="l" indent="0" marL="0">
@@ -14630,7 +14659,7 @@
               <a:buNone/>
             </a:pPr>
             <a:r>
-              <a:rPr lang="en-US" sz="4000" b="1" dirty="0">
+              <a:rPr lang="en-US" sz="3200" b="1" dirty="0">
                 <a:solidFill>
                   <a:srgbClr val="111111"/>
                 </a:solidFill>
@@ -14638,8 +14667,11 @@
                 <a:ea typeface="Times New Roman" pitchFamily="34" charset="-122"/>
                 <a:cs typeface="Times New Roman" pitchFamily="34" charset="-120"/>
               </a:rPr>
-              <a:t>Development: </a:t>
-            </a:r>
+              <a:t>Sub-topic: Economic Activities and Development of Cameroon</a:t>
+            </a:r>
+            <a:endParaRPr lang="en-US" sz="3200" dirty="0"/>
+          </a:p>
+          <a:p>
             <a:pPr algn="l" indent="0" marL="0">
               <a:spcAft>
                 <a:spcPts val="800"/>
@@ -14647,54 +14679,17 @@
               <a:buNone/>
             </a:pPr>
             <a:r>
-              <a:rPr lang="en-US" sz="4000" dirty="0">
-                <a:solidFill>
-                  <a:srgbClr val="111111"/>
+              <a:rPr lang="en-US" sz="3200" b="1" dirty="0">
+                <a:solidFill>
+                  <a:srgbClr val="990011"/>
                 </a:solidFill>
                 <a:latin typeface="Times New Roman" pitchFamily="34" charset="0"/>
                 <a:ea typeface="Times New Roman" pitchFamily="34" charset="-122"/>
                 <a:cs typeface="Times New Roman" pitchFamily="34" charset="-120"/>
               </a:rPr>
-              <a:t>It is the improvement of the living conditions of people (income, health, education, services).</a:t>
-            </a:r>
-            <a:endParaRPr lang="en-US" sz="4000" dirty="0"/>
-          </a:p>
-          <a:p>
-            <a:pPr algn="l" indent="0" marL="0">
-              <a:spcAft>
-                <a:spcPts val="800"/>
-              </a:spcAft>
-              <a:buNone/>
-            </a:pPr>
-            <a:r>
-              <a:rPr lang="en-US" sz="4000" b="1" dirty="0">
-                <a:solidFill>
-                  <a:srgbClr val="111111"/>
-                </a:solidFill>
-                <a:latin typeface="Times New Roman" pitchFamily="34" charset="0"/>
-                <a:ea typeface="Times New Roman" pitchFamily="34" charset="-122"/>
-                <a:cs typeface="Times New Roman" pitchFamily="34" charset="-120"/>
-              </a:rPr>
-              <a:t>Regional inequality: </a:t>
-            </a:r>
-            <a:pPr algn="l" indent="0" marL="0">
-              <a:spcAft>
-                <a:spcPts val="800"/>
-              </a:spcAft>
-              <a:buNone/>
-            </a:pPr>
-            <a:r>
-              <a:rPr lang="en-US" sz="4000" dirty="0">
-                <a:solidFill>
-                  <a:srgbClr val="111111"/>
-                </a:solidFill>
-                <a:latin typeface="Times New Roman" pitchFamily="34" charset="0"/>
-                <a:ea typeface="Times New Roman" pitchFamily="34" charset="-122"/>
-                <a:cs typeface="Times New Roman" pitchFamily="34" charset="-120"/>
-              </a:rPr>
-              <a:t>It is the unequal level of development between regions of a country.</a:t>
-            </a:r>
-            <a:endParaRPr lang="en-US" sz="4000" dirty="0"/>
+              <a:t>Lesson 15: Contrasts in Development within Cameroon</a:t>
+            </a:r>
+            <a:endParaRPr lang="en-US" sz="3200" dirty="0"/>
           </a:p>
         </p:txBody>
       </p:sp>
@@ -14827,7 +14822,7 @@
         <p:spPr>
           <a:xfrm>
             <a:off x="0" y="658368"/>
-            <a:ext cx="5120640" cy="5833872"/>
+            <a:ext cx="1463040" cy="5833872"/>
           </a:xfrm>
           <a:prstGeom prst="rect">
             <a:avLst/>
@@ -14842,8 +14837,8 @@
         </p:nvSpPr>
         <p:spPr>
           <a:xfrm>
-            <a:off x="5349240" y="1005840"/>
-            <a:ext cx="6522415" cy="731520"/>
+            <a:off x="1691640" y="1005840"/>
+            <a:ext cx="10180015" cy="731520"/>
           </a:xfrm>
           <a:prstGeom prst="rect">
             <a:avLst/>
@@ -14869,7 +14864,7 @@
                 <a:ea typeface="Times New Roman" pitchFamily="34" charset="-122"/>
                 <a:cs typeface="Times New Roman" pitchFamily="34" charset="-120"/>
               </a:rPr>
-              <a:t>DEFINITIONS (continued)</a:t>
+              <a:t>DEFINITIONS</a:t>
             </a:r>
             <a:endParaRPr lang="en-US" sz="3600" dirty="0"/>
           </a:p>
@@ -14883,8 +14878,8 @@
         </p:nvSpPr>
         <p:spPr>
           <a:xfrm>
-            <a:off x="5349240" y="1783080"/>
-            <a:ext cx="6522415" cy="4663440"/>
+            <a:off x="1691640" y="1783080"/>
+            <a:ext cx="10180015" cy="4663440"/>
           </a:xfrm>
           <a:prstGeom prst="rect">
             <a:avLst/>
@@ -14903,7 +14898,7 @@
               <a:buNone/>
             </a:pPr>
             <a:r>
-              <a:rPr lang="en-US" sz="4000" b="1" dirty="0">
+              <a:rPr lang="en-US" sz="4000" i="1" dirty="0">
                 <a:solidFill>
                   <a:srgbClr val="111111"/>
                 </a:solidFill>
@@ -14911,8 +14906,11 @@
                 <a:ea typeface="Times New Roman" pitchFamily="34" charset="-122"/>
                 <a:cs typeface="Times New Roman" pitchFamily="34" charset="-120"/>
               </a:rPr>
-              <a:t>Core: </a:t>
-            </a:r>
+              <a:t>The key terms of this lesson are defined as follows:</a:t>
+            </a:r>
+            <a:endParaRPr lang="en-US" sz="4000" dirty="0"/>
+          </a:p>
+          <a:p>
             <a:pPr algn="l" indent="0" marL="0">
               <a:spcAft>
                 <a:spcPts val="800"/>
@@ -14920,7 +14918,7 @@
               <a:buNone/>
             </a:pPr>
             <a:r>
-              <a:rPr lang="en-US" sz="4000" dirty="0">
+              <a:rPr lang="en-US" sz="4000" b="1" dirty="0">
                 <a:solidFill>
                   <a:srgbClr val="111111"/>
                 </a:solidFill>
@@ -14928,11 +14926,8 @@
                 <a:ea typeface="Times New Roman" pitchFamily="34" charset="-122"/>
                 <a:cs typeface="Times New Roman" pitchFamily="34" charset="-120"/>
               </a:rPr>
-              <a:t>It is a prosperous region where population, capital and activities are concentrated.</a:t>
-            </a:r>
-            <a:endParaRPr lang="en-US" sz="4000" dirty="0"/>
-          </a:p>
-          <a:p>
+              <a:t>Development: </a:t>
+            </a:r>
             <a:pPr algn="l" indent="0" marL="0">
               <a:spcAft>
                 <a:spcPts val="800"/>
@@ -14940,7 +14935,7 @@
               <a:buNone/>
             </a:pPr>
             <a:r>
-              <a:rPr lang="en-US" sz="4000" b="1" dirty="0">
+              <a:rPr lang="en-US" sz="4000" dirty="0">
                 <a:solidFill>
                   <a:srgbClr val="111111"/>
                 </a:solidFill>
@@ -14948,8 +14943,11 @@
                 <a:ea typeface="Times New Roman" pitchFamily="34" charset="-122"/>
                 <a:cs typeface="Times New Roman" pitchFamily="34" charset="-120"/>
               </a:rPr>
-              <a:t>Periphery: </a:t>
-            </a:r>
+              <a:t>It is the improvement of the living conditions of people (income, health, education, services).</a:t>
+            </a:r>
+            <a:endParaRPr lang="en-US" sz="4000" dirty="0"/>
+          </a:p>
+          <a:p>
             <a:pPr algn="l" indent="0" marL="0">
               <a:spcAft>
                 <a:spcPts val="800"/>
@@ -14957,7 +14955,7 @@
               <a:buNone/>
             </a:pPr>
             <a:r>
-              <a:rPr lang="en-US" sz="4000" dirty="0">
+              <a:rPr lang="en-US" sz="4000" b="1" dirty="0">
                 <a:solidFill>
                   <a:srgbClr val="111111"/>
                 </a:solidFill>
@@ -14965,7 +14963,24 @@
                 <a:ea typeface="Times New Roman" pitchFamily="34" charset="-122"/>
                 <a:cs typeface="Times New Roman" pitchFamily="34" charset="-120"/>
               </a:rPr>
-              <a:t>It is a less developed region that depends on the core.</a:t>
+              <a:t>Regional inequality: </a:t>
+            </a:r>
+            <a:pPr algn="l" indent="0" marL="0">
+              <a:spcAft>
+                <a:spcPts val="800"/>
+              </a:spcAft>
+              <a:buNone/>
+            </a:pPr>
+            <a:r>
+              <a:rPr lang="en-US" sz="4000" dirty="0">
+                <a:solidFill>
+                  <a:srgbClr val="111111"/>
+                </a:solidFill>
+                <a:latin typeface="Times New Roman" pitchFamily="34" charset="0"/>
+                <a:ea typeface="Times New Roman" pitchFamily="34" charset="-122"/>
+                <a:cs typeface="Times New Roman" pitchFamily="34" charset="-120"/>
+              </a:rPr>
+              <a:t>It is the unequal level of development between regions of a country.</a:t>
             </a:r>
             <a:endParaRPr lang="en-US" sz="4000" dirty="0"/>
           </a:p>
@@ -15083,129 +15098,9 @@
           </a:p>
         </p:txBody>
       </p:sp>
-      <p:sp>
-        <p:nvSpPr>
-          <p:cNvPr id="3" name="Text 1"/>
-          <p:cNvSpPr/>
-          <p:nvPr/>
-        </p:nvSpPr>
-        <p:spPr>
-          <a:xfrm>
-            <a:off x="365760" y="1005840"/>
-            <a:ext cx="11460175" cy="731520"/>
-          </a:xfrm>
-          <a:prstGeom prst="rect">
-            <a:avLst/>
-          </a:prstGeom>
-          <a:noFill/>
-          <a:ln/>
-        </p:spPr>
-        <p:txBody>
-          <a:bodyPr wrap="square" lIns="0" tIns="0" rIns="0" bIns="0" rtlCol="0" anchor="ctr">
-            <a:normAutofit/>
-          </a:bodyPr>
-          <a:lstStyle/>
-          <a:p>
-            <a:pPr algn="ctr" indent="0" marL="0">
-              <a:buNone/>
-            </a:pPr>
-            <a:r>
-              <a:rPr lang="en-US" sz="3600" b="1" dirty="0">
-                <a:solidFill>
-                  <a:srgbClr val="990011"/>
-                </a:solidFill>
-                <a:latin typeface="Times New Roman" pitchFamily="34" charset="0"/>
-                <a:ea typeface="Times New Roman" pitchFamily="34" charset="-122"/>
-                <a:cs typeface="Times New Roman" pitchFamily="34" charset="-120"/>
-              </a:rPr>
-              <a:t>1. Recall of the Models of Regional Inequality</a:t>
-            </a:r>
-            <a:endParaRPr lang="en-US" sz="3600" dirty="0"/>
-          </a:p>
-        </p:txBody>
-      </p:sp>
-      <p:sp>
-        <p:nvSpPr>
-          <p:cNvPr id="4" name="Text 2"/>
-          <p:cNvSpPr/>
-          <p:nvPr/>
-        </p:nvSpPr>
-        <p:spPr>
-          <a:xfrm>
-            <a:off x="365760" y="1783080"/>
-            <a:ext cx="4846320" cy="4617720"/>
-          </a:xfrm>
-          <a:prstGeom prst="rect">
-            <a:avLst/>
-          </a:prstGeom>
-          <a:noFill/>
-          <a:ln/>
-        </p:spPr>
-        <p:txBody>
-          <a:bodyPr wrap="square" lIns="0" tIns="0" rIns="0" bIns="0" rtlCol="0" anchor="t"/>
-          <a:lstStyle/>
-          <a:p>
-            <a:pPr algn="l" indent="0" marL="0">
-              <a:spcAft>
-                <a:spcPts val="800"/>
-              </a:spcAft>
-              <a:buNone/>
-            </a:pPr>
-            <a:r>
-              <a:rPr lang="en-US" sz="3200" i="1" dirty="0">
-                <a:solidFill>
-                  <a:srgbClr val="111111"/>
-                </a:solidFill>
-                <a:latin typeface="Times New Roman" pitchFamily="34" charset="0"/>
-                <a:ea typeface="Times New Roman" pitchFamily="34" charset="-122"/>
-                <a:cs typeface="Times New Roman" pitchFamily="34" charset="-120"/>
-              </a:rPr>
-              <a:t>The models of regional inequality are the following:</a:t>
-            </a:r>
-            <a:endParaRPr lang="en-US" sz="3200" dirty="0"/>
-          </a:p>
-          <a:p>
-            <a:pPr algn="l" indent="0" marL="0">
-              <a:spcAft>
-                <a:spcPts val="800"/>
-              </a:spcAft>
-              <a:buNone/>
-            </a:pPr>
-            <a:r>
-              <a:rPr lang="en-US" sz="3200" b="1" dirty="0">
-                <a:solidFill>
-                  <a:srgbClr val="111111"/>
-                </a:solidFill>
-                <a:latin typeface="Times New Roman" pitchFamily="34" charset="0"/>
-                <a:ea typeface="Times New Roman" pitchFamily="34" charset="-122"/>
-                <a:cs typeface="Times New Roman" pitchFamily="34" charset="-120"/>
-              </a:rPr>
-              <a:t>Myrdal (cumulative causation, 1957): </a:t>
-            </a:r>
-            <a:pPr algn="l" indent="0" marL="0">
-              <a:spcAft>
-                <a:spcPts val="800"/>
-              </a:spcAft>
-              <a:buNone/>
-            </a:pPr>
-            <a:r>
-              <a:rPr lang="en-US" sz="3200" dirty="0">
-                <a:solidFill>
-                  <a:srgbClr val="111111"/>
-                </a:solidFill>
-                <a:latin typeface="Times New Roman" pitchFamily="34" charset="0"/>
-                <a:ea typeface="Times New Roman" pitchFamily="34" charset="-122"/>
-                <a:cs typeface="Times New Roman" pitchFamily="34" charset="-120"/>
-              </a:rPr>
-              <a:t>An initial advantage (a port, a capital) attracts investment and grows by a cumulative process.</a:t>
-            </a:r>
-            <a:endParaRPr lang="en-US" sz="3200" dirty="0"/>
-          </a:p>
-        </p:txBody>
-      </p:sp>
       <p:pic>
         <p:nvPicPr>
-          <p:cNvPr id="5" name="Image 0" descr="/home/claude/f4/img/v2/core_periphery_big.png">    </p:cNvPr>
+          <p:cNvPr id="3" name="Image 0" descr="/home/claude/f4/img/minesec_sheet.png">    </p:cNvPr>
           <p:cNvPicPr>
             <a:picLocks noChangeAspect="1"/>
           </p:cNvPicPr>
@@ -15219,8 +15114,8 @@
         </p:blipFill>
         <p:spPr>
           <a:xfrm>
-            <a:off x="5349240" y="2617506"/>
-            <a:ext cx="6659575" cy="2601397"/>
+            <a:off x="0" y="658368"/>
+            <a:ext cx="5120640" cy="5833872"/>
           </a:xfrm>
           <a:prstGeom prst="rect">
             <a:avLst/>
@@ -15229,14 +15124,14 @@
       </p:pic>
       <p:sp>
         <p:nvSpPr>
-          <p:cNvPr id="6" name="Text 3"/>
+          <p:cNvPr id="4" name="Text 1"/>
           <p:cNvSpPr/>
           <p:nvPr/>
         </p:nvSpPr>
         <p:spPr>
           <a:xfrm>
-            <a:off x="5349240" y="6089904"/>
-            <a:ext cx="6659575" cy="347472"/>
+            <a:off x="5349240" y="1005840"/>
+            <a:ext cx="6522415" cy="731520"/>
           </a:xfrm>
           <a:prstGeom prst="rect">
             <a:avLst/>
@@ -15245,24 +15140,122 @@
           <a:ln/>
         </p:spPr>
         <p:txBody>
-          <a:bodyPr wrap="square" lIns="0" tIns="0" rIns="0" bIns="0" rtlCol="0" anchor="ctr"/>
+          <a:bodyPr wrap="square" lIns="0" tIns="0" rIns="0" bIns="0" rtlCol="0" anchor="ctr">
+            <a:normAutofit/>
+          </a:bodyPr>
           <a:lstStyle/>
           <a:p>
             <a:pPr algn="ctr" indent="0" marL="0">
               <a:buNone/>
             </a:pPr>
             <a:r>
-              <a:rPr lang="en-US" sz="1600" i="1" dirty="0">
-                <a:solidFill>
-                  <a:srgbClr val="555555"/>
+              <a:rPr lang="en-US" sz="3600" b="1" dirty="0">
+                <a:solidFill>
+                  <a:srgbClr val="990011"/>
                 </a:solidFill>
                 <a:latin typeface="Times New Roman" pitchFamily="34" charset="0"/>
                 <a:ea typeface="Times New Roman" pitchFamily="34" charset="-122"/>
                 <a:cs typeface="Times New Roman" pitchFamily="34" charset="-120"/>
               </a:rPr>
-              <a:t>Illustration: core and periphery</a:t>
-            </a:r>
-            <a:endParaRPr lang="en-US" sz="1600" dirty="0"/>
+              <a:t>DEFINITIONS (continued)</a:t>
+            </a:r>
+            <a:endParaRPr lang="en-US" sz="3600" dirty="0"/>
+          </a:p>
+        </p:txBody>
+      </p:sp>
+      <p:sp>
+        <p:nvSpPr>
+          <p:cNvPr id="5" name="Text 2"/>
+          <p:cNvSpPr/>
+          <p:nvPr/>
+        </p:nvSpPr>
+        <p:spPr>
+          <a:xfrm>
+            <a:off x="5349240" y="1783080"/>
+            <a:ext cx="6522415" cy="4663440"/>
+          </a:xfrm>
+          <a:prstGeom prst="rect">
+            <a:avLst/>
+          </a:prstGeom>
+          <a:noFill/>
+          <a:ln/>
+        </p:spPr>
+        <p:txBody>
+          <a:bodyPr wrap="square" lIns="0" tIns="0" rIns="0" bIns="0" rtlCol="0" anchor="t"/>
+          <a:lstStyle/>
+          <a:p>
+            <a:pPr algn="l" indent="0" marL="0">
+              <a:spcAft>
+                <a:spcPts val="800"/>
+              </a:spcAft>
+              <a:buNone/>
+            </a:pPr>
+            <a:r>
+              <a:rPr lang="en-US" sz="4000" b="1" dirty="0">
+                <a:solidFill>
+                  <a:srgbClr val="111111"/>
+                </a:solidFill>
+                <a:latin typeface="Times New Roman" pitchFamily="34" charset="0"/>
+                <a:ea typeface="Times New Roman" pitchFamily="34" charset="-122"/>
+                <a:cs typeface="Times New Roman" pitchFamily="34" charset="-120"/>
+              </a:rPr>
+              <a:t>Core: </a:t>
+            </a:r>
+            <a:pPr algn="l" indent="0" marL="0">
+              <a:spcAft>
+                <a:spcPts val="800"/>
+              </a:spcAft>
+              <a:buNone/>
+            </a:pPr>
+            <a:r>
+              <a:rPr lang="en-US" sz="4000" dirty="0">
+                <a:solidFill>
+                  <a:srgbClr val="111111"/>
+                </a:solidFill>
+                <a:latin typeface="Times New Roman" pitchFamily="34" charset="0"/>
+                <a:ea typeface="Times New Roman" pitchFamily="34" charset="-122"/>
+                <a:cs typeface="Times New Roman" pitchFamily="34" charset="-120"/>
+              </a:rPr>
+              <a:t>It is a prosperous region where population, capital and activities are concentrated.</a:t>
+            </a:r>
+            <a:endParaRPr lang="en-US" sz="4000" dirty="0"/>
+          </a:p>
+          <a:p>
+            <a:pPr algn="l" indent="0" marL="0">
+              <a:spcAft>
+                <a:spcPts val="800"/>
+              </a:spcAft>
+              <a:buNone/>
+            </a:pPr>
+            <a:r>
+              <a:rPr lang="en-US" sz="4000" b="1" dirty="0">
+                <a:solidFill>
+                  <a:srgbClr val="111111"/>
+                </a:solidFill>
+                <a:latin typeface="Times New Roman" pitchFamily="34" charset="0"/>
+                <a:ea typeface="Times New Roman" pitchFamily="34" charset="-122"/>
+                <a:cs typeface="Times New Roman" pitchFamily="34" charset="-120"/>
+              </a:rPr>
+              <a:t>Periphery: </a:t>
+            </a:r>
+            <a:pPr algn="l" indent="0" marL="0">
+              <a:spcAft>
+                <a:spcPts val="800"/>
+              </a:spcAft>
+              <a:buNone/>
+            </a:pPr>
+            <a:r>
+              <a:rPr lang="en-US" sz="4000" dirty="0">
+                <a:solidFill>
+                  <a:srgbClr val="111111"/>
+                </a:solidFill>
+                <a:latin typeface="Times New Roman" pitchFamily="34" charset="0"/>
+                <a:ea typeface="Times New Roman" pitchFamily="34" charset="-122"/>
+                <a:cs typeface="Times New Roman" pitchFamily="34" charset="-120"/>
+              </a:rPr>
+              <a:t>It is a less developed region that depends on the core.</a:t>
+            </a:r>
+            <a:endParaRPr lang="en-US" sz="4000" dirty="0"/>
           </a:p>
         </p:txBody>
       </p:sp>
@@ -15378,9 +15371,129 @@
           </a:p>
         </p:txBody>
       </p:sp>
+      <p:sp>
+        <p:nvSpPr>
+          <p:cNvPr id="3" name="Text 1"/>
+          <p:cNvSpPr/>
+          <p:nvPr/>
+        </p:nvSpPr>
+        <p:spPr>
+          <a:xfrm>
+            <a:off x="365760" y="1005840"/>
+            <a:ext cx="11460175" cy="731520"/>
+          </a:xfrm>
+          <a:prstGeom prst="rect">
+            <a:avLst/>
+          </a:prstGeom>
+          <a:noFill/>
+          <a:ln/>
+        </p:spPr>
+        <p:txBody>
+          <a:bodyPr wrap="square" lIns="0" tIns="0" rIns="0" bIns="0" rtlCol="0" anchor="ctr">
+            <a:normAutofit/>
+          </a:bodyPr>
+          <a:lstStyle/>
+          <a:p>
+            <a:pPr algn="ctr" indent="0" marL="0">
+              <a:buNone/>
+            </a:pPr>
+            <a:r>
+              <a:rPr lang="en-US" sz="3600" b="1" dirty="0">
+                <a:solidFill>
+                  <a:srgbClr val="990011"/>
+                </a:solidFill>
+                <a:latin typeface="Times New Roman" pitchFamily="34" charset="0"/>
+                <a:ea typeface="Times New Roman" pitchFamily="34" charset="-122"/>
+                <a:cs typeface="Times New Roman" pitchFamily="34" charset="-120"/>
+              </a:rPr>
+              <a:t>1. Recall of the Models of Regional Inequality</a:t>
+            </a:r>
+            <a:endParaRPr lang="en-US" sz="3600" dirty="0"/>
+          </a:p>
+        </p:txBody>
+      </p:sp>
+      <p:sp>
+        <p:nvSpPr>
+          <p:cNvPr id="4" name="Text 2"/>
+          <p:cNvSpPr/>
+          <p:nvPr/>
+        </p:nvSpPr>
+        <p:spPr>
+          <a:xfrm>
+            <a:off x="365760" y="1783080"/>
+            <a:ext cx="4846320" cy="4617720"/>
+          </a:xfrm>
+          <a:prstGeom prst="rect">
+            <a:avLst/>
+          </a:prstGeom>
+          <a:noFill/>
+          <a:ln/>
+        </p:spPr>
+        <p:txBody>
+          <a:bodyPr wrap="square" lIns="0" tIns="0" rIns="0" bIns="0" rtlCol="0" anchor="t"/>
+          <a:lstStyle/>
+          <a:p>
+            <a:pPr algn="l" indent="0" marL="0">
+              <a:spcAft>
+                <a:spcPts val="800"/>
+              </a:spcAft>
+              <a:buNone/>
+            </a:pPr>
+            <a:r>
+              <a:rPr lang="en-US" sz="3200" i="1" dirty="0">
+                <a:solidFill>
+                  <a:srgbClr val="111111"/>
+                </a:solidFill>
+                <a:latin typeface="Times New Roman" pitchFamily="34" charset="0"/>
+                <a:ea typeface="Times New Roman" pitchFamily="34" charset="-122"/>
+                <a:cs typeface="Times New Roman" pitchFamily="34" charset="-120"/>
+              </a:rPr>
+              <a:t>The models of regional inequality are the following:</a:t>
+            </a:r>
+            <a:endParaRPr lang="en-US" sz="3200" dirty="0"/>
+          </a:p>
+          <a:p>
+            <a:pPr algn="l" indent="0" marL="0">
+              <a:spcAft>
+                <a:spcPts val="800"/>
+              </a:spcAft>
+              <a:buNone/>
+            </a:pPr>
+            <a:r>
+              <a:rPr lang="en-US" sz="3200" b="1" dirty="0">
+                <a:solidFill>
+                  <a:srgbClr val="111111"/>
+                </a:solidFill>
+                <a:latin typeface="Times New Roman" pitchFamily="34" charset="0"/>
+                <a:ea typeface="Times New Roman" pitchFamily="34" charset="-122"/>
+                <a:cs typeface="Times New Roman" pitchFamily="34" charset="-120"/>
+              </a:rPr>
+              <a:t>Myrdal (cumulative causation, 1957): </a:t>
+            </a:r>
+            <a:pPr algn="l" indent="0" marL="0">
+              <a:spcAft>
+                <a:spcPts val="800"/>
+              </a:spcAft>
+              <a:buNone/>
+            </a:pPr>
+            <a:r>
+              <a:rPr lang="en-US" sz="3200" dirty="0">
+                <a:solidFill>
+                  <a:srgbClr val="111111"/>
+                </a:solidFill>
+                <a:latin typeface="Times New Roman" pitchFamily="34" charset="0"/>
+                <a:ea typeface="Times New Roman" pitchFamily="34" charset="-122"/>
+                <a:cs typeface="Times New Roman" pitchFamily="34" charset="-120"/>
+              </a:rPr>
+              <a:t>An initial advantage (a port, a capital) attracts investment and grows by a cumulative process.</a:t>
+            </a:r>
+            <a:endParaRPr lang="en-US" sz="3200" dirty="0"/>
+          </a:p>
+        </p:txBody>
+      </p:sp>
       <p:pic>
         <p:nvPicPr>
-          <p:cNvPr id="3" name="Image 0" descr="/home/claude/f4/img/minesec_sheet.png">    </p:cNvPr>
+          <p:cNvPr id="5" name="Image 0" descr="/home/claude/f4/img/v2/core_periphery_big.png">    </p:cNvPr>
           <p:cNvPicPr>
             <a:picLocks noChangeAspect="1"/>
           </p:cNvPicPr>
@@ -15394,8 +15507,8 @@
         </p:blipFill>
         <p:spPr>
           <a:xfrm>
-            <a:off x="0" y="658368"/>
-            <a:ext cx="3840480" cy="5833872"/>
+            <a:off x="5349240" y="2617506"/>
+            <a:ext cx="6659575" cy="2601397"/>
           </a:xfrm>
           <a:prstGeom prst="rect">
             <a:avLst/>
@@ -15404,14 +15517,14 @@
       </p:pic>
       <p:sp>
         <p:nvSpPr>
-          <p:cNvPr id="4" name="Text 1"/>
+          <p:cNvPr id="6" name="Text 3"/>
           <p:cNvSpPr/>
           <p:nvPr/>
         </p:nvSpPr>
         <p:spPr>
           <a:xfrm>
-            <a:off x="4069080" y="1005840"/>
-            <a:ext cx="7802575" cy="731520"/>
+            <a:off x="5349240" y="6089904"/>
+            <a:ext cx="6659575" cy="347472"/>
           </a:xfrm>
           <a:prstGeom prst="rect">
             <a:avLst/>
@@ -15420,85 +15533,24 @@
           <a:ln/>
         </p:spPr>
         <p:txBody>
-          <a:bodyPr wrap="square" lIns="0" tIns="0" rIns="0" bIns="0" rtlCol="0" anchor="ctr">
-            <a:normAutofit/>
-          </a:bodyPr>
+          <a:bodyPr wrap="square" lIns="0" tIns="0" rIns="0" bIns="0" rtlCol="0" anchor="ctr"/>
           <a:lstStyle/>
           <a:p>
             <a:pPr algn="ctr" indent="0" marL="0">
               <a:buNone/>
             </a:pPr>
             <a:r>
-              <a:rPr lang="en-US" sz="3600" b="1" dirty="0">
-                <a:solidFill>
-                  <a:srgbClr val="990011"/>
+              <a:rPr lang="en-US" sz="1600" i="1" dirty="0">
+                <a:solidFill>
+                  <a:srgbClr val="555555"/>
                 </a:solidFill>
                 <a:latin typeface="Times New Roman" pitchFamily="34" charset="0"/>
                 <a:ea typeface="Times New Roman" pitchFamily="34" charset="-122"/>
                 <a:cs typeface="Times New Roman" pitchFamily="34" charset="-120"/>
               </a:rPr>
-              <a:t>1. Recall of the Models of Regional Inequality</a:t>
-            </a:r>
-            <a:endParaRPr lang="en-US" sz="3600" dirty="0"/>
-          </a:p>
-        </p:txBody>
-      </p:sp>
-      <p:sp>
-        <p:nvSpPr>
-          <p:cNvPr id="5" name="Text 2"/>
-          <p:cNvSpPr/>
-          <p:nvPr/>
-        </p:nvSpPr>
-        <p:spPr>
-          <a:xfrm>
-            <a:off x="4069080" y="1783080"/>
-            <a:ext cx="7802575" cy="4663440"/>
-          </a:xfrm>
-          <a:prstGeom prst="rect">
-            <a:avLst/>
-          </a:prstGeom>
-          <a:noFill/>
-          <a:ln/>
-        </p:spPr>
-        <p:txBody>
-          <a:bodyPr wrap="square" lIns="0" tIns="0" rIns="0" bIns="0" rtlCol="0" anchor="t"/>
-          <a:lstStyle/>
-          <a:p>
-            <a:pPr algn="l" indent="0" marL="0">
-              <a:spcAft>
-                <a:spcPts val="800"/>
-              </a:spcAft>
-              <a:buNone/>
-            </a:pPr>
-            <a:r>
-              <a:rPr lang="en-US" sz="4000" b="1" dirty="0">
-                <a:solidFill>
-                  <a:srgbClr val="111111"/>
-                </a:solidFill>
-                <a:latin typeface="Times New Roman" pitchFamily="34" charset="0"/>
-                <a:ea typeface="Times New Roman" pitchFamily="34" charset="-122"/>
-                <a:cs typeface="Times New Roman" pitchFamily="34" charset="-120"/>
-              </a:rPr>
-              <a:t>Backwash and spread effects: </a:t>
-            </a:r>
-            <a:pPr algn="l" indent="0" marL="0">
-              <a:spcAft>
-                <a:spcPts val="800"/>
-              </a:spcAft>
-              <a:buNone/>
-            </a:pPr>
-            <a:r>
-              <a:rPr lang="en-US" sz="4000" dirty="0">
-                <a:solidFill>
-                  <a:srgbClr val="111111"/>
-                </a:solidFill>
-                <a:latin typeface="Times New Roman" pitchFamily="34" charset="0"/>
-                <a:ea typeface="Times New Roman" pitchFamily="34" charset="-122"/>
-                <a:cs typeface="Times New Roman" pitchFamily="34" charset="-120"/>
-              </a:rPr>
-              <a:t>The growing region draws labour, capital and raw materials from poorer regions (backwash), and later some growth spreads to them (spread), but backwash is often stronger.</a:t>
-            </a:r>
-            <a:endParaRPr lang="en-US" sz="4000" dirty="0"/>
+              <a:t>Illustration: core and periphery</a:t>
+            </a:r>
+            <a:endParaRPr lang="en-US" sz="1600" dirty="0"/>
           </a:p>
         </p:txBody>
       </p:sp>
@@ -15631,7 +15683,7 @@
         <p:spPr>
           <a:xfrm>
             <a:off x="0" y="658368"/>
-            <a:ext cx="5120640" cy="5833872"/>
+            <a:ext cx="3840480" cy="5833872"/>
           </a:xfrm>
           <a:prstGeom prst="rect">
             <a:avLst/>
@@ -15646,8 +15698,8 @@
         </p:nvSpPr>
         <p:spPr>
           <a:xfrm>
-            <a:off x="5349240" y="1005840"/>
-            <a:ext cx="6522415" cy="731520"/>
+            <a:off x="4069080" y="1005840"/>
+            <a:ext cx="7802575" cy="731520"/>
           </a:xfrm>
           <a:prstGeom prst="rect">
             <a:avLst/>
@@ -15673,7 +15725,7 @@
                 <a:ea typeface="Times New Roman" pitchFamily="34" charset="-122"/>
                 <a:cs typeface="Times New Roman" pitchFamily="34" charset="-120"/>
               </a:rPr>
-              <a:t>1. Recall of the Models of Regional Inequality (continued)</a:t>
+              <a:t>1. Recall of the Models of Regional Inequality</a:t>
             </a:r>
             <a:endParaRPr lang="en-US" sz="3600" dirty="0"/>
           </a:p>
@@ -15687,8 +15739,8 @@
         </p:nvSpPr>
         <p:spPr>
           <a:xfrm>
-            <a:off x="5349240" y="1783080"/>
-            <a:ext cx="6522415" cy="4663440"/>
+            <a:off x="4069080" y="1783080"/>
+            <a:ext cx="7802575" cy="4663440"/>
           </a:xfrm>
           <a:prstGeom prst="rect">
             <a:avLst/>
@@ -15715,7 +15767,7 @@
                 <a:ea typeface="Times New Roman" pitchFamily="34" charset="-122"/>
                 <a:cs typeface="Times New Roman" pitchFamily="34" charset="-120"/>
               </a:rPr>
-              <a:t>Friedmann (core-periphery, 1966): </a:t>
+              <a:t>Backwash and spread effects: </a:t>
             </a:r>
             <a:pPr algn="l" indent="0" marL="0">
               <a:spcAft>
@@ -15732,7 +15784,7 @@
                 <a:ea typeface="Times New Roman" pitchFamily="34" charset="-122"/>
                 <a:cs typeface="Times New Roman" pitchFamily="34" charset="-120"/>
               </a:rPr>
-              <a:t>A dominant core and a dependent periphery; inequality grows in the early stages and may fall later when development spreads.</a:t>
+              <a:t>The growing region draws labour, capital and raw materials from poorer regions (backwash), and later some growth spreads to them (spread), but backwash is often stronger.</a:t>
             </a:r>
             <a:endParaRPr lang="en-US" sz="4000" dirty="0"/>
           </a:p>
@@ -16089,129 +16141,9 @@
           </a:p>
         </p:txBody>
       </p:sp>
-      <p:sp>
-        <p:nvSpPr>
-          <p:cNvPr id="3" name="Text 1"/>
-          <p:cNvSpPr/>
-          <p:nvPr/>
-        </p:nvSpPr>
-        <p:spPr>
-          <a:xfrm>
-            <a:off x="365760" y="1005840"/>
-            <a:ext cx="11460175" cy="731520"/>
-          </a:xfrm>
-          <a:prstGeom prst="rect">
-            <a:avLst/>
-          </a:prstGeom>
-          <a:noFill/>
-          <a:ln/>
-        </p:spPr>
-        <p:txBody>
-          <a:bodyPr wrap="square" lIns="0" tIns="0" rIns="0" bIns="0" rtlCol="0" anchor="ctr">
-            <a:normAutofit/>
-          </a:bodyPr>
-          <a:lstStyle/>
-          <a:p>
-            <a:pPr algn="ctr" indent="0" marL="0">
-              <a:buNone/>
-            </a:pPr>
-            <a:r>
-              <a:rPr lang="en-US" sz="3600" b="1" dirty="0">
-                <a:solidFill>
-                  <a:srgbClr val="990011"/>
-                </a:solidFill>
-                <a:latin typeface="Times New Roman" pitchFamily="34" charset="0"/>
-                <a:ea typeface="Times New Roman" pitchFamily="34" charset="-122"/>
-                <a:cs typeface="Times New Roman" pitchFamily="34" charset="-120"/>
-              </a:rPr>
-              <a:t>2. The Contrasting Regions: Case Study</a:t>
-            </a:r>
-            <a:endParaRPr lang="en-US" sz="3600" dirty="0"/>
-          </a:p>
-        </p:txBody>
-      </p:sp>
-      <p:sp>
-        <p:nvSpPr>
-          <p:cNvPr id="4" name="Text 2"/>
-          <p:cNvSpPr/>
-          <p:nvPr/>
-        </p:nvSpPr>
-        <p:spPr>
-          <a:xfrm>
-            <a:off x="365760" y="1783080"/>
-            <a:ext cx="4846320" cy="4617720"/>
-          </a:xfrm>
-          <a:prstGeom prst="rect">
-            <a:avLst/>
-          </a:prstGeom>
-          <a:noFill/>
-          <a:ln/>
-        </p:spPr>
-        <p:txBody>
-          <a:bodyPr wrap="square" lIns="0" tIns="0" rIns="0" bIns="0" rtlCol="0" anchor="t"/>
-          <a:lstStyle/>
-          <a:p>
-            <a:pPr algn="l" indent="0" marL="0">
-              <a:spcAft>
-                <a:spcPts val="800"/>
-              </a:spcAft>
-              <a:buNone/>
-            </a:pPr>
-            <a:r>
-              <a:rPr lang="en-US" sz="3200" i="1" dirty="0">
-                <a:solidFill>
-                  <a:srgbClr val="111111"/>
-                </a:solidFill>
-                <a:latin typeface="Times New Roman" pitchFamily="34" charset="0"/>
-                <a:ea typeface="Times New Roman" pitchFamily="34" charset="-122"/>
-                <a:cs typeface="Times New Roman" pitchFamily="34" charset="-120"/>
-              </a:rPr>
-              <a:t>The case study compares the following two regions:</a:t>
-            </a:r>
-            <a:endParaRPr lang="en-US" sz="3200" dirty="0"/>
-          </a:p>
-          <a:p>
-            <a:pPr algn="l" indent="0" marL="0">
-              <a:spcAft>
-                <a:spcPts val="800"/>
-              </a:spcAft>
-              <a:buNone/>
-            </a:pPr>
-            <a:r>
-              <a:rPr lang="en-US" sz="3200" b="1" dirty="0">
-                <a:solidFill>
-                  <a:srgbClr val="111111"/>
-                </a:solidFill>
-                <a:latin typeface="Times New Roman" pitchFamily="34" charset="0"/>
-                <a:ea typeface="Times New Roman" pitchFamily="34" charset="-122"/>
-                <a:cs typeface="Times New Roman" pitchFamily="34" charset="-120"/>
-              </a:rPr>
-              <a:t>Prosperous region: the Coastal lowlands: </a:t>
-            </a:r>
-            <a:pPr algn="l" indent="0" marL="0">
-              <a:spcAft>
-                <a:spcPts val="800"/>
-              </a:spcAft>
-              <a:buNone/>
-            </a:pPr>
-            <a:r>
-              <a:rPr lang="en-US" sz="3200" dirty="0">
-                <a:solidFill>
-                  <a:srgbClr val="111111"/>
-                </a:solidFill>
-                <a:latin typeface="Times New Roman" pitchFamily="34" charset="0"/>
-                <a:ea typeface="Times New Roman" pitchFamily="34" charset="-122"/>
-                <a:cs typeface="Times New Roman" pitchFamily="34" charset="-120"/>
-              </a:rPr>
-              <a:t>With Douala, Limbe and Kribi, they are the economic heart of Cameroon: port, industries, plantations, oil, services.</a:t>
-            </a:r>
-            <a:endParaRPr lang="en-US" sz="3200" dirty="0"/>
-          </a:p>
-        </p:txBody>
-      </p:sp>
       <p:pic>
         <p:nvPicPr>
-          <p:cNvPr id="5" name="Image 0" descr="/home/claude/f4/img/v2/cmr_contrast_big.png">    </p:cNvPr>
+          <p:cNvPr id="3" name="Image 0" descr="/home/claude/f4/img/minesec_sheet.png">    </p:cNvPr>
           <p:cNvPicPr>
             <a:picLocks noChangeAspect="1"/>
           </p:cNvPicPr>
@@ -16225,8 +16157,8 @@
         </p:blipFill>
         <p:spPr>
           <a:xfrm>
-            <a:off x="5349240" y="2253310"/>
-            <a:ext cx="6659575" cy="3329788"/>
+            <a:off x="0" y="658368"/>
+            <a:ext cx="5120640" cy="5833872"/>
           </a:xfrm>
           <a:prstGeom prst="rect">
             <a:avLst/>
@@ -16235,14 +16167,14 @@
       </p:pic>
       <p:sp>
         <p:nvSpPr>
-          <p:cNvPr id="6" name="Text 3"/>
+          <p:cNvPr id="4" name="Text 1"/>
           <p:cNvSpPr/>
           <p:nvPr/>
         </p:nvSpPr>
         <p:spPr>
           <a:xfrm>
-            <a:off x="5349240" y="6089904"/>
-            <a:ext cx="6659575" cy="347472"/>
+            <a:off x="5349240" y="1005840"/>
+            <a:ext cx="6522415" cy="731520"/>
           </a:xfrm>
           <a:prstGeom prst="rect">
             <a:avLst/>
@@ -16251,24 +16183,85 @@
           <a:ln/>
         </p:spPr>
         <p:txBody>
-          <a:bodyPr wrap="square" lIns="0" tIns="0" rIns="0" bIns="0" rtlCol="0" anchor="ctr"/>
+          <a:bodyPr wrap="square" lIns="0" tIns="0" rIns="0" bIns="0" rtlCol="0" anchor="ctr">
+            <a:normAutofit/>
+          </a:bodyPr>
           <a:lstStyle/>
           <a:p>
             <a:pPr algn="ctr" indent="0" marL="0">
               <a:buNone/>
             </a:pPr>
             <a:r>
-              <a:rPr lang="en-US" sz="1600" i="1" dirty="0">
-                <a:solidFill>
-                  <a:srgbClr val="555555"/>
+              <a:rPr lang="en-US" sz="3600" b="1" dirty="0">
+                <a:solidFill>
+                  <a:srgbClr val="990011"/>
                 </a:solidFill>
                 <a:latin typeface="Times New Roman" pitchFamily="34" charset="0"/>
                 <a:ea typeface="Times New Roman" pitchFamily="34" charset="-122"/>
                 <a:cs typeface="Times New Roman" pitchFamily="34" charset="-120"/>
               </a:rPr>
-              <a:t>Illustration: prosperous and lagging regions</a:t>
-            </a:r>
-            <a:endParaRPr lang="en-US" sz="1600" dirty="0"/>
+              <a:t>1. Recall of the Models of Regional Inequality (continued)</a:t>
+            </a:r>
+            <a:endParaRPr lang="en-US" sz="3600" dirty="0"/>
+          </a:p>
+        </p:txBody>
+      </p:sp>
+      <p:sp>
+        <p:nvSpPr>
+          <p:cNvPr id="5" name="Text 2"/>
+          <p:cNvSpPr/>
+          <p:nvPr/>
+        </p:nvSpPr>
+        <p:spPr>
+          <a:xfrm>
+            <a:off x="5349240" y="1783080"/>
+            <a:ext cx="6522415" cy="4663440"/>
+          </a:xfrm>
+          <a:prstGeom prst="rect">
+            <a:avLst/>
+          </a:prstGeom>
+          <a:noFill/>
+          <a:ln/>
+        </p:spPr>
+        <p:txBody>
+          <a:bodyPr wrap="square" lIns="0" tIns="0" rIns="0" bIns="0" rtlCol="0" anchor="t"/>
+          <a:lstStyle/>
+          <a:p>
+            <a:pPr algn="l" indent="0" marL="0">
+              <a:spcAft>
+                <a:spcPts val="800"/>
+              </a:spcAft>
+              <a:buNone/>
+            </a:pPr>
+            <a:r>
+              <a:rPr lang="en-US" sz="4000" b="1" dirty="0">
+                <a:solidFill>
+                  <a:srgbClr val="111111"/>
+                </a:solidFill>
+                <a:latin typeface="Times New Roman" pitchFamily="34" charset="0"/>
+                <a:ea typeface="Times New Roman" pitchFamily="34" charset="-122"/>
+                <a:cs typeface="Times New Roman" pitchFamily="34" charset="-120"/>
+              </a:rPr>
+              <a:t>Friedmann (core-periphery, 1966): </a:t>
+            </a:r>
+            <a:pPr algn="l" indent="0" marL="0">
+              <a:spcAft>
+                <a:spcPts val="800"/>
+              </a:spcAft>
+              <a:buNone/>
+            </a:pPr>
+            <a:r>
+              <a:rPr lang="en-US" sz="4000" dirty="0">
+                <a:solidFill>
+                  <a:srgbClr val="111111"/>
+                </a:solidFill>
+                <a:latin typeface="Times New Roman" pitchFamily="34" charset="0"/>
+                <a:ea typeface="Times New Roman" pitchFamily="34" charset="-122"/>
+                <a:cs typeface="Times New Roman" pitchFamily="34" charset="-120"/>
+              </a:rPr>
+              <a:t>A dominant core and a dependent periphery; inequality grows in the early stages and may fall later when development spreads.</a:t>
+            </a:r>
+            <a:endParaRPr lang="en-US" sz="4000" dirty="0"/>
           </a:p>
         </p:txBody>
       </p:sp>
@@ -16453,7 +16446,7 @@
               <a:buNone/>
             </a:pPr>
             <a:r>
-              <a:rPr lang="en-US" sz="3600" b="1" dirty="0">
+              <a:rPr lang="en-US" sz="3200" i="1" dirty="0">
                 <a:solidFill>
                   <a:srgbClr val="111111"/>
                 </a:solidFill>
@@ -16461,8 +16454,11 @@
                 <a:ea typeface="Times New Roman" pitchFamily="34" charset="-122"/>
                 <a:cs typeface="Times New Roman" pitchFamily="34" charset="-120"/>
               </a:rPr>
-              <a:t>Lagging region: the Adamawa: </a:t>
-            </a:r>
+              <a:t>The case study compares the following two regions:</a:t>
+            </a:r>
+            <a:endParaRPr lang="en-US" sz="3200" dirty="0"/>
+          </a:p>
+          <a:p>
             <a:pPr algn="l" indent="0" marL="0">
               <a:spcAft>
                 <a:spcPts val="800"/>
@@ -16470,7 +16466,7 @@
               <a:buNone/>
             </a:pPr>
             <a:r>
-              <a:rPr lang="en-US" sz="3600" dirty="0">
+              <a:rPr lang="en-US" sz="3200" b="1" dirty="0">
                 <a:solidFill>
                   <a:srgbClr val="111111"/>
                 </a:solidFill>
@@ -16478,15 +16474,32 @@
                 <a:ea typeface="Times New Roman" pitchFamily="34" charset="-122"/>
                 <a:cs typeface="Times New Roman" pitchFamily="34" charset="-120"/>
               </a:rPr>
-              <a:t>A high, landlocked plateau, sparsely populated, living mainly from cattle rearing and farming.</a:t>
-            </a:r>
-            <a:endParaRPr lang="en-US" sz="3600" dirty="0"/>
+              <a:t>Prosperous region: the Coastal lowlands: </a:t>
+            </a:r>
+            <a:pPr algn="l" indent="0" marL="0">
+              <a:spcAft>
+                <a:spcPts val="800"/>
+              </a:spcAft>
+              <a:buNone/>
+            </a:pPr>
+            <a:r>
+              <a:rPr lang="en-US" sz="3200" dirty="0">
+                <a:solidFill>
+                  <a:srgbClr val="111111"/>
+                </a:solidFill>
+                <a:latin typeface="Times New Roman" pitchFamily="34" charset="0"/>
+                <a:ea typeface="Times New Roman" pitchFamily="34" charset="-122"/>
+                <a:cs typeface="Times New Roman" pitchFamily="34" charset="-120"/>
+              </a:rPr>
+              <a:t>With Douala, Limbe and Kribi, they are the economic heart of Cameroon: port, industries, plantations, oil, services.</a:t>
+            </a:r>
+            <a:endParaRPr lang="en-US" sz="3200" dirty="0"/>
           </a:p>
         </p:txBody>
       </p:sp>
       <p:pic>
         <p:nvPicPr>
-          <p:cNvPr id="5" name="Image 0" descr="/home/claude/f4/img/v2/lsa_adamawa.jpg">    </p:cNvPr>
+          <p:cNvPr id="5" name="Image 0" descr="/home/claude/f4/img/v2/cmr_contrast_big.png">    </p:cNvPr>
           <p:cNvPicPr>
             <a:picLocks noChangeAspect="1"/>
           </p:cNvPicPr>
@@ -16500,8 +16513,8 @@
         </p:blipFill>
         <p:spPr>
           <a:xfrm>
-            <a:off x="5349240" y="2071212"/>
-            <a:ext cx="6659575" cy="3693983"/>
+            <a:off x="5349240" y="2253310"/>
+            <a:ext cx="6659575" cy="3329788"/>
           </a:xfrm>
           <a:prstGeom prst="rect">
             <a:avLst/>
@@ -16541,7 +16554,7 @@
                 <a:ea typeface="Times New Roman" pitchFamily="34" charset="-122"/>
                 <a:cs typeface="Times New Roman" pitchFamily="34" charset="-120"/>
               </a:rPr>
-              <a:t>Illustration: the Adamawa Plateau</a:t>
+              <a:t>Illustration: prosperous and lagging regions</a:t>
             </a:r>
             <a:endParaRPr lang="en-US" sz="1600" dirty="0"/>
           </a:p>
@@ -16694,7 +16707,7 @@
                 <a:ea typeface="Times New Roman" pitchFamily="34" charset="-122"/>
                 <a:cs typeface="Times New Roman" pitchFamily="34" charset="-120"/>
               </a:rPr>
-              <a:t>3. Indicators of Differences in Development</a:t>
+              <a:t>2. The Contrasting Regions: Case Study</a:t>
             </a:r>
             <a:endParaRPr lang="en-US" sz="3600" dirty="0"/>
           </a:p>
@@ -16728,7 +16741,7 @@
               <a:buNone/>
             </a:pPr>
             <a:r>
-              <a:rPr lang="en-US" sz="3000" i="1" dirty="0">
+              <a:rPr lang="en-US" sz="3600" b="1" dirty="0">
                 <a:solidFill>
                   <a:srgbClr val="111111"/>
                 </a:solidFill>
@@ -16736,11 +16749,8 @@
                 <a:ea typeface="Times New Roman" pitchFamily="34" charset="-122"/>
                 <a:cs typeface="Times New Roman" pitchFamily="34" charset="-120"/>
               </a:rPr>
-              <a:t>The indicators of the differences between the two regions are the following:</a:t>
-            </a:r>
-            <a:endParaRPr lang="en-US" sz="3000" dirty="0"/>
-          </a:p>
-          <a:p>
+              <a:t>Lagging region: the Adamawa: </a:t>
+            </a:r>
             <a:pPr algn="l" indent="0" marL="0">
               <a:spcAft>
                 <a:spcPts val="800"/>
@@ -16748,7 +16758,7 @@
               <a:buNone/>
             </a:pPr>
             <a:r>
-              <a:rPr lang="en-US" sz="3000" b="1" dirty="0">
+              <a:rPr lang="en-US" sz="3600" dirty="0">
                 <a:solidFill>
                   <a:srgbClr val="111111"/>
                 </a:solidFill>
@@ -16756,32 +16766,15 @@
                 <a:ea typeface="Times New Roman" pitchFamily="34" charset="-122"/>
                 <a:cs typeface="Times New Roman" pitchFamily="34" charset="-120"/>
               </a:rPr>
-              <a:t>Income and poverty: </a:t>
-            </a:r>
-            <a:pPr algn="l" indent="0" marL="0">
-              <a:spcAft>
-                <a:spcPts val="800"/>
-              </a:spcAft>
-              <a:buNone/>
-            </a:pPr>
-            <a:r>
-              <a:rPr lang="en-US" sz="3000" dirty="0">
-                <a:solidFill>
-                  <a:srgbClr val="111111"/>
-                </a:solidFill>
-                <a:latin typeface="Times New Roman" pitchFamily="34" charset="0"/>
-                <a:ea typeface="Times New Roman" pitchFamily="34" charset="-122"/>
-                <a:cs typeface="Times New Roman" pitchFamily="34" charset="-120"/>
-              </a:rPr>
-              <a:t>Poverty is very low in Douala (about 4 % of people in 2014) but high in the Adamawa (about 47 %).</a:t>
-            </a:r>
-            <a:endParaRPr lang="en-US" sz="3000" dirty="0"/>
+              <a:t>A high, landlocked plateau, sparsely populated, living mainly from cattle rearing and farming.</a:t>
+            </a:r>
+            <a:endParaRPr lang="en-US" sz="3600" dirty="0"/>
           </a:p>
         </p:txBody>
       </p:sp>
       <p:pic>
         <p:nvPicPr>
-          <p:cNvPr id="5" name="Image 0" descr="/home/claude/f4/img/v2/cmr_dev_table_big.png">    </p:cNvPr>
+          <p:cNvPr id="5" name="Image 0" descr="/home/claude/f4/img/v2/lsa_adamawa.jpg">    </p:cNvPr>
           <p:cNvPicPr>
             <a:picLocks noChangeAspect="1"/>
           </p:cNvPicPr>
@@ -16795,8 +16788,8 @@
         </p:blipFill>
         <p:spPr>
           <a:xfrm>
-            <a:off x="5349240" y="2617506"/>
-            <a:ext cx="6659575" cy="2601397"/>
+            <a:off x="5349240" y="2071212"/>
+            <a:ext cx="6659575" cy="3693983"/>
           </a:xfrm>
           <a:prstGeom prst="rect">
             <a:avLst/>
@@ -16836,7 +16829,7 @@
                 <a:ea typeface="Times New Roman" pitchFamily="34" charset="-122"/>
                 <a:cs typeface="Times New Roman" pitchFamily="34" charset="-120"/>
               </a:rPr>
-              <a:t>Illustration: indicators compared</a:t>
+              <a:t>Illustration: the Adamawa Plateau</a:t>
             </a:r>
             <a:endParaRPr lang="en-US" sz="1600" dirty="0"/>
           </a:p>
@@ -16954,9 +16947,129 @@
           </a:p>
         </p:txBody>
       </p:sp>
+      <p:sp>
+        <p:nvSpPr>
+          <p:cNvPr id="3" name="Text 1"/>
+          <p:cNvSpPr/>
+          <p:nvPr/>
+        </p:nvSpPr>
+        <p:spPr>
+          <a:xfrm>
+            <a:off x="365760" y="1005840"/>
+            <a:ext cx="11460175" cy="731520"/>
+          </a:xfrm>
+          <a:prstGeom prst="rect">
+            <a:avLst/>
+          </a:prstGeom>
+          <a:noFill/>
+          <a:ln/>
+        </p:spPr>
+        <p:txBody>
+          <a:bodyPr wrap="square" lIns="0" tIns="0" rIns="0" bIns="0" rtlCol="0" anchor="ctr">
+            <a:normAutofit/>
+          </a:bodyPr>
+          <a:lstStyle/>
+          <a:p>
+            <a:pPr algn="ctr" indent="0" marL="0">
+              <a:buNone/>
+            </a:pPr>
+            <a:r>
+              <a:rPr lang="en-US" sz="3600" b="1" dirty="0">
+                <a:solidFill>
+                  <a:srgbClr val="990011"/>
+                </a:solidFill>
+                <a:latin typeface="Times New Roman" pitchFamily="34" charset="0"/>
+                <a:ea typeface="Times New Roman" pitchFamily="34" charset="-122"/>
+                <a:cs typeface="Times New Roman" pitchFamily="34" charset="-120"/>
+              </a:rPr>
+              <a:t>3. Indicators of Differences in Development</a:t>
+            </a:r>
+            <a:endParaRPr lang="en-US" sz="3600" dirty="0"/>
+          </a:p>
+        </p:txBody>
+      </p:sp>
+      <p:sp>
+        <p:nvSpPr>
+          <p:cNvPr id="4" name="Text 2"/>
+          <p:cNvSpPr/>
+          <p:nvPr/>
+        </p:nvSpPr>
+        <p:spPr>
+          <a:xfrm>
+            <a:off x="365760" y="1783080"/>
+            <a:ext cx="4846320" cy="4617720"/>
+          </a:xfrm>
+          <a:prstGeom prst="rect">
+            <a:avLst/>
+          </a:prstGeom>
+          <a:noFill/>
+          <a:ln/>
+        </p:spPr>
+        <p:txBody>
+          <a:bodyPr wrap="square" lIns="0" tIns="0" rIns="0" bIns="0" rtlCol="0" anchor="t"/>
+          <a:lstStyle/>
+          <a:p>
+            <a:pPr algn="l" indent="0" marL="0">
+              <a:spcAft>
+                <a:spcPts val="800"/>
+              </a:spcAft>
+              <a:buNone/>
+            </a:pPr>
+            <a:r>
+              <a:rPr lang="en-US" sz="3000" i="1" dirty="0">
+                <a:solidFill>
+                  <a:srgbClr val="111111"/>
+                </a:solidFill>
+                <a:latin typeface="Times New Roman" pitchFamily="34" charset="0"/>
+                <a:ea typeface="Times New Roman" pitchFamily="34" charset="-122"/>
+                <a:cs typeface="Times New Roman" pitchFamily="34" charset="-120"/>
+              </a:rPr>
+              <a:t>The indicators of the differences between the two regions are the following:</a:t>
+            </a:r>
+            <a:endParaRPr lang="en-US" sz="3000" dirty="0"/>
+          </a:p>
+          <a:p>
+            <a:pPr algn="l" indent="0" marL="0">
+              <a:spcAft>
+                <a:spcPts val="800"/>
+              </a:spcAft>
+              <a:buNone/>
+            </a:pPr>
+            <a:r>
+              <a:rPr lang="en-US" sz="3000" b="1" dirty="0">
+                <a:solidFill>
+                  <a:srgbClr val="111111"/>
+                </a:solidFill>
+                <a:latin typeface="Times New Roman" pitchFamily="34" charset="0"/>
+                <a:ea typeface="Times New Roman" pitchFamily="34" charset="-122"/>
+                <a:cs typeface="Times New Roman" pitchFamily="34" charset="-120"/>
+              </a:rPr>
+              <a:t>Income and poverty: </a:t>
+            </a:r>
+            <a:pPr algn="l" indent="0" marL="0">
+              <a:spcAft>
+                <a:spcPts val="800"/>
+              </a:spcAft>
+              <a:buNone/>
+            </a:pPr>
+            <a:r>
+              <a:rPr lang="en-US" sz="3000" dirty="0">
+                <a:solidFill>
+                  <a:srgbClr val="111111"/>
+                </a:solidFill>
+                <a:latin typeface="Times New Roman" pitchFamily="34" charset="0"/>
+                <a:ea typeface="Times New Roman" pitchFamily="34" charset="-122"/>
+                <a:cs typeface="Times New Roman" pitchFamily="34" charset="-120"/>
+              </a:rPr>
+              <a:t>Poverty is very low in Douala (about 4 % of people in 2014) but high in the Adamawa (about 47 %).</a:t>
+            </a:r>
+            <a:endParaRPr lang="en-US" sz="3000" dirty="0"/>
+          </a:p>
+        </p:txBody>
+      </p:sp>
       <p:pic>
         <p:nvPicPr>
-          <p:cNvPr id="3" name="Image 0" descr="/home/claude/f4/img/minesec_sheet.png">    </p:cNvPr>
+          <p:cNvPr id="5" name="Image 0" descr="/home/claude/f4/img/v2/cmr_dev_table_big.png">    </p:cNvPr>
           <p:cNvPicPr>
             <a:picLocks noChangeAspect="1"/>
           </p:cNvPicPr>
@@ -16970,8 +17083,8 @@
         </p:blipFill>
         <p:spPr>
           <a:xfrm>
-            <a:off x="0" y="658368"/>
-            <a:ext cx="1463040" cy="5833872"/>
+            <a:off x="5349240" y="2617506"/>
+            <a:ext cx="6659575" cy="2601397"/>
           </a:xfrm>
           <a:prstGeom prst="rect">
             <a:avLst/>
@@ -16980,14 +17093,14 @@
       </p:pic>
       <p:sp>
         <p:nvSpPr>
-          <p:cNvPr id="4" name="Text 1"/>
+          <p:cNvPr id="6" name="Text 3"/>
           <p:cNvSpPr/>
           <p:nvPr/>
         </p:nvSpPr>
         <p:spPr>
           <a:xfrm>
-            <a:off x="1691640" y="1005840"/>
-            <a:ext cx="10180015" cy="731520"/>
+            <a:off x="5349240" y="6089904"/>
+            <a:ext cx="6659575" cy="347472"/>
           </a:xfrm>
           <a:prstGeom prst="rect">
             <a:avLst/>
@@ -16996,122 +17109,24 @@
           <a:ln/>
         </p:spPr>
         <p:txBody>
-          <a:bodyPr wrap="square" lIns="0" tIns="0" rIns="0" bIns="0" rtlCol="0" anchor="ctr">
-            <a:normAutofit/>
-          </a:bodyPr>
+          <a:bodyPr wrap="square" lIns="0" tIns="0" rIns="0" bIns="0" rtlCol="0" anchor="ctr"/>
           <a:lstStyle/>
           <a:p>
             <a:pPr algn="ctr" indent="0" marL="0">
               <a:buNone/>
             </a:pPr>
             <a:r>
-              <a:rPr lang="en-US" sz="3600" b="1" dirty="0">
-                <a:solidFill>
-                  <a:srgbClr val="990011"/>
+              <a:rPr lang="en-US" sz="1600" i="1" dirty="0">
+                <a:solidFill>
+                  <a:srgbClr val="555555"/>
                 </a:solidFill>
                 <a:latin typeface="Times New Roman" pitchFamily="34" charset="0"/>
                 <a:ea typeface="Times New Roman" pitchFamily="34" charset="-122"/>
                 <a:cs typeface="Times New Roman" pitchFamily="34" charset="-120"/>
               </a:rPr>
-              <a:t>3. Indicators of Differences in Development</a:t>
-            </a:r>
-            <a:endParaRPr lang="en-US" sz="3600" dirty="0"/>
-          </a:p>
-        </p:txBody>
-      </p:sp>
-      <p:sp>
-        <p:nvSpPr>
-          <p:cNvPr id="5" name="Text 2"/>
-          <p:cNvSpPr/>
-          <p:nvPr/>
-        </p:nvSpPr>
-        <p:spPr>
-          <a:xfrm>
-            <a:off x="1691640" y="1783080"/>
-            <a:ext cx="10180015" cy="4663440"/>
-          </a:xfrm>
-          <a:prstGeom prst="rect">
-            <a:avLst/>
-          </a:prstGeom>
-          <a:noFill/>
-          <a:ln/>
-        </p:spPr>
-        <p:txBody>
-          <a:bodyPr wrap="square" lIns="0" tIns="0" rIns="0" bIns="0" rtlCol="0" anchor="t"/>
-          <a:lstStyle/>
-          <a:p>
-            <a:pPr algn="l" indent="0" marL="0">
-              <a:spcAft>
-                <a:spcPts val="800"/>
-              </a:spcAft>
-              <a:buNone/>
-            </a:pPr>
-            <a:r>
-              <a:rPr lang="en-US" sz="4000" b="1" dirty="0">
-                <a:solidFill>
-                  <a:srgbClr val="111111"/>
-                </a:solidFill>
-                <a:latin typeface="Times New Roman" pitchFamily="34" charset="0"/>
-                <a:ea typeface="Times New Roman" pitchFamily="34" charset="-122"/>
-                <a:cs typeface="Times New Roman" pitchFamily="34" charset="-120"/>
-              </a:rPr>
-              <a:t>Employment: </a:t>
-            </a:r>
-            <a:pPr algn="l" indent="0" marL="0">
-              <a:spcAft>
-                <a:spcPts val="800"/>
-              </a:spcAft>
-              <a:buNone/>
-            </a:pPr>
-            <a:r>
-              <a:rPr lang="en-US" sz="4000" dirty="0">
-                <a:solidFill>
-                  <a:srgbClr val="111111"/>
-                </a:solidFill>
-                <a:latin typeface="Times New Roman" pitchFamily="34" charset="0"/>
-                <a:ea typeface="Times New Roman" pitchFamily="34" charset="-122"/>
-                <a:cs typeface="Times New Roman" pitchFamily="34" charset="-120"/>
-              </a:rPr>
-              <a:t>Many formal jobs in industry, the port and services on the coast; mostly farming and herding in the Adamawa.</a:t>
-            </a:r>
-            <a:endParaRPr lang="en-US" sz="4000" dirty="0"/>
-          </a:p>
-          <a:p>
-            <a:pPr algn="l" indent="0" marL="0">
-              <a:spcAft>
-                <a:spcPts val="800"/>
-              </a:spcAft>
-              <a:buNone/>
-            </a:pPr>
-            <a:r>
-              <a:rPr lang="en-US" sz="4000" b="1" dirty="0">
-                <a:solidFill>
-                  <a:srgbClr val="111111"/>
-                </a:solidFill>
-                <a:latin typeface="Times New Roman" pitchFamily="34" charset="0"/>
-                <a:ea typeface="Times New Roman" pitchFamily="34" charset="-122"/>
-                <a:cs typeface="Times New Roman" pitchFamily="34" charset="-120"/>
-              </a:rPr>
-              <a:t>Education: </a:t>
-            </a:r>
-            <a:pPr algn="l" indent="0" marL="0">
-              <a:spcAft>
-                <a:spcPts val="800"/>
-              </a:spcAft>
-              <a:buNone/>
-            </a:pPr>
-            <a:r>
-              <a:rPr lang="en-US" sz="4000" dirty="0">
-                <a:solidFill>
-                  <a:srgbClr val="111111"/>
-                </a:solidFill>
-                <a:latin typeface="Times New Roman" pitchFamily="34" charset="0"/>
-                <a:ea typeface="Times New Roman" pitchFamily="34" charset="-122"/>
-                <a:cs typeface="Times New Roman" pitchFamily="34" charset="-120"/>
-              </a:rPr>
-              <a:t>Many schools and universities (Douala, Buea) on the coast; fewer schools and lower school enrolment in the Adamawa.</a:t>
-            </a:r>
-            <a:endParaRPr lang="en-US" sz="4000" dirty="0"/>
+              <a:t>Illustration: indicators compared</a:t>
+            </a:r>
+            <a:endParaRPr lang="en-US" sz="1600" dirty="0"/>
           </a:p>
         </p:txBody>
       </p:sp>
@@ -17244,7 +17259,7 @@
         <p:spPr>
           <a:xfrm>
             <a:off x="0" y="658368"/>
-            <a:ext cx="3840480" cy="5833872"/>
+            <a:ext cx="1463040" cy="5833872"/>
           </a:xfrm>
           <a:prstGeom prst="rect">
             <a:avLst/>
@@ -17259,8 +17274,8 @@
         </p:nvSpPr>
         <p:spPr>
           <a:xfrm>
-            <a:off x="4069080" y="1005840"/>
-            <a:ext cx="7802575" cy="731520"/>
+            <a:off x="1691640" y="1005840"/>
+            <a:ext cx="10180015" cy="731520"/>
           </a:xfrm>
           <a:prstGeom prst="rect">
             <a:avLst/>
@@ -17286,7 +17301,7 @@
                 <a:ea typeface="Times New Roman" pitchFamily="34" charset="-122"/>
                 <a:cs typeface="Times New Roman" pitchFamily="34" charset="-120"/>
               </a:rPr>
-              <a:t>3. Indicators of Differences in Development (continued)</a:t>
+              <a:t>3. Indicators of Differences in Development</a:t>
             </a:r>
             <a:endParaRPr lang="en-US" sz="3600" dirty="0"/>
           </a:p>
@@ -17300,8 +17315,8 @@
         </p:nvSpPr>
         <p:spPr>
           <a:xfrm>
-            <a:off x="4069080" y="1783080"/>
-            <a:ext cx="7802575" cy="4663440"/>
+            <a:off x="1691640" y="1783080"/>
+            <a:ext cx="10180015" cy="4663440"/>
           </a:xfrm>
           <a:prstGeom prst="rect">
             <a:avLst/>
@@ -17328,7 +17343,7 @@
                 <a:ea typeface="Times New Roman" pitchFamily="34" charset="-122"/>
                 <a:cs typeface="Times New Roman" pitchFamily="34" charset="-120"/>
               </a:rPr>
-              <a:t>Health: </a:t>
+              <a:t>Employment: </a:t>
             </a:r>
             <a:pPr algn="l" indent="0" marL="0">
               <a:spcAft>
@@ -17345,7 +17360,7 @@
                 <a:ea typeface="Times New Roman" pitchFamily="34" charset="-122"/>
                 <a:cs typeface="Times New Roman" pitchFamily="34" charset="-120"/>
               </a:rPr>
-              <a:t>Many hospitals and doctors on the coast; fewer health centres in the Adamawa.</a:t>
+              <a:t>Many formal jobs in industry, the port and services on the coast; mostly farming and herding in the Adamawa.</a:t>
             </a:r>
             <a:endParaRPr lang="en-US" sz="4000" dirty="0"/>
           </a:p>
@@ -17365,7 +17380,7 @@
                 <a:ea typeface="Times New Roman" pitchFamily="34" charset="-122"/>
                 <a:cs typeface="Times New Roman" pitchFamily="34" charset="-120"/>
               </a:rPr>
-              <a:t>Other infrastructure: </a:t>
+              <a:t>Education: </a:t>
             </a:r>
             <a:pPr algn="l" indent="0" marL="0">
               <a:spcAft>
@@ -17382,7 +17397,7 @@
                 <a:ea typeface="Times New Roman" pitchFamily="34" charset="-122"/>
                 <a:cs typeface="Times New Roman" pitchFamily="34" charset="-120"/>
               </a:rPr>
-              <a:t>Paved roads, electricity, water and internet are much better on the coast.</a:t>
+              <a:t>Many schools and universities (Douala, Buea) on the coast; fewer schools and lower school enrolment in the Adamawa.</a:t>
             </a:r>
             <a:endParaRPr lang="en-US" sz="4000" dirty="0"/>
           </a:p>
@@ -17500,129 +17515,9 @@
           </a:p>
         </p:txBody>
       </p:sp>
-      <p:sp>
-        <p:nvSpPr>
-          <p:cNvPr id="3" name="Text 1"/>
-          <p:cNvSpPr/>
-          <p:nvPr/>
-        </p:nvSpPr>
-        <p:spPr>
-          <a:xfrm>
-            <a:off x="365760" y="1005840"/>
-            <a:ext cx="11460175" cy="731520"/>
-          </a:xfrm>
-          <a:prstGeom prst="rect">
-            <a:avLst/>
-          </a:prstGeom>
-          <a:noFill/>
-          <a:ln/>
-        </p:spPr>
-        <p:txBody>
-          <a:bodyPr wrap="square" lIns="0" tIns="0" rIns="0" bIns="0" rtlCol="0" anchor="ctr">
-            <a:normAutofit/>
-          </a:bodyPr>
-          <a:lstStyle/>
-          <a:p>
-            <a:pPr algn="ctr" indent="0" marL="0">
-              <a:buNone/>
-            </a:pPr>
-            <a:r>
-              <a:rPr lang="en-US" sz="3600" b="1" dirty="0">
-                <a:solidFill>
-                  <a:srgbClr val="990011"/>
-                </a:solidFill>
-                <a:latin typeface="Times New Roman" pitchFamily="34" charset="0"/>
-                <a:ea typeface="Times New Roman" pitchFamily="34" charset="-122"/>
-                <a:cs typeface="Times New Roman" pitchFamily="34" charset="-120"/>
-              </a:rPr>
-              <a:t>4. Factors of the Inequality</a:t>
-            </a:r>
-            <a:endParaRPr lang="en-US" sz="3600" dirty="0"/>
-          </a:p>
-        </p:txBody>
-      </p:sp>
-      <p:sp>
-        <p:nvSpPr>
-          <p:cNvPr id="4" name="Text 2"/>
-          <p:cNvSpPr/>
-          <p:nvPr/>
-        </p:nvSpPr>
-        <p:spPr>
-          <a:xfrm>
-            <a:off x="365760" y="1783080"/>
-            <a:ext cx="4846320" cy="4617720"/>
-          </a:xfrm>
-          <a:prstGeom prst="rect">
-            <a:avLst/>
-          </a:prstGeom>
-          <a:noFill/>
-          <a:ln/>
-        </p:spPr>
-        <p:txBody>
-          <a:bodyPr wrap="square" lIns="0" tIns="0" rIns="0" bIns="0" rtlCol="0" anchor="t"/>
-          <a:lstStyle/>
-          <a:p>
-            <a:pPr algn="l" indent="0" marL="0">
-              <a:spcAft>
-                <a:spcPts val="800"/>
-              </a:spcAft>
-              <a:buNone/>
-            </a:pPr>
-            <a:r>
-              <a:rPr lang="en-US" sz="3200" i="1" dirty="0">
-                <a:solidFill>
-                  <a:srgbClr val="111111"/>
-                </a:solidFill>
-                <a:latin typeface="Times New Roman" pitchFamily="34" charset="0"/>
-                <a:ea typeface="Times New Roman" pitchFamily="34" charset="-122"/>
-                <a:cs typeface="Times New Roman" pitchFamily="34" charset="-120"/>
-              </a:rPr>
-              <a:t>The inequality is explained by the following factors:</a:t>
-            </a:r>
-            <a:endParaRPr lang="en-US" sz="3200" dirty="0"/>
-          </a:p>
-          <a:p>
-            <a:pPr algn="l" indent="0" marL="0">
-              <a:spcAft>
-                <a:spcPts val="800"/>
-              </a:spcAft>
-              <a:buNone/>
-            </a:pPr>
-            <a:r>
-              <a:rPr lang="en-US" sz="3200" b="1" dirty="0">
-                <a:solidFill>
-                  <a:srgbClr val="111111"/>
-                </a:solidFill>
-                <a:latin typeface="Times New Roman" pitchFamily="34" charset="0"/>
-                <a:ea typeface="Times New Roman" pitchFamily="34" charset="-122"/>
-                <a:cs typeface="Times New Roman" pitchFamily="34" charset="-120"/>
-              </a:rPr>
-              <a:t>Natural resources and position: </a:t>
-            </a:r>
-            <a:pPr algn="l" indent="0" marL="0">
-              <a:spcAft>
-                <a:spcPts val="800"/>
-              </a:spcAft>
-              <a:buNone/>
-            </a:pPr>
-            <a:r>
-              <a:rPr lang="en-US" sz="3200" dirty="0">
-                <a:solidFill>
-                  <a:srgbClr val="111111"/>
-                </a:solidFill>
-                <a:latin typeface="Times New Roman" pitchFamily="34" charset="0"/>
-                <a:ea typeface="Times New Roman" pitchFamily="34" charset="-122"/>
-                <a:cs typeface="Times New Roman" pitchFamily="34" charset="-120"/>
-              </a:rPr>
-              <a:t>The coast has the sea, oil, gas and fertile soils; the Adamawa is landlocked and far from the ports.</a:t>
-            </a:r>
-            <a:endParaRPr lang="en-US" sz="3200" dirty="0"/>
-          </a:p>
-        </p:txBody>
-      </p:sp>
       <p:pic>
         <p:nvPicPr>
-          <p:cNvPr id="5" name="Image 0" descr="/home/claude/f4/img/v2/lsa_douala.jpg">    </p:cNvPr>
+          <p:cNvPr id="3" name="Image 0" descr="/home/claude/f4/img/minesec_sheet.png">    </p:cNvPr>
           <p:cNvPicPr>
             <a:picLocks noChangeAspect="1"/>
           </p:cNvPicPr>
@@ -17636,8 +17531,8 @@
         </p:blipFill>
         <p:spPr>
           <a:xfrm>
-            <a:off x="5349240" y="2071212"/>
-            <a:ext cx="6659575" cy="3693983"/>
+            <a:off x="0" y="658368"/>
+            <a:ext cx="3840480" cy="5833872"/>
           </a:xfrm>
           <a:prstGeom prst="rect">
             <a:avLst/>
@@ -17646,14 +17541,14 @@
       </p:pic>
       <p:sp>
         <p:nvSpPr>
-          <p:cNvPr id="6" name="Text 3"/>
+          <p:cNvPr id="4" name="Text 1"/>
           <p:cNvSpPr/>
           <p:nvPr/>
         </p:nvSpPr>
         <p:spPr>
           <a:xfrm>
-            <a:off x="5349240" y="6089904"/>
-            <a:ext cx="6659575" cy="347472"/>
+            <a:off x="4069080" y="1005840"/>
+            <a:ext cx="7802575" cy="731520"/>
           </a:xfrm>
           <a:prstGeom prst="rect">
             <a:avLst/>
@@ -17662,24 +17557,122 @@
           <a:ln/>
         </p:spPr>
         <p:txBody>
-          <a:bodyPr wrap="square" lIns="0" tIns="0" rIns="0" bIns="0" rtlCol="0" anchor="ctr"/>
+          <a:bodyPr wrap="square" lIns="0" tIns="0" rIns="0" bIns="0" rtlCol="0" anchor="ctr">
+            <a:normAutofit/>
+          </a:bodyPr>
           <a:lstStyle/>
           <a:p>
             <a:pPr algn="ctr" indent="0" marL="0">
               <a:buNone/>
             </a:pPr>
             <a:r>
-              <a:rPr lang="en-US" sz="1600" i="1" dirty="0">
-                <a:solidFill>
-                  <a:srgbClr val="555555"/>
+              <a:rPr lang="en-US" sz="3600" b="1" dirty="0">
+                <a:solidFill>
+                  <a:srgbClr val="990011"/>
                 </a:solidFill>
                 <a:latin typeface="Times New Roman" pitchFamily="34" charset="0"/>
                 <a:ea typeface="Times New Roman" pitchFamily="34" charset="-122"/>
                 <a:cs typeface="Times New Roman" pitchFamily="34" charset="-120"/>
               </a:rPr>
-              <a:t>Illustration: Douala</a:t>
-            </a:r>
-            <a:endParaRPr lang="en-US" sz="1600" dirty="0"/>
+              <a:t>3. Indicators of Differences in Development (continued)</a:t>
+            </a:r>
+            <a:endParaRPr lang="en-US" sz="3600" dirty="0"/>
+          </a:p>
+        </p:txBody>
+      </p:sp>
+      <p:sp>
+        <p:nvSpPr>
+          <p:cNvPr id="5" name="Text 2"/>
+          <p:cNvSpPr/>
+          <p:nvPr/>
+        </p:nvSpPr>
+        <p:spPr>
+          <a:xfrm>
+            <a:off x="4069080" y="1783080"/>
+            <a:ext cx="7802575" cy="4663440"/>
+          </a:xfrm>
+          <a:prstGeom prst="rect">
+            <a:avLst/>
+          </a:prstGeom>
+          <a:noFill/>
+          <a:ln/>
+        </p:spPr>
+        <p:txBody>
+          <a:bodyPr wrap="square" lIns="0" tIns="0" rIns="0" bIns="0" rtlCol="0" anchor="t"/>
+          <a:lstStyle/>
+          <a:p>
+            <a:pPr algn="l" indent="0" marL="0">
+              <a:spcAft>
+                <a:spcPts val="800"/>
+              </a:spcAft>
+              <a:buNone/>
+            </a:pPr>
+            <a:r>
+              <a:rPr lang="en-US" sz="4000" b="1" dirty="0">
+                <a:solidFill>
+                  <a:srgbClr val="111111"/>
+                </a:solidFill>
+                <a:latin typeface="Times New Roman" pitchFamily="34" charset="0"/>
+                <a:ea typeface="Times New Roman" pitchFamily="34" charset="-122"/>
+                <a:cs typeface="Times New Roman" pitchFamily="34" charset="-120"/>
+              </a:rPr>
+              <a:t>Health: </a:t>
+            </a:r>
+            <a:pPr algn="l" indent="0" marL="0">
+              <a:spcAft>
+                <a:spcPts val="800"/>
+              </a:spcAft>
+              <a:buNone/>
+            </a:pPr>
+            <a:r>
+              <a:rPr lang="en-US" sz="4000" dirty="0">
+                <a:solidFill>
+                  <a:srgbClr val="111111"/>
+                </a:solidFill>
+                <a:latin typeface="Times New Roman" pitchFamily="34" charset="0"/>
+                <a:ea typeface="Times New Roman" pitchFamily="34" charset="-122"/>
+                <a:cs typeface="Times New Roman" pitchFamily="34" charset="-120"/>
+              </a:rPr>
+              <a:t>Many hospitals and doctors on the coast; fewer health centres in the Adamawa.</a:t>
+            </a:r>
+            <a:endParaRPr lang="en-US" sz="4000" dirty="0"/>
+          </a:p>
+          <a:p>
+            <a:pPr algn="l" indent="0" marL="0">
+              <a:spcAft>
+                <a:spcPts val="800"/>
+              </a:spcAft>
+              <a:buNone/>
+            </a:pPr>
+            <a:r>
+              <a:rPr lang="en-US" sz="4000" b="1" dirty="0">
+                <a:solidFill>
+                  <a:srgbClr val="111111"/>
+                </a:solidFill>
+                <a:latin typeface="Times New Roman" pitchFamily="34" charset="0"/>
+                <a:ea typeface="Times New Roman" pitchFamily="34" charset="-122"/>
+                <a:cs typeface="Times New Roman" pitchFamily="34" charset="-120"/>
+              </a:rPr>
+              <a:t>Other infrastructure: </a:t>
+            </a:r>
+            <a:pPr algn="l" indent="0" marL="0">
+              <a:spcAft>
+                <a:spcPts val="800"/>
+              </a:spcAft>
+              <a:buNone/>
+            </a:pPr>
+            <a:r>
+              <a:rPr lang="en-US" sz="4000" dirty="0">
+                <a:solidFill>
+                  <a:srgbClr val="111111"/>
+                </a:solidFill>
+                <a:latin typeface="Times New Roman" pitchFamily="34" charset="0"/>
+                <a:ea typeface="Times New Roman" pitchFamily="34" charset="-122"/>
+                <a:cs typeface="Times New Roman" pitchFamily="34" charset="-120"/>
+              </a:rPr>
+              <a:t>Paved roads, electricity, water and internet are much better on the coast.</a:t>
+            </a:r>
+            <a:endParaRPr lang="en-US" sz="4000" dirty="0"/>
           </a:p>
         </p:txBody>
       </p:sp>
@@ -17795,9 +17788,129 @@
           </a:p>
         </p:txBody>
       </p:sp>
+      <p:sp>
+        <p:nvSpPr>
+          <p:cNvPr id="3" name="Text 1"/>
+          <p:cNvSpPr/>
+          <p:nvPr/>
+        </p:nvSpPr>
+        <p:spPr>
+          <a:xfrm>
+            <a:off x="365760" y="1005840"/>
+            <a:ext cx="11460175" cy="731520"/>
+          </a:xfrm>
+          <a:prstGeom prst="rect">
+            <a:avLst/>
+          </a:prstGeom>
+          <a:noFill/>
+          <a:ln/>
+        </p:spPr>
+        <p:txBody>
+          <a:bodyPr wrap="square" lIns="0" tIns="0" rIns="0" bIns="0" rtlCol="0" anchor="ctr">
+            <a:normAutofit/>
+          </a:bodyPr>
+          <a:lstStyle/>
+          <a:p>
+            <a:pPr algn="ctr" indent="0" marL="0">
+              <a:buNone/>
+            </a:pPr>
+            <a:r>
+              <a:rPr lang="en-US" sz="3600" b="1" dirty="0">
+                <a:solidFill>
+                  <a:srgbClr val="990011"/>
+                </a:solidFill>
+                <a:latin typeface="Times New Roman" pitchFamily="34" charset="0"/>
+                <a:ea typeface="Times New Roman" pitchFamily="34" charset="-122"/>
+                <a:cs typeface="Times New Roman" pitchFamily="34" charset="-120"/>
+              </a:rPr>
+              <a:t>4. Factors of the Inequality</a:t>
+            </a:r>
+            <a:endParaRPr lang="en-US" sz="3600" dirty="0"/>
+          </a:p>
+        </p:txBody>
+      </p:sp>
+      <p:sp>
+        <p:nvSpPr>
+          <p:cNvPr id="4" name="Text 2"/>
+          <p:cNvSpPr/>
+          <p:nvPr/>
+        </p:nvSpPr>
+        <p:spPr>
+          <a:xfrm>
+            <a:off x="365760" y="1783080"/>
+            <a:ext cx="4846320" cy="4617720"/>
+          </a:xfrm>
+          <a:prstGeom prst="rect">
+            <a:avLst/>
+          </a:prstGeom>
+          <a:noFill/>
+          <a:ln/>
+        </p:spPr>
+        <p:txBody>
+          <a:bodyPr wrap="square" lIns="0" tIns="0" rIns="0" bIns="0" rtlCol="0" anchor="t"/>
+          <a:lstStyle/>
+          <a:p>
+            <a:pPr algn="l" indent="0" marL="0">
+              <a:spcAft>
+                <a:spcPts val="800"/>
+              </a:spcAft>
+              <a:buNone/>
+            </a:pPr>
+            <a:r>
+              <a:rPr lang="en-US" sz="3200" i="1" dirty="0">
+                <a:solidFill>
+                  <a:srgbClr val="111111"/>
+                </a:solidFill>
+                <a:latin typeface="Times New Roman" pitchFamily="34" charset="0"/>
+                <a:ea typeface="Times New Roman" pitchFamily="34" charset="-122"/>
+                <a:cs typeface="Times New Roman" pitchFamily="34" charset="-120"/>
+              </a:rPr>
+              <a:t>The inequality is explained by the following factors:</a:t>
+            </a:r>
+            <a:endParaRPr lang="en-US" sz="3200" dirty="0"/>
+          </a:p>
+          <a:p>
+            <a:pPr algn="l" indent="0" marL="0">
+              <a:spcAft>
+                <a:spcPts val="800"/>
+              </a:spcAft>
+              <a:buNone/>
+            </a:pPr>
+            <a:r>
+              <a:rPr lang="en-US" sz="3200" b="1" dirty="0">
+                <a:solidFill>
+                  <a:srgbClr val="111111"/>
+                </a:solidFill>
+                <a:latin typeface="Times New Roman" pitchFamily="34" charset="0"/>
+                <a:ea typeface="Times New Roman" pitchFamily="34" charset="-122"/>
+                <a:cs typeface="Times New Roman" pitchFamily="34" charset="-120"/>
+              </a:rPr>
+              <a:t>Natural resources and position: </a:t>
+            </a:r>
+            <a:pPr algn="l" indent="0" marL="0">
+              <a:spcAft>
+                <a:spcPts val="800"/>
+              </a:spcAft>
+              <a:buNone/>
+            </a:pPr>
+            <a:r>
+              <a:rPr lang="en-US" sz="3200" dirty="0">
+                <a:solidFill>
+                  <a:srgbClr val="111111"/>
+                </a:solidFill>
+                <a:latin typeface="Times New Roman" pitchFamily="34" charset="0"/>
+                <a:ea typeface="Times New Roman" pitchFamily="34" charset="-122"/>
+                <a:cs typeface="Times New Roman" pitchFamily="34" charset="-120"/>
+              </a:rPr>
+              <a:t>The coast has the sea, oil, gas and fertile soils; the Adamawa is landlocked and far from the ports.</a:t>
+            </a:r>
+            <a:endParaRPr lang="en-US" sz="3200" dirty="0"/>
+          </a:p>
+        </p:txBody>
+      </p:sp>
       <p:pic>
         <p:nvPicPr>
-          <p:cNvPr id="3" name="Image 0" descr="/home/claude/f4/img/minesec_sheet.png">    </p:cNvPr>
+          <p:cNvPr id="5" name="Image 0" descr="/home/claude/f4/img/v2/lsa_douala.jpg">    </p:cNvPr>
           <p:cNvPicPr>
             <a:picLocks noChangeAspect="1"/>
           </p:cNvPicPr>
@@ -17811,8 +17924,8 @@
         </p:blipFill>
         <p:spPr>
           <a:xfrm>
-            <a:off x="0" y="658368"/>
-            <a:ext cx="3840480" cy="5833872"/>
+            <a:off x="5349240" y="2071212"/>
+            <a:ext cx="6659575" cy="3693983"/>
           </a:xfrm>
           <a:prstGeom prst="rect">
             <a:avLst/>
@@ -17821,14 +17934,14 @@
       </p:pic>
       <p:sp>
         <p:nvSpPr>
-          <p:cNvPr id="4" name="Text 1"/>
+          <p:cNvPr id="6" name="Text 3"/>
           <p:cNvSpPr/>
           <p:nvPr/>
         </p:nvSpPr>
         <p:spPr>
           <a:xfrm>
-            <a:off x="4069080" y="1005840"/>
-            <a:ext cx="7802575" cy="731520"/>
+            <a:off x="5349240" y="6089904"/>
+            <a:ext cx="6659575" cy="347472"/>
           </a:xfrm>
           <a:prstGeom prst="rect">
             <a:avLst/>
@@ -17837,122 +17950,24 @@
           <a:ln/>
         </p:spPr>
         <p:txBody>
-          <a:bodyPr wrap="square" lIns="0" tIns="0" rIns="0" bIns="0" rtlCol="0" anchor="ctr">
-            <a:normAutofit/>
-          </a:bodyPr>
+          <a:bodyPr wrap="square" lIns="0" tIns="0" rIns="0" bIns="0" rtlCol="0" anchor="ctr"/>
           <a:lstStyle/>
           <a:p>
             <a:pPr algn="ctr" indent="0" marL="0">
               <a:buNone/>
             </a:pPr>
             <a:r>
-              <a:rPr lang="en-US" sz="3600" b="1" dirty="0">
-                <a:solidFill>
-                  <a:srgbClr val="990011"/>
+              <a:rPr lang="en-US" sz="1600" i="1" dirty="0">
+                <a:solidFill>
+                  <a:srgbClr val="555555"/>
                 </a:solidFill>
                 <a:latin typeface="Times New Roman" pitchFamily="34" charset="0"/>
                 <a:ea typeface="Times New Roman" pitchFamily="34" charset="-122"/>
                 <a:cs typeface="Times New Roman" pitchFamily="34" charset="-120"/>
               </a:rPr>
-              <a:t>4. Factors of the Inequality</a:t>
-            </a:r>
-            <a:endParaRPr lang="en-US" sz="3600" dirty="0"/>
-          </a:p>
-        </p:txBody>
-      </p:sp>
-      <p:sp>
-        <p:nvSpPr>
-          <p:cNvPr id="5" name="Text 2"/>
-          <p:cNvSpPr/>
-          <p:nvPr/>
-        </p:nvSpPr>
-        <p:spPr>
-          <a:xfrm>
-            <a:off x="4069080" y="1783080"/>
-            <a:ext cx="7802575" cy="4663440"/>
-          </a:xfrm>
-          <a:prstGeom prst="rect">
-            <a:avLst/>
-          </a:prstGeom>
-          <a:noFill/>
-          <a:ln/>
-        </p:spPr>
-        <p:txBody>
-          <a:bodyPr wrap="square" lIns="0" tIns="0" rIns="0" bIns="0" rtlCol="0" anchor="t"/>
-          <a:lstStyle/>
-          <a:p>
-            <a:pPr algn="l" indent="0" marL="0">
-              <a:spcAft>
-                <a:spcPts val="800"/>
-              </a:spcAft>
-              <a:buNone/>
-            </a:pPr>
-            <a:r>
-              <a:rPr lang="en-US" sz="4000" b="1" dirty="0">
-                <a:solidFill>
-                  <a:srgbClr val="111111"/>
-                </a:solidFill>
-                <a:latin typeface="Times New Roman" pitchFamily="34" charset="0"/>
-                <a:ea typeface="Times New Roman" pitchFamily="34" charset="-122"/>
-                <a:cs typeface="Times New Roman" pitchFamily="34" charset="-120"/>
-              </a:rPr>
-              <a:t>Human resources: </a:t>
-            </a:r>
-            <a:pPr algn="l" indent="0" marL="0">
-              <a:spcAft>
-                <a:spcPts val="800"/>
-              </a:spcAft>
-              <a:buNone/>
-            </a:pPr>
-            <a:r>
-              <a:rPr lang="en-US" sz="4000" dirty="0">
-                <a:solidFill>
-                  <a:srgbClr val="111111"/>
-                </a:solidFill>
-                <a:latin typeface="Times New Roman" pitchFamily="34" charset="0"/>
-                <a:ea typeface="Times New Roman" pitchFamily="34" charset="-122"/>
-                <a:cs typeface="Times New Roman" pitchFamily="34" charset="-120"/>
-              </a:rPr>
-              <a:t>The coast attracts skilled people and has more educated workers; the Adamawa loses young people (backwash).</a:t>
-            </a:r>
-            <a:endParaRPr lang="en-US" sz="4000" dirty="0"/>
-          </a:p>
-          <a:p>
-            <a:pPr algn="l" indent="0" marL="0">
-              <a:spcAft>
-                <a:spcPts val="800"/>
-              </a:spcAft>
-              <a:buNone/>
-            </a:pPr>
-            <a:r>
-              <a:rPr lang="en-US" sz="4000" b="1" dirty="0">
-                <a:solidFill>
-                  <a:srgbClr val="111111"/>
-                </a:solidFill>
-                <a:latin typeface="Times New Roman" pitchFamily="34" charset="0"/>
-                <a:ea typeface="Times New Roman" pitchFamily="34" charset="-122"/>
-                <a:cs typeface="Times New Roman" pitchFamily="34" charset="-120"/>
-              </a:rPr>
-              <a:t>Historical factors: </a:t>
-            </a:r>
-            <a:pPr algn="l" indent="0" marL="0">
-              <a:spcAft>
-                <a:spcPts val="800"/>
-              </a:spcAft>
-              <a:buNone/>
-            </a:pPr>
-            <a:r>
-              <a:rPr lang="en-US" sz="4000" dirty="0">
-                <a:solidFill>
-                  <a:srgbClr val="111111"/>
-                </a:solidFill>
-                <a:latin typeface="Times New Roman" pitchFamily="34" charset="0"/>
-                <a:ea typeface="Times New Roman" pitchFamily="34" charset="-122"/>
-                <a:cs typeface="Times New Roman" pitchFamily="34" charset="-120"/>
-              </a:rPr>
-              <a:t>Colonial rulers invested first on the coast (port, railway, plantations).</a:t>
-            </a:r>
-            <a:endParaRPr lang="en-US" sz="4000" dirty="0"/>
+              <a:t>Illustration: Douala</a:t>
+            </a:r>
+            <a:endParaRPr lang="en-US" sz="1600" dirty="0"/>
           </a:p>
         </p:txBody>
       </p:sp>
@@ -18085,7 +18100,7 @@
         <p:spPr>
           <a:xfrm>
             <a:off x="0" y="658368"/>
-            <a:ext cx="5120640" cy="5833872"/>
+            <a:ext cx="3840480" cy="5833872"/>
           </a:xfrm>
           <a:prstGeom prst="rect">
             <a:avLst/>
@@ -18100,8 +18115,8 @@
         </p:nvSpPr>
         <p:spPr>
           <a:xfrm>
-            <a:off x="5349240" y="1005840"/>
-            <a:ext cx="6522415" cy="731520"/>
+            <a:off x="4069080" y="1005840"/>
+            <a:ext cx="7802575" cy="731520"/>
           </a:xfrm>
           <a:prstGeom prst="rect">
             <a:avLst/>
@@ -18127,7 +18142,7 @@
                 <a:ea typeface="Times New Roman" pitchFamily="34" charset="-122"/>
                 <a:cs typeface="Times New Roman" pitchFamily="34" charset="-120"/>
               </a:rPr>
-              <a:t>4. Factors of the Inequality (continued)</a:t>
+              <a:t>4. Factors of the Inequality</a:t>
             </a:r>
             <a:endParaRPr lang="en-US" sz="3600" dirty="0"/>
           </a:p>
@@ -18141,8 +18156,8 @@
         </p:nvSpPr>
         <p:spPr>
           <a:xfrm>
-            <a:off x="5349240" y="1783080"/>
-            <a:ext cx="6522415" cy="4663440"/>
+            <a:off x="4069080" y="1783080"/>
+            <a:ext cx="7802575" cy="4663440"/>
           </a:xfrm>
           <a:prstGeom prst="rect">
             <a:avLst/>
@@ -18169,7 +18184,7 @@
                 <a:ea typeface="Times New Roman" pitchFamily="34" charset="-122"/>
                 <a:cs typeface="Times New Roman" pitchFamily="34" charset="-120"/>
               </a:rPr>
-              <a:t>Government policy and investment: </a:t>
+              <a:t>Human resources: </a:t>
             </a:r>
             <a:pPr algn="l" indent="0" marL="0">
               <a:spcAft>
@@ -18186,7 +18201,44 @@
                 <a:ea typeface="Times New Roman" pitchFamily="34" charset="-122"/>
                 <a:cs typeface="Times New Roman" pitchFamily="34" charset="-120"/>
               </a:rPr>
-              <a:t>Investment has long been concentrated in Douala and Yaoundé, attracting private investment.</a:t>
+              <a:t>The coast attracts skilled people and has more educated workers; the Adamawa loses young people (backwash).</a:t>
+            </a:r>
+            <a:endParaRPr lang="en-US" sz="4000" dirty="0"/>
+          </a:p>
+          <a:p>
+            <a:pPr algn="l" indent="0" marL="0">
+              <a:spcAft>
+                <a:spcPts val="800"/>
+              </a:spcAft>
+              <a:buNone/>
+            </a:pPr>
+            <a:r>
+              <a:rPr lang="en-US" sz="4000" b="1" dirty="0">
+                <a:solidFill>
+                  <a:srgbClr val="111111"/>
+                </a:solidFill>
+                <a:latin typeface="Times New Roman" pitchFamily="34" charset="0"/>
+                <a:ea typeface="Times New Roman" pitchFamily="34" charset="-122"/>
+                <a:cs typeface="Times New Roman" pitchFamily="34" charset="-120"/>
+              </a:rPr>
+              <a:t>Historical factors: </a:t>
+            </a:r>
+            <a:pPr algn="l" indent="0" marL="0">
+              <a:spcAft>
+                <a:spcPts val="800"/>
+              </a:spcAft>
+              <a:buNone/>
+            </a:pPr>
+            <a:r>
+              <a:rPr lang="en-US" sz="4000" dirty="0">
+                <a:solidFill>
+                  <a:srgbClr val="111111"/>
+                </a:solidFill>
+                <a:latin typeface="Times New Roman" pitchFamily="34" charset="0"/>
+                <a:ea typeface="Times New Roman" pitchFamily="34" charset="-122"/>
+                <a:cs typeface="Times New Roman" pitchFamily="34" charset="-120"/>
+              </a:rPr>
+              <a:t>Colonial rulers invested first on the coast (port, railway, plantations).</a:t>
             </a:r>
             <a:endParaRPr lang="en-US" sz="4000" dirty="0"/>
           </a:p>
@@ -18321,7 +18373,7 @@
         <p:spPr>
           <a:xfrm>
             <a:off x="0" y="658368"/>
-            <a:ext cx="3840480" cy="5833872"/>
+            <a:ext cx="5120640" cy="5833872"/>
           </a:xfrm>
           <a:prstGeom prst="rect">
             <a:avLst/>
@@ -18336,8 +18388,8 @@
         </p:nvSpPr>
         <p:spPr>
           <a:xfrm>
-            <a:off x="4069080" y="1005840"/>
-            <a:ext cx="7802575" cy="731520"/>
+            <a:off x="5349240" y="1005840"/>
+            <a:ext cx="6522415" cy="731520"/>
           </a:xfrm>
           <a:prstGeom prst="rect">
             <a:avLst/>
@@ -18363,7 +18415,7 @@
                 <a:ea typeface="Times New Roman" pitchFamily="34" charset="-122"/>
                 <a:cs typeface="Times New Roman" pitchFamily="34" charset="-120"/>
               </a:rPr>
-              <a:t>5. Measures Attempted to Reduce Inequality</a:t>
+              <a:t>4. Factors of the Inequality (continued)</a:t>
             </a:r>
             <a:endParaRPr lang="en-US" sz="3600" dirty="0"/>
           </a:p>
@@ -18377,8 +18429,8 @@
         </p:nvSpPr>
         <p:spPr>
           <a:xfrm>
-            <a:off x="4069080" y="1783080"/>
-            <a:ext cx="7802575" cy="4663440"/>
+            <a:off x="5349240" y="1783080"/>
+            <a:ext cx="6522415" cy="4663440"/>
           </a:xfrm>
           <a:prstGeom prst="rect">
             <a:avLst/>
@@ -18397,7 +18449,7 @@
               <a:buNone/>
             </a:pPr>
             <a:r>
-              <a:rPr lang="en-US" sz="4000" i="1" dirty="0">
+              <a:rPr lang="en-US" sz="4000" b="1" dirty="0">
                 <a:solidFill>
                   <a:srgbClr val="111111"/>
                 </a:solidFill>
@@ -18405,11 +18457,8 @@
                 <a:ea typeface="Times New Roman" pitchFamily="34" charset="-122"/>
                 <a:cs typeface="Times New Roman" pitchFamily="34" charset="-120"/>
               </a:rPr>
-              <a:t>The measures attempted and their difficulties are the following:</a:t>
-            </a:r>
-            <a:endParaRPr lang="en-US" sz="4000" dirty="0"/>
-          </a:p>
-          <a:p>
+              <a:t>Government policy and investment: </a:t>
+            </a:r>
             <a:pPr algn="l" indent="0" marL="0">
               <a:spcAft>
                 <a:spcPts val="800"/>
@@ -18417,7 +18466,7 @@
               <a:buNone/>
             </a:pPr>
             <a:r>
-              <a:rPr lang="en-US" sz="4000" b="1" dirty="0">
+              <a:rPr lang="en-US" sz="4000" dirty="0">
                 <a:solidFill>
                   <a:srgbClr val="111111"/>
                 </a:solidFill>
@@ -18425,24 +18474,7 @@
                 <a:ea typeface="Times New Roman" pitchFamily="34" charset="-122"/>
                 <a:cs typeface="Times New Roman" pitchFamily="34" charset="-120"/>
               </a:rPr>
-              <a:t>Political and administrative measures: </a:t>
-            </a:r>
-            <a:pPr algn="l" indent="0" marL="0">
-              <a:spcAft>
-                <a:spcPts val="800"/>
-              </a:spcAft>
-              <a:buNone/>
-            </a:pPr>
-            <a:r>
-              <a:rPr lang="en-US" sz="4000" dirty="0">
-                <a:solidFill>
-                  <a:srgbClr val="111111"/>
-                </a:solidFill>
-                <a:latin typeface="Times New Roman" pitchFamily="34" charset="0"/>
-                <a:ea typeface="Times New Roman" pitchFamily="34" charset="-122"/>
-                <a:cs typeface="Times New Roman" pitchFamily="34" charset="-120"/>
-              </a:rPr>
-              <a:t>Decentralisation gives powers and resources to regional and local councils (regional councils elected in 2020).</a:t>
+              <a:t>Investment has long been concentrated in Douala and Yaoundé, attracting private investment.</a:t>
             </a:r>
             <a:endParaRPr lang="en-US" sz="4000" dirty="0"/>
           </a:p>
@@ -18577,7 +18609,7 @@
         <p:spPr>
           <a:xfrm>
             <a:off x="0" y="658368"/>
-            <a:ext cx="5120640" cy="5833872"/>
+            <a:ext cx="3840480" cy="5833872"/>
           </a:xfrm>
           <a:prstGeom prst="rect">
             <a:avLst/>
@@ -18592,8 +18624,8 @@
         </p:nvSpPr>
         <p:spPr>
           <a:xfrm>
-            <a:off x="5349240" y="1005840"/>
-            <a:ext cx="6522415" cy="731520"/>
+            <a:off x="4069080" y="1005840"/>
+            <a:ext cx="7802575" cy="731520"/>
           </a:xfrm>
           <a:prstGeom prst="rect">
             <a:avLst/>
@@ -18619,7 +18651,7 @@
                 <a:ea typeface="Times New Roman" pitchFamily="34" charset="-122"/>
                 <a:cs typeface="Times New Roman" pitchFamily="34" charset="-120"/>
               </a:rPr>
-              <a:t>5. Measures Attempted to Reduce Inequality (continued)</a:t>
+              <a:t>5. Measures Attempted to Reduce Inequality</a:t>
             </a:r>
             <a:endParaRPr lang="en-US" sz="3600" dirty="0"/>
           </a:p>
@@ -18633,8 +18665,8 @@
         </p:nvSpPr>
         <p:spPr>
           <a:xfrm>
-            <a:off x="5349240" y="1783080"/>
-            <a:ext cx="6522415" cy="4663440"/>
+            <a:off x="4069080" y="1783080"/>
+            <a:ext cx="7802575" cy="4663440"/>
           </a:xfrm>
           <a:prstGeom prst="rect">
             <a:avLst/>
@@ -18653,7 +18685,7 @@
               <a:buNone/>
             </a:pPr>
             <a:r>
-              <a:rPr lang="en-US" sz="4000" b="1" dirty="0">
+              <a:rPr lang="en-US" sz="4000" i="1" dirty="0">
                 <a:solidFill>
                   <a:srgbClr val="111111"/>
                 </a:solidFill>
@@ -18661,8 +18693,11 @@
                 <a:ea typeface="Times New Roman" pitchFamily="34" charset="-122"/>
                 <a:cs typeface="Times New Roman" pitchFamily="34" charset="-120"/>
               </a:rPr>
-              <a:t>Infrastructure: </a:t>
-            </a:r>
+              <a:t>The measures attempted and their difficulties are the following:</a:t>
+            </a:r>
+            <a:endParaRPr lang="en-US" sz="4000" dirty="0"/>
+          </a:p>
+          <a:p>
             <a:pPr algn="l" indent="0" marL="0">
               <a:spcAft>
                 <a:spcPts val="800"/>
@@ -18670,7 +18705,7 @@
               <a:buNone/>
             </a:pPr>
             <a:r>
-              <a:rPr lang="en-US" sz="4000" dirty="0">
+              <a:rPr lang="en-US" sz="4000" b="1" dirty="0">
                 <a:solidFill>
                   <a:srgbClr val="111111"/>
                 </a:solidFill>
@@ -18678,7 +18713,24 @@
                 <a:ea typeface="Times New Roman" pitchFamily="34" charset="-122"/>
                 <a:cs typeface="Times New Roman" pitchFamily="34" charset="-120"/>
               </a:rPr>
-              <a:t>Roads (Ngaoundéré–Garoua), the railway to Ngaoundéré, dams and electrification in lagging regions.</a:t>
+              <a:t>Political and administrative measures: </a:t>
+            </a:r>
+            <a:pPr algn="l" indent="0" marL="0">
+              <a:spcAft>
+                <a:spcPts val="800"/>
+              </a:spcAft>
+              <a:buNone/>
+            </a:pPr>
+            <a:r>
+              <a:rPr lang="en-US" sz="4000" dirty="0">
+                <a:solidFill>
+                  <a:srgbClr val="111111"/>
+                </a:solidFill>
+                <a:latin typeface="Times New Roman" pitchFamily="34" charset="0"/>
+                <a:ea typeface="Times New Roman" pitchFamily="34" charset="-122"/>
+                <a:cs typeface="Times New Roman" pitchFamily="34" charset="-120"/>
+              </a:rPr>
+              <a:t>Decentralisation gives powers and resources to regional and local councils (regional councils elected in 2020).</a:t>
             </a:r>
             <a:endParaRPr lang="en-US" sz="4000" dirty="0"/>
           </a:p>
@@ -19015,109 +19067,9 @@
           </a:p>
         </p:txBody>
       </p:sp>
-      <p:sp>
-        <p:nvSpPr>
-          <p:cNvPr id="3" name="Text 1"/>
-          <p:cNvSpPr/>
-          <p:nvPr/>
-        </p:nvSpPr>
-        <p:spPr>
-          <a:xfrm>
-            <a:off x="365760" y="1005840"/>
-            <a:ext cx="11460175" cy="731520"/>
-          </a:xfrm>
-          <a:prstGeom prst="rect">
-            <a:avLst/>
-          </a:prstGeom>
-          <a:noFill/>
-          <a:ln/>
-        </p:spPr>
-        <p:txBody>
-          <a:bodyPr wrap="square" lIns="0" tIns="0" rIns="0" bIns="0" rtlCol="0" anchor="ctr">
-            <a:normAutofit/>
-          </a:bodyPr>
-          <a:lstStyle/>
-          <a:p>
-            <a:pPr algn="ctr" indent="0" marL="0">
-              <a:buNone/>
-            </a:pPr>
-            <a:r>
-              <a:rPr lang="en-US" sz="3600" b="1" dirty="0">
-                <a:solidFill>
-                  <a:srgbClr val="990011"/>
-                </a:solidFill>
-                <a:latin typeface="Times New Roman" pitchFamily="34" charset="0"/>
-                <a:ea typeface="Times New Roman" pitchFamily="34" charset="-122"/>
-                <a:cs typeface="Times New Roman" pitchFamily="34" charset="-120"/>
-              </a:rPr>
-              <a:t>5. Measures Attempted to Reduce Inequality</a:t>
-            </a:r>
-            <a:endParaRPr lang="en-US" sz="3600" dirty="0"/>
-          </a:p>
-        </p:txBody>
-      </p:sp>
-      <p:sp>
-        <p:nvSpPr>
-          <p:cNvPr id="4" name="Text 2"/>
-          <p:cNvSpPr/>
-          <p:nvPr/>
-        </p:nvSpPr>
-        <p:spPr>
-          <a:xfrm>
-            <a:off x="365760" y="1783080"/>
-            <a:ext cx="4846320" cy="4617720"/>
-          </a:xfrm>
-          <a:prstGeom prst="rect">
-            <a:avLst/>
-          </a:prstGeom>
-          <a:noFill/>
-          <a:ln/>
-        </p:spPr>
-        <p:txBody>
-          <a:bodyPr wrap="square" lIns="0" tIns="0" rIns="0" bIns="0" rtlCol="0" anchor="t"/>
-          <a:lstStyle/>
-          <a:p>
-            <a:pPr algn="l" indent="0" marL="0">
-              <a:spcAft>
-                <a:spcPts val="800"/>
-              </a:spcAft>
-              <a:buNone/>
-            </a:pPr>
-            <a:r>
-              <a:rPr lang="en-US" sz="3600" b="1" dirty="0">
-                <a:solidFill>
-                  <a:srgbClr val="111111"/>
-                </a:solidFill>
-                <a:latin typeface="Times New Roman" pitchFamily="34" charset="0"/>
-                <a:ea typeface="Times New Roman" pitchFamily="34" charset="-122"/>
-                <a:cs typeface="Times New Roman" pitchFamily="34" charset="-120"/>
-              </a:rPr>
-              <a:t>Education and health: </a:t>
-            </a:r>
-            <a:pPr algn="l" indent="0" marL="0">
-              <a:spcAft>
-                <a:spcPts val="800"/>
-              </a:spcAft>
-              <a:buNone/>
-            </a:pPr>
-            <a:r>
-              <a:rPr lang="en-US" sz="3600" dirty="0">
-                <a:solidFill>
-                  <a:srgbClr val="111111"/>
-                </a:solidFill>
-                <a:latin typeface="Times New Roman" pitchFamily="34" charset="0"/>
-                <a:ea typeface="Times New Roman" pitchFamily="34" charset="-122"/>
-                <a:cs typeface="Times New Roman" pitchFamily="34" charset="-120"/>
-              </a:rPr>
-              <a:t>New universities in lagging regions (Ngaoundéré, Maroua, Garoua) and new hospitals.</a:t>
-            </a:r>
-            <a:endParaRPr lang="en-US" sz="3600" dirty="0"/>
-          </a:p>
-        </p:txBody>
-      </p:sp>
       <p:pic>
         <p:nvPicPr>
-          <p:cNvPr id="5" name="Image 0" descr="/home/claude/f4/img/v2/usa_school.jpg">    </p:cNvPr>
+          <p:cNvPr id="3" name="Image 0" descr="/home/claude/f4/img/minesec_sheet.png">    </p:cNvPr>
           <p:cNvPicPr>
             <a:picLocks noChangeAspect="1"/>
           </p:cNvPicPr>
@@ -19131,8 +19083,8 @@
         </p:blipFill>
         <p:spPr>
           <a:xfrm>
-            <a:off x="5349240" y="2071212"/>
-            <a:ext cx="6659575" cy="3693983"/>
+            <a:off x="0" y="658368"/>
+            <a:ext cx="5120640" cy="5833872"/>
           </a:xfrm>
           <a:prstGeom prst="rect">
             <a:avLst/>
@@ -19141,14 +19093,14 @@
       </p:pic>
       <p:sp>
         <p:nvSpPr>
-          <p:cNvPr id="6" name="Text 3"/>
+          <p:cNvPr id="4" name="Text 1"/>
           <p:cNvSpPr/>
           <p:nvPr/>
         </p:nvSpPr>
         <p:spPr>
           <a:xfrm>
-            <a:off x="5349240" y="6089904"/>
-            <a:ext cx="6659575" cy="347472"/>
+            <a:off x="5349240" y="1005840"/>
+            <a:ext cx="6522415" cy="731520"/>
           </a:xfrm>
           <a:prstGeom prst="rect">
             <a:avLst/>
@@ -19157,24 +19109,85 @@
           <a:ln/>
         </p:spPr>
         <p:txBody>
-          <a:bodyPr wrap="square" lIns="0" tIns="0" rIns="0" bIns="0" rtlCol="0" anchor="ctr"/>
+          <a:bodyPr wrap="square" lIns="0" tIns="0" rIns="0" bIns="0" rtlCol="0" anchor="ctr">
+            <a:normAutofit/>
+          </a:bodyPr>
           <a:lstStyle/>
           <a:p>
             <a:pPr algn="ctr" indent="0" marL="0">
               <a:buNone/>
             </a:pPr>
             <a:r>
-              <a:rPr lang="en-US" sz="1600" i="1" dirty="0">
-                <a:solidFill>
-                  <a:srgbClr val="555555"/>
+              <a:rPr lang="en-US" sz="3600" b="1" dirty="0">
+                <a:solidFill>
+                  <a:srgbClr val="990011"/>
                 </a:solidFill>
                 <a:latin typeface="Times New Roman" pitchFamily="34" charset="0"/>
                 <a:ea typeface="Times New Roman" pitchFamily="34" charset="-122"/>
                 <a:cs typeface="Times New Roman" pitchFamily="34" charset="-120"/>
               </a:rPr>
-              <a:t>Illustration: a school</a:t>
-            </a:r>
-            <a:endParaRPr lang="en-US" sz="1600" dirty="0"/>
+              <a:t>5. Measures Attempted to Reduce Inequality (continued)</a:t>
+            </a:r>
+            <a:endParaRPr lang="en-US" sz="3600" dirty="0"/>
+          </a:p>
+        </p:txBody>
+      </p:sp>
+      <p:sp>
+        <p:nvSpPr>
+          <p:cNvPr id="5" name="Text 2"/>
+          <p:cNvSpPr/>
+          <p:nvPr/>
+        </p:nvSpPr>
+        <p:spPr>
+          <a:xfrm>
+            <a:off x="5349240" y="1783080"/>
+            <a:ext cx="6522415" cy="4663440"/>
+          </a:xfrm>
+          <a:prstGeom prst="rect">
+            <a:avLst/>
+          </a:prstGeom>
+          <a:noFill/>
+          <a:ln/>
+        </p:spPr>
+        <p:txBody>
+          <a:bodyPr wrap="square" lIns="0" tIns="0" rIns="0" bIns="0" rtlCol="0" anchor="t"/>
+          <a:lstStyle/>
+          <a:p>
+            <a:pPr algn="l" indent="0" marL="0">
+              <a:spcAft>
+                <a:spcPts val="800"/>
+              </a:spcAft>
+              <a:buNone/>
+            </a:pPr>
+            <a:r>
+              <a:rPr lang="en-US" sz="4000" b="1" dirty="0">
+                <a:solidFill>
+                  <a:srgbClr val="111111"/>
+                </a:solidFill>
+                <a:latin typeface="Times New Roman" pitchFamily="34" charset="0"/>
+                <a:ea typeface="Times New Roman" pitchFamily="34" charset="-122"/>
+                <a:cs typeface="Times New Roman" pitchFamily="34" charset="-120"/>
+              </a:rPr>
+              <a:t>Infrastructure: </a:t>
+            </a:r>
+            <a:pPr algn="l" indent="0" marL="0">
+              <a:spcAft>
+                <a:spcPts val="800"/>
+              </a:spcAft>
+              <a:buNone/>
+            </a:pPr>
+            <a:r>
+              <a:rPr lang="en-US" sz="4000" dirty="0">
+                <a:solidFill>
+                  <a:srgbClr val="111111"/>
+                </a:solidFill>
+                <a:latin typeface="Times New Roman" pitchFamily="34" charset="0"/>
+                <a:ea typeface="Times New Roman" pitchFamily="34" charset="-122"/>
+                <a:cs typeface="Times New Roman" pitchFamily="34" charset="-120"/>
+              </a:rPr>
+              <a:t>Roads (Ngaoundéré–Garoua), the railway to Ngaoundéré, dams and electrification in lagging regions.</a:t>
+            </a:r>
+            <a:endParaRPr lang="en-US" sz="4000" dirty="0"/>
           </a:p>
         </p:txBody>
       </p:sp>
@@ -19290,9 +19303,109 @@
           </a:p>
         </p:txBody>
       </p:sp>
+      <p:sp>
+        <p:nvSpPr>
+          <p:cNvPr id="3" name="Text 1"/>
+          <p:cNvSpPr/>
+          <p:nvPr/>
+        </p:nvSpPr>
+        <p:spPr>
+          <a:xfrm>
+            <a:off x="365760" y="1005840"/>
+            <a:ext cx="11460175" cy="731520"/>
+          </a:xfrm>
+          <a:prstGeom prst="rect">
+            <a:avLst/>
+          </a:prstGeom>
+          <a:noFill/>
+          <a:ln/>
+        </p:spPr>
+        <p:txBody>
+          <a:bodyPr wrap="square" lIns="0" tIns="0" rIns="0" bIns="0" rtlCol="0" anchor="ctr">
+            <a:normAutofit/>
+          </a:bodyPr>
+          <a:lstStyle/>
+          <a:p>
+            <a:pPr algn="ctr" indent="0" marL="0">
+              <a:buNone/>
+            </a:pPr>
+            <a:r>
+              <a:rPr lang="en-US" sz="3600" b="1" dirty="0">
+                <a:solidFill>
+                  <a:srgbClr val="990011"/>
+                </a:solidFill>
+                <a:latin typeface="Times New Roman" pitchFamily="34" charset="0"/>
+                <a:ea typeface="Times New Roman" pitchFamily="34" charset="-122"/>
+                <a:cs typeface="Times New Roman" pitchFamily="34" charset="-120"/>
+              </a:rPr>
+              <a:t>5. Measures Attempted to Reduce Inequality</a:t>
+            </a:r>
+            <a:endParaRPr lang="en-US" sz="3600" dirty="0"/>
+          </a:p>
+        </p:txBody>
+      </p:sp>
+      <p:sp>
+        <p:nvSpPr>
+          <p:cNvPr id="4" name="Text 2"/>
+          <p:cNvSpPr/>
+          <p:nvPr/>
+        </p:nvSpPr>
+        <p:spPr>
+          <a:xfrm>
+            <a:off x="365760" y="1783080"/>
+            <a:ext cx="4846320" cy="4617720"/>
+          </a:xfrm>
+          <a:prstGeom prst="rect">
+            <a:avLst/>
+          </a:prstGeom>
+          <a:noFill/>
+          <a:ln/>
+        </p:spPr>
+        <p:txBody>
+          <a:bodyPr wrap="square" lIns="0" tIns="0" rIns="0" bIns="0" rtlCol="0" anchor="t"/>
+          <a:lstStyle/>
+          <a:p>
+            <a:pPr algn="l" indent="0" marL="0">
+              <a:spcAft>
+                <a:spcPts val="800"/>
+              </a:spcAft>
+              <a:buNone/>
+            </a:pPr>
+            <a:r>
+              <a:rPr lang="en-US" sz="3600" b="1" dirty="0">
+                <a:solidFill>
+                  <a:srgbClr val="111111"/>
+                </a:solidFill>
+                <a:latin typeface="Times New Roman" pitchFamily="34" charset="0"/>
+                <a:ea typeface="Times New Roman" pitchFamily="34" charset="-122"/>
+                <a:cs typeface="Times New Roman" pitchFamily="34" charset="-120"/>
+              </a:rPr>
+              <a:t>Education and health: </a:t>
+            </a:r>
+            <a:pPr algn="l" indent="0" marL="0">
+              <a:spcAft>
+                <a:spcPts val="800"/>
+              </a:spcAft>
+              <a:buNone/>
+            </a:pPr>
+            <a:r>
+              <a:rPr lang="en-US" sz="3600" dirty="0">
+                <a:solidFill>
+                  <a:srgbClr val="111111"/>
+                </a:solidFill>
+                <a:latin typeface="Times New Roman" pitchFamily="34" charset="0"/>
+                <a:ea typeface="Times New Roman" pitchFamily="34" charset="-122"/>
+                <a:cs typeface="Times New Roman" pitchFamily="34" charset="-120"/>
+              </a:rPr>
+              <a:t>New universities in lagging regions (Ngaoundéré, Maroua, Garoua) and new hospitals.</a:t>
+            </a:r>
+            <a:endParaRPr lang="en-US" sz="3600" dirty="0"/>
+          </a:p>
+        </p:txBody>
+      </p:sp>
       <p:pic>
         <p:nvPicPr>
-          <p:cNvPr id="3" name="Image 0" descr="/home/claude/f4/img/minesec_sheet.png">    </p:cNvPr>
+          <p:cNvPr id="5" name="Image 0" descr="/home/claude/f4/img/v2/usa_school.jpg">    </p:cNvPr>
           <p:cNvPicPr>
             <a:picLocks noChangeAspect="1"/>
           </p:cNvPicPr>
@@ -19306,8 +19419,8 @@
         </p:blipFill>
         <p:spPr>
           <a:xfrm>
-            <a:off x="0" y="658368"/>
-            <a:ext cx="1463040" cy="5833872"/>
+            <a:off x="5349240" y="2071212"/>
+            <a:ext cx="6659575" cy="3693983"/>
           </a:xfrm>
           <a:prstGeom prst="rect">
             <a:avLst/>
@@ -19316,14 +19429,14 @@
       </p:pic>
       <p:sp>
         <p:nvSpPr>
-          <p:cNvPr id="4" name="Text 1"/>
+          <p:cNvPr id="6" name="Text 3"/>
           <p:cNvSpPr/>
           <p:nvPr/>
         </p:nvSpPr>
         <p:spPr>
           <a:xfrm>
-            <a:off x="1691640" y="1005840"/>
-            <a:ext cx="10180015" cy="731520"/>
+            <a:off x="5349240" y="6089904"/>
+            <a:ext cx="6659575" cy="347472"/>
           </a:xfrm>
           <a:prstGeom prst="rect">
             <a:avLst/>
@@ -19332,122 +19445,24 @@
           <a:ln/>
         </p:spPr>
         <p:txBody>
-          <a:bodyPr wrap="square" lIns="0" tIns="0" rIns="0" bIns="0" rtlCol="0" anchor="ctr">
-            <a:normAutofit/>
-          </a:bodyPr>
+          <a:bodyPr wrap="square" lIns="0" tIns="0" rIns="0" bIns="0" rtlCol="0" anchor="ctr"/>
           <a:lstStyle/>
           <a:p>
             <a:pPr algn="ctr" indent="0" marL="0">
               <a:buNone/>
             </a:pPr>
             <a:r>
-              <a:rPr lang="en-US" sz="3600" b="1" dirty="0">
-                <a:solidFill>
-                  <a:srgbClr val="990011"/>
+              <a:rPr lang="en-US" sz="1600" i="1" dirty="0">
+                <a:solidFill>
+                  <a:srgbClr val="555555"/>
                 </a:solidFill>
                 <a:latin typeface="Times New Roman" pitchFamily="34" charset="0"/>
                 <a:ea typeface="Times New Roman" pitchFamily="34" charset="-122"/>
                 <a:cs typeface="Times New Roman" pitchFamily="34" charset="-120"/>
               </a:rPr>
-              <a:t>5. Measures Attempted to Reduce Inequality</a:t>
-            </a:r>
-            <a:endParaRPr lang="en-US" sz="3600" dirty="0"/>
-          </a:p>
-        </p:txBody>
-      </p:sp>
-      <p:sp>
-        <p:nvSpPr>
-          <p:cNvPr id="5" name="Text 2"/>
-          <p:cNvSpPr/>
-          <p:nvPr/>
-        </p:nvSpPr>
-        <p:spPr>
-          <a:xfrm>
-            <a:off x="1691640" y="1783080"/>
-            <a:ext cx="10180015" cy="4663440"/>
-          </a:xfrm>
-          <a:prstGeom prst="rect">
-            <a:avLst/>
-          </a:prstGeom>
-          <a:noFill/>
-          <a:ln/>
-        </p:spPr>
-        <p:txBody>
-          <a:bodyPr wrap="square" lIns="0" tIns="0" rIns="0" bIns="0" rtlCol="0" anchor="t"/>
-          <a:lstStyle/>
-          <a:p>
-            <a:pPr algn="l" indent="0" marL="0">
-              <a:spcAft>
-                <a:spcPts val="800"/>
-              </a:spcAft>
-              <a:buNone/>
-            </a:pPr>
-            <a:r>
-              <a:rPr lang="en-US" sz="4000" b="1" dirty="0">
-                <a:solidFill>
-                  <a:srgbClr val="111111"/>
-                </a:solidFill>
-                <a:latin typeface="Times New Roman" pitchFamily="34" charset="0"/>
-                <a:ea typeface="Times New Roman" pitchFamily="34" charset="-122"/>
-                <a:cs typeface="Times New Roman" pitchFamily="34" charset="-120"/>
-              </a:rPr>
-              <a:t>Development agencies and projects: </a:t>
-            </a:r>
-            <a:pPr algn="l" indent="0" marL="0">
-              <a:spcAft>
-                <a:spcPts val="800"/>
-              </a:spcAft>
-              <a:buNone/>
-            </a:pPr>
-            <a:r>
-              <a:rPr lang="en-US" sz="4000" dirty="0">
-                <a:solidFill>
-                  <a:srgbClr val="111111"/>
-                </a:solidFill>
-                <a:latin typeface="Times New Roman" pitchFamily="34" charset="0"/>
-                <a:ea typeface="Times New Roman" pitchFamily="34" charset="-122"/>
-                <a:cs typeface="Times New Roman" pitchFamily="34" charset="-120"/>
-              </a:rPr>
-              <a:t>Regional development agencies, agricultural and livestock projects and special plans for the northern regions.</a:t>
-            </a:r>
-            <a:endParaRPr lang="en-US" sz="4000" dirty="0"/>
-          </a:p>
-          <a:p>
-            <a:pPr algn="l" indent="0" marL="0">
-              <a:spcAft>
-                <a:spcPts val="800"/>
-              </a:spcAft>
-              <a:buNone/>
-            </a:pPr>
-            <a:r>
-              <a:rPr lang="en-US" sz="4000" b="1" dirty="0">
-                <a:solidFill>
-                  <a:srgbClr val="111111"/>
-                </a:solidFill>
-                <a:latin typeface="Times New Roman" pitchFamily="34" charset="0"/>
-                <a:ea typeface="Times New Roman" pitchFamily="34" charset="-122"/>
-                <a:cs typeface="Times New Roman" pitchFamily="34" charset="-120"/>
-              </a:rPr>
-              <a:t>Difficulties: </a:t>
-            </a:r>
-            <a:pPr algn="l" indent="0" marL="0">
-              <a:spcAft>
-                <a:spcPts val="800"/>
-              </a:spcAft>
-              <a:buNone/>
-            </a:pPr>
-            <a:r>
-              <a:rPr lang="en-US" sz="4000" dirty="0">
-                <a:solidFill>
-                  <a:srgbClr val="111111"/>
-                </a:solidFill>
-                <a:latin typeface="Times New Roman" pitchFamily="34" charset="0"/>
-                <a:ea typeface="Times New Roman" pitchFamily="34" charset="-122"/>
-                <a:cs typeface="Times New Roman" pitchFamily="34" charset="-120"/>
-              </a:rPr>
-              <a:t>Limited funds, slow implementation, corruption, insecurity and the strong pull of Douala and Yaoundé.</a:t>
-            </a:r>
-            <a:endParaRPr lang="en-US" sz="4000" dirty="0"/>
+              <a:t>Illustration: a school</a:t>
+            </a:r>
+            <a:endParaRPr lang="en-US" sz="1600" dirty="0"/>
           </a:p>
         </p:txBody>
       </p:sp>
@@ -19557,7 +19572,7 @@
                 <a:ea typeface="Calibri" pitchFamily="34" charset="-122"/>
                 <a:cs typeface="Calibri" pitchFamily="34" charset="-120"/>
               </a:rPr>
-              <a:t>FORMATIVE EVALUATION</a:t>
+              <a:t>BOARD SUMMARY</a:t>
             </a:r>
             <a:endParaRPr lang="en-US" sz="1400" dirty="0"/>
           </a:p>
@@ -19580,7 +19595,7 @@
         <p:spPr>
           <a:xfrm>
             <a:off x="0" y="658368"/>
-            <a:ext cx="5120640" cy="5833872"/>
+            <a:ext cx="1463040" cy="5833872"/>
           </a:xfrm>
           <a:prstGeom prst="rect">
             <a:avLst/>
@@ -19595,8 +19610,8 @@
         </p:nvSpPr>
         <p:spPr>
           <a:xfrm>
-            <a:off x="5349240" y="1005840"/>
-            <a:ext cx="6522415" cy="731520"/>
+            <a:off x="1691640" y="1005840"/>
+            <a:ext cx="10180015" cy="731520"/>
           </a:xfrm>
           <a:prstGeom prst="rect">
             <a:avLst/>
@@ -19622,7 +19637,7 @@
                 <a:ea typeface="Times New Roman" pitchFamily="34" charset="-122"/>
                 <a:cs typeface="Times New Roman" pitchFamily="34" charset="-120"/>
               </a:rPr>
-              <a:t>Evaluation 1</a:t>
+              <a:t>5. Measures Attempted to Reduce Inequality</a:t>
             </a:r>
             <a:endParaRPr lang="en-US" sz="3600" dirty="0"/>
           </a:p>
@@ -19636,8 +19651,8 @@
         </p:nvSpPr>
         <p:spPr>
           <a:xfrm>
-            <a:off x="5349240" y="1783080"/>
-            <a:ext cx="6522415" cy="4663440"/>
+            <a:off x="1691640" y="1783080"/>
+            <a:ext cx="10180015" cy="4663440"/>
           </a:xfrm>
           <a:prstGeom prst="rect">
             <a:avLst/>
@@ -19656,7 +19671,7 @@
               <a:buNone/>
             </a:pPr>
             <a:r>
-              <a:rPr lang="en-US" sz="4000" dirty="0">
+              <a:rPr lang="en-US" sz="4000" b="1" dirty="0">
                 <a:solidFill>
                   <a:srgbClr val="111111"/>
                 </a:solidFill>
@@ -19664,7 +19679,61 @@
                 <a:ea typeface="Times New Roman" pitchFamily="34" charset="-122"/>
                 <a:cs typeface="Times New Roman" pitchFamily="34" charset="-120"/>
               </a:rPr>
-              <a:t>Distinguish between backwash and spread effects.</a:t>
+              <a:t>Development agencies and projects: </a:t>
+            </a:r>
+            <a:pPr algn="l" indent="0" marL="0">
+              <a:spcAft>
+                <a:spcPts val="800"/>
+              </a:spcAft>
+              <a:buNone/>
+            </a:pPr>
+            <a:r>
+              <a:rPr lang="en-US" sz="4000" dirty="0">
+                <a:solidFill>
+                  <a:srgbClr val="111111"/>
+                </a:solidFill>
+                <a:latin typeface="Times New Roman" pitchFamily="34" charset="0"/>
+                <a:ea typeface="Times New Roman" pitchFamily="34" charset="-122"/>
+                <a:cs typeface="Times New Roman" pitchFamily="34" charset="-120"/>
+              </a:rPr>
+              <a:t>Regional development agencies, agricultural and livestock projects and special plans for the northern regions.</a:t>
+            </a:r>
+            <a:endParaRPr lang="en-US" sz="4000" dirty="0"/>
+          </a:p>
+          <a:p>
+            <a:pPr algn="l" indent="0" marL="0">
+              <a:spcAft>
+                <a:spcPts val="800"/>
+              </a:spcAft>
+              <a:buNone/>
+            </a:pPr>
+            <a:r>
+              <a:rPr lang="en-US" sz="4000" b="1" dirty="0">
+                <a:solidFill>
+                  <a:srgbClr val="111111"/>
+                </a:solidFill>
+                <a:latin typeface="Times New Roman" pitchFamily="34" charset="0"/>
+                <a:ea typeface="Times New Roman" pitchFamily="34" charset="-122"/>
+                <a:cs typeface="Times New Roman" pitchFamily="34" charset="-120"/>
+              </a:rPr>
+              <a:t>Difficulties: </a:t>
+            </a:r>
+            <a:pPr algn="l" indent="0" marL="0">
+              <a:spcAft>
+                <a:spcPts val="800"/>
+              </a:spcAft>
+              <a:buNone/>
+            </a:pPr>
+            <a:r>
+              <a:rPr lang="en-US" sz="4000" dirty="0">
+                <a:solidFill>
+                  <a:srgbClr val="111111"/>
+                </a:solidFill>
+                <a:latin typeface="Times New Roman" pitchFamily="34" charset="0"/>
+                <a:ea typeface="Times New Roman" pitchFamily="34" charset="-122"/>
+                <a:cs typeface="Times New Roman" pitchFamily="34" charset="-120"/>
+              </a:rPr>
+              <a:t>Limited funds, slow implementation, corruption, insecurity and the strong pull of Douala and Yaoundé.</a:t>
             </a:r>
             <a:endParaRPr lang="en-US" sz="4000" dirty="0"/>
           </a:p>
@@ -19841,7 +19910,7 @@
                 <a:ea typeface="Times New Roman" pitchFamily="34" charset="-122"/>
                 <a:cs typeface="Times New Roman" pitchFamily="34" charset="-120"/>
               </a:rPr>
-              <a:t>Expected Answer</a:t>
+              <a:t>Evaluation 1</a:t>
             </a:r>
             <a:endParaRPr lang="en-US" sz="3600" dirty="0"/>
           </a:p>
@@ -19883,7 +19952,7 @@
                 <a:ea typeface="Times New Roman" pitchFamily="34" charset="-122"/>
                 <a:cs typeface="Times New Roman" pitchFamily="34" charset="-120"/>
               </a:rPr>
-              <a:t>Backwash effects draw labour and capital from poor regions to the core; spread effects are the growth that spreads from the core to poorer regions.</a:t>
+              <a:t>Distinguish between backwash and spread effects.</a:t>
             </a:r>
             <a:endParaRPr lang="en-US" sz="4000" dirty="0"/>
           </a:p>
@@ -20060,7 +20129,7 @@
                 <a:ea typeface="Times New Roman" pitchFamily="34" charset="-122"/>
                 <a:cs typeface="Times New Roman" pitchFamily="34" charset="-120"/>
               </a:rPr>
-              <a:t>Evaluation 2</a:t>
+              <a:t>Expected Answer</a:t>
             </a:r>
             <a:endParaRPr lang="en-US" sz="3600" dirty="0"/>
           </a:p>
@@ -20102,7 +20171,7 @@
                 <a:ea typeface="Times New Roman" pitchFamily="34" charset="-122"/>
                 <a:cs typeface="Times New Roman" pitchFamily="34" charset="-120"/>
               </a:rPr>
-              <a:t>Give two indicators that show that the coast is more developed than the Adamawa.</a:t>
+              <a:t>Backwash effects draw labour and capital from poor regions to the core; spread effects are the growth that spreads from the core to poorer regions.</a:t>
             </a:r>
             <a:endParaRPr lang="en-US" sz="4000" dirty="0"/>
           </a:p>
@@ -20279,7 +20348,7 @@
                 <a:ea typeface="Times New Roman" pitchFamily="34" charset="-122"/>
                 <a:cs typeface="Times New Roman" pitchFamily="34" charset="-120"/>
               </a:rPr>
-              <a:t>Expected Answer</a:t>
+              <a:t>Evaluation 2</a:t>
             </a:r>
             <a:endParaRPr lang="en-US" sz="3600" dirty="0"/>
           </a:p>
@@ -20321,7 +20390,7 @@
                 <a:ea typeface="Times New Roman" pitchFamily="34" charset="-122"/>
                 <a:cs typeface="Times New Roman" pitchFamily="34" charset="-120"/>
               </a:rPr>
-              <a:t>Lower poverty and more schools and hospitals (also more formal jobs and better roads).</a:t>
+              <a:t>Give two indicators that show that the coast is more developed than the Adamawa.</a:t>
             </a:r>
             <a:endParaRPr lang="en-US" sz="4000" dirty="0"/>
           </a:p>
@@ -20433,7 +20502,7 @@
                 <a:ea typeface="Calibri" pitchFamily="34" charset="-122"/>
                 <a:cs typeface="Calibri" pitchFamily="34" charset="-120"/>
               </a:rPr>
-              <a:t>REMEDIATION</a:t>
+              <a:t>FORMATIVE EVALUATION</a:t>
             </a:r>
             <a:endParaRPr lang="en-US" sz="1400" dirty="0"/>
           </a:p>
@@ -20498,7 +20567,7 @@
                 <a:ea typeface="Times New Roman" pitchFamily="34" charset="-122"/>
                 <a:cs typeface="Times New Roman" pitchFamily="34" charset="-120"/>
               </a:rPr>
-              <a:t>Remediation</a:t>
+              <a:t>Expected Answer</a:t>
             </a:r>
             <a:endParaRPr lang="en-US" sz="3600" dirty="0"/>
           </a:p>
@@ -20532,7 +20601,7 @@
               <a:buNone/>
             </a:pPr>
             <a:r>
-              <a:rPr lang="en-US" sz="4000" b="1" dirty="0">
+              <a:rPr lang="en-US" sz="4000" dirty="0">
                 <a:solidFill>
                   <a:srgbClr val="111111"/>
                 </a:solidFill>
@@ -20540,51 +20609,7 @@
                 <a:ea typeface="Times New Roman" pitchFamily="34" charset="-122"/>
                 <a:cs typeface="Times New Roman" pitchFamily="34" charset="-120"/>
               </a:rPr>
-              <a:t>Fill in the blanks:</a:t>
-            </a:r>
-            <a:endParaRPr lang="en-US" sz="4000" dirty="0"/>
-          </a:p>
-          <a:p>
-            <a:pPr algn="l" marL="342900" indent="-342900">
-              <a:spcAft>
-                <a:spcPts val="800"/>
-              </a:spcAft>
-              <a:buSzPct val="100000"/>
-              <a:buFont typeface="+mj-lt"/>
-              <a:buAutoNum type="arabicPeriod" startAt="1"/>
-            </a:pPr>
-            <a:r>
-              <a:rPr lang="en-US" sz="4000" dirty="0">
-                <a:solidFill>
-                  <a:srgbClr val="111111"/>
-                </a:solidFill>
-                <a:latin typeface="Times New Roman" pitchFamily="34" charset="0"/>
-                <a:ea typeface="Times New Roman" pitchFamily="34" charset="-122"/>
-                <a:cs typeface="Times New Roman" pitchFamily="34" charset="-120"/>
-              </a:rPr>
-              <a:t>The prosperous region in the core-periphery model is the ______.</a:t>
-            </a:r>
-            <a:endParaRPr lang="en-US" sz="4000" dirty="0"/>
-          </a:p>
-          <a:p>
-            <a:pPr algn="l" marL="342900" indent="-342900">
-              <a:spcAft>
-                <a:spcPts val="800"/>
-              </a:spcAft>
-              <a:buSzPct val="100000"/>
-              <a:buFont typeface="+mj-lt"/>
-              <a:buAutoNum type="arabicPeriod" startAt="1"/>
-            </a:pPr>
-            <a:r>
-              <a:rPr lang="en-US" sz="4000" dirty="0">
-                <a:solidFill>
-                  <a:srgbClr val="111111"/>
-                </a:solidFill>
-                <a:latin typeface="Times New Roman" pitchFamily="34" charset="0"/>
-                <a:ea typeface="Times New Roman" pitchFamily="34" charset="-122"/>
-                <a:cs typeface="Times New Roman" pitchFamily="34" charset="-120"/>
-              </a:rPr>
-              <a:t>The model of cumulative causation was proposed by ______.</a:t>
+              <a:t>Lower poverty and more schools and hospitals (also more formal jobs and better roads).</a:t>
             </a:r>
             <a:endParaRPr lang="en-US" sz="4000" dirty="0"/>
           </a:p>
@@ -20761,7 +20786,7 @@
                 <a:ea typeface="Times New Roman" pitchFamily="34" charset="-122"/>
                 <a:cs typeface="Times New Roman" pitchFamily="34" charset="-120"/>
               </a:rPr>
-              <a:t>Remediation (continued)</a:t>
+              <a:t>Remediation</a:t>
             </a:r>
             <a:endParaRPr lang="en-US" sz="3600" dirty="0"/>
           </a:p>
@@ -20787,6 +20812,26 @@
         <p:txBody>
           <a:bodyPr wrap="square" lIns="0" tIns="0" rIns="0" bIns="0" rtlCol="0" anchor="t"/>
           <a:lstStyle/>
+          <a:p>
+            <a:pPr algn="l" indent="0" marL="0">
+              <a:spcAft>
+                <a:spcPts val="800"/>
+              </a:spcAft>
+              <a:buNone/>
+            </a:pPr>
+            <a:r>
+              <a:rPr lang="en-US" sz="4000" b="1" dirty="0">
+                <a:solidFill>
+                  <a:srgbClr val="111111"/>
+                </a:solidFill>
+                <a:latin typeface="Times New Roman" pitchFamily="34" charset="0"/>
+                <a:ea typeface="Times New Roman" pitchFamily="34" charset="-122"/>
+                <a:cs typeface="Times New Roman" pitchFamily="34" charset="-120"/>
+              </a:rPr>
+              <a:t>Fill in the blanks:</a:t>
+            </a:r>
+            <a:endParaRPr lang="en-US" sz="4000" dirty="0"/>
+          </a:p>
           <a:p>
             <a:pPr algn="l" marL="342900" indent="-342900">
               <a:spcAft>
@@ -20805,7 +20850,29 @@
                 <a:ea typeface="Times New Roman" pitchFamily="34" charset="-122"/>
                 <a:cs typeface="Times New Roman" pitchFamily="34" charset="-120"/>
               </a:rPr>
-              <a:t>Giving powers to regional and local councils is ______.</a:t>
+              <a:t>The prosperous region in the core-periphery model is the ______.</a:t>
+            </a:r>
+            <a:endParaRPr lang="en-US" sz="4000" dirty="0"/>
+          </a:p>
+          <a:p>
+            <a:pPr algn="l" marL="342900" indent="-342900">
+              <a:spcAft>
+                <a:spcPts val="800"/>
+              </a:spcAft>
+              <a:buSzPct val="100000"/>
+              <a:buFont typeface="+mj-lt"/>
+              <a:buAutoNum type="arabicPeriod" startAt="1"/>
+            </a:pPr>
+            <a:r>
+              <a:rPr lang="en-US" sz="4000" dirty="0">
+                <a:solidFill>
+                  <a:srgbClr val="111111"/>
+                </a:solidFill>
+                <a:latin typeface="Times New Roman" pitchFamily="34" charset="0"/>
+                <a:ea typeface="Times New Roman" pitchFamily="34" charset="-122"/>
+                <a:cs typeface="Times New Roman" pitchFamily="34" charset="-120"/>
+              </a:rPr>
+              <a:t>The model of cumulative causation was proposed by ______.</a:t>
             </a:r>
             <a:endParaRPr lang="en-US" sz="4000" dirty="0"/>
           </a:p>
@@ -20917,7 +20984,7 @@
                 <a:ea typeface="Calibri" pitchFamily="34" charset="-122"/>
                 <a:cs typeface="Calibri" pitchFamily="34" charset="-120"/>
               </a:rPr>
-              <a:t>HOMEWORK</a:t>
+              <a:t>REMEDIATION</a:t>
             </a:r>
             <a:endParaRPr lang="en-US" sz="1400" dirty="0"/>
           </a:p>
@@ -20982,7 +21049,7 @@
                 <a:ea typeface="Times New Roman" pitchFamily="34" charset="-122"/>
                 <a:cs typeface="Times New Roman" pitchFamily="34" charset="-120"/>
               </a:rPr>
-              <a:t>Homework</a:t>
+              <a:t>Remediation (continued)</a:t>
             </a:r>
             <a:endParaRPr lang="en-US" sz="3600" dirty="0"/>
           </a:p>
@@ -21009,11 +21076,13 @@
           <a:bodyPr wrap="square" lIns="0" tIns="0" rIns="0" bIns="0" rtlCol="0" anchor="t"/>
           <a:lstStyle/>
           <a:p>
-            <a:pPr algn="l" indent="0" marL="0">
+            <a:pPr algn="l" marL="342900" indent="-342900">
               <a:spcAft>
                 <a:spcPts val="800"/>
               </a:spcAft>
-              <a:buNone/>
+              <a:buSzPct val="100000"/>
+              <a:buFont typeface="+mj-lt"/>
+              <a:buAutoNum type="arabicPeriod" startAt="1"/>
             </a:pPr>
             <a:r>
               <a:rPr lang="en-US" sz="4000" dirty="0">
@@ -21024,7 +21093,7 @@
                 <a:ea typeface="Times New Roman" pitchFamily="34" charset="-122"/>
                 <a:cs typeface="Times New Roman" pitchFamily="34" charset="-120"/>
               </a:rPr>
-              <a:t>List three indicators of development.</a:t>
+              <a:t>Giving powers to regional and local councils is ______.</a:t>
             </a:r>
             <a:endParaRPr lang="en-US" sz="4000" dirty="0"/>
           </a:p>
@@ -21136,22 +21205,46 @@
                 <a:ea typeface="Calibri" pitchFamily="34" charset="-122"/>
                 <a:cs typeface="Calibri" pitchFamily="34" charset="-120"/>
               </a:rPr>
-              <a:t>BILINGUAL GAME</a:t>
+              <a:t>HOMEWORK</a:t>
             </a:r>
             <a:endParaRPr lang="en-US" sz="1400" dirty="0"/>
           </a:p>
         </p:txBody>
       </p:sp>
-      <p:sp>
-        <p:nvSpPr>
-          <p:cNvPr id="3" name="Text 1"/>
+      <p:pic>
+        <p:nvPicPr>
+          <p:cNvPr id="3" name="Image 0" descr="/home/claude/f4/img/minesec_sheet.png">    </p:cNvPr>
+          <p:cNvPicPr>
+            <a:picLocks noChangeAspect="1"/>
+          </p:cNvPicPr>
+          <p:nvPr/>
+        </p:nvPicPr>
+        <p:blipFill>
+          <a:blip r:embed="rId1"/>
+          <a:stretch>
+            <a:fillRect/>
+          </a:stretch>
+        </p:blipFill>
+        <p:spPr>
+          <a:xfrm>
+            <a:off x="0" y="658368"/>
+            <a:ext cx="5120640" cy="5833872"/>
+          </a:xfrm>
+          <a:prstGeom prst="rect">
+            <a:avLst/>
+          </a:prstGeom>
+        </p:spPr>
+      </p:pic>
+      <p:sp>
+        <p:nvSpPr>
+          <p:cNvPr id="4" name="Text 1"/>
           <p:cNvSpPr/>
           <p:nvPr/>
         </p:nvSpPr>
         <p:spPr>
           <a:xfrm>
-            <a:off x="457200" y="1005840"/>
-            <a:ext cx="11277295" cy="731520"/>
+            <a:off x="5349240" y="1005840"/>
+            <a:ext cx="6522415" cy="731520"/>
           </a:xfrm>
           <a:prstGeom prst="rect">
             <a:avLst/>
@@ -21160,7 +21253,9 @@
           <a:ln/>
         </p:spPr>
         <p:txBody>
-          <a:bodyPr wrap="square" lIns="0" tIns="0" rIns="0" bIns="0" rtlCol="0" anchor="ctr"/>
+          <a:bodyPr wrap="square" lIns="0" tIns="0" rIns="0" bIns="0" rtlCol="0" anchor="ctr">
+            <a:normAutofit/>
+          </a:bodyPr>
           <a:lstStyle/>
           <a:p>
             <a:pPr algn="ctr" indent="0" marL="0">
@@ -21175,6 +21270,530 @@
                 <a:ea typeface="Times New Roman" pitchFamily="34" charset="-122"/>
                 <a:cs typeface="Times New Roman" pitchFamily="34" charset="-120"/>
               </a:rPr>
+              <a:t>Homework</a:t>
+            </a:r>
+            <a:endParaRPr lang="en-US" sz="3600" dirty="0"/>
+          </a:p>
+        </p:txBody>
+      </p:sp>
+      <p:sp>
+        <p:nvSpPr>
+          <p:cNvPr id="5" name="Text 2"/>
+          <p:cNvSpPr/>
+          <p:nvPr/>
+        </p:nvSpPr>
+        <p:spPr>
+          <a:xfrm>
+            <a:off x="5349240" y="1783080"/>
+            <a:ext cx="6522415" cy="4663440"/>
+          </a:xfrm>
+          <a:prstGeom prst="rect">
+            <a:avLst/>
+          </a:prstGeom>
+          <a:noFill/>
+          <a:ln/>
+        </p:spPr>
+        <p:txBody>
+          <a:bodyPr wrap="square" lIns="0" tIns="0" rIns="0" bIns="0" rtlCol="0" anchor="t"/>
+          <a:lstStyle/>
+          <a:p>
+            <a:pPr algn="l" indent="0" marL="0">
+              <a:spcAft>
+                <a:spcPts val="800"/>
+              </a:spcAft>
+              <a:buNone/>
+            </a:pPr>
+            <a:r>
+              <a:rPr lang="en-US" sz="4000" dirty="0">
+                <a:solidFill>
+                  <a:srgbClr val="111111"/>
+                </a:solidFill>
+                <a:latin typeface="Times New Roman" pitchFamily="34" charset="0"/>
+                <a:ea typeface="Times New Roman" pitchFamily="34" charset="-122"/>
+                <a:cs typeface="Times New Roman" pitchFamily="34" charset="-120"/>
+              </a:rPr>
+              <a:t>List three indicators of development.</a:t>
+            </a:r>
+            <a:endParaRPr lang="en-US" sz="4000" dirty="0"/>
+          </a:p>
+        </p:txBody>
+      </p:sp>
+      <p:sp>
+        <p:nvSpPr>
+          <p:cNvPr id="25" name="Slide Number Placeholder 0"/>
+          <p:cNvSpPr>
+            <a:spLocks noGrp="1"/>
+          </p:cNvSpPr>
+          <p:nvPr>
+            <p:ph type="sldNum" sz="quarter" idx="4294967295"/>
+          </p:nvPr>
+        </p:nvSpPr>
+        <p:spPr>
+          <a:xfrm>
+            <a:off x="27432" y="91440"/>
+            <a:ext cx="585216" cy="475488"/>
+          </a:xfrm>
+          <a:prstGeom prst="rect">
+            <a:avLst/>
+          </a:prstGeom>
+          <a:extLst>
+            <a:ext uri="{C572A759-6A51-4108-AA02-DFA0A04FC94B}">
+              <ma14:wrappingTextBoxFlag xmlns:ma14="http://schemas.microsoft.com/office/mac/drawingml/2011/main" val="0"/>
+            </a:ext>
+          </a:extLst>
+        </p:spPr>
+        <p:txBody>
+          <a:bodyPr/>
+          <a:lstStyle>
+            <a:lvl1pPr>
+              <a:defRPr sz="2000">
+                <a:solidFill>
+                  <a:srgbClr val="FFFFFF"/>
+                </a:solidFill>
+                <a:latin typeface="Calibri"/>
+                <a:ea typeface="Calibri"/>
+                <a:cs typeface="Calibri"/>
+              </a:defRPr>
+            </a:lvl1pPr>
+          </a:lstStyle>
+          <a:p>
+            <a:pPr algn="ctr"/>
+            <a:fld id="{F7021451-1387-4CA6-816F-3879F97B5CBC}" type="slidenum">
+              <a:rPr b="1" lang="en-US"/>
+              <a:t>59</a:t>
+            </a:fld>
+            <a:endParaRPr lang="en-US"/>
+          </a:p>
+        </p:txBody>
+      </p:sp>
+    </p:spTree>
+  </p:cSld>
+  <p:clrMapOvr>
+    <a:masterClrMapping/>
+  </p:clrMapOvr>
+</p:sld>
+</file>
+
+<file path=ppt/slides/slide6.xml><?xml version="1.0" encoding="utf-8"?>
+<p:sld xmlns:a="http://schemas.openxmlformats.org/drawingml/2006/main" xmlns:r="http://schemas.openxmlformats.org/officeDocument/2006/relationships" xmlns:p="http://schemas.openxmlformats.org/presentationml/2006/main">
+  <p:cSld name="Slide 6">
+    <p:spTree>
+      <p:nvGrpSpPr>
+        <p:cNvPr id="1" name=""/>
+        <p:cNvGrpSpPr/>
+        <p:nvPr/>
+      </p:nvGrpSpPr>
+      <p:grpSpPr>
+        <a:xfrm>
+          <a:off x="0" y="0"/>
+          <a:ext cx="0" cy="0"/>
+          <a:chOff x="0" y="0"/>
+          <a:chExt cx="0" cy="0"/>
+        </a:xfrm>
+      </p:grpSpPr>
+      <p:sp>
+        <p:nvSpPr>
+          <p:cNvPr id="2" name="Text 0"/>
+          <p:cNvSpPr/>
+          <p:nvPr/>
+        </p:nvSpPr>
+        <p:spPr>
+          <a:xfrm>
+            <a:off x="457200" y="713232"/>
+            <a:ext cx="11368735" cy="274320"/>
+          </a:xfrm>
+          <a:prstGeom prst="rect">
+            <a:avLst/>
+          </a:prstGeom>
+          <a:noFill/>
+          <a:ln/>
+        </p:spPr>
+        <p:txBody>
+          <a:bodyPr wrap="square" lIns="0" tIns="0" rIns="0" bIns="0" rtlCol="0" anchor="ctr"/>
+          <a:lstStyle/>
+          <a:p>
+            <a:pPr algn="r" indent="0" marL="0">
+              <a:buNone/>
+            </a:pPr>
+            <a:r>
+              <a:rPr lang="en-US" sz="1400" b="1" dirty="0">
+                <a:solidFill>
+                  <a:srgbClr val="1C3F6E"/>
+                </a:solidFill>
+                <a:latin typeface="Calibri" pitchFamily="34" charset="0"/>
+                <a:ea typeface="Calibri" pitchFamily="34" charset="-122"/>
+                <a:cs typeface="Calibri" pitchFamily="34" charset="-120"/>
+              </a:rPr>
+              <a:t>LESSON PLAN</a:t>
+            </a:r>
+            <a:endParaRPr lang="en-US" sz="1400" dirty="0"/>
+          </a:p>
+        </p:txBody>
+      </p:sp>
+      <p:pic>
+        <p:nvPicPr>
+          <p:cNvPr id="3" name="Image 0" descr="/home/claude/f4/img/minesec_sheet.png">    </p:cNvPr>
+          <p:cNvPicPr>
+            <a:picLocks noChangeAspect="1"/>
+          </p:cNvPicPr>
+          <p:nvPr/>
+        </p:nvPicPr>
+        <p:blipFill>
+          <a:blip r:embed="rId1"/>
+          <a:stretch>
+            <a:fillRect/>
+          </a:stretch>
+        </p:blipFill>
+        <p:spPr>
+          <a:xfrm>
+            <a:off x="0" y="658368"/>
+            <a:ext cx="2468880" cy="5833872"/>
+          </a:xfrm>
+          <a:prstGeom prst="rect">
+            <a:avLst/>
+          </a:prstGeom>
+        </p:spPr>
+      </p:pic>
+      <p:sp>
+        <p:nvSpPr>
+          <p:cNvPr id="4" name="Text 1"/>
+          <p:cNvSpPr/>
+          <p:nvPr/>
+        </p:nvSpPr>
+        <p:spPr>
+          <a:xfrm>
+            <a:off x="2697480" y="1005840"/>
+            <a:ext cx="9174175" cy="731520"/>
+          </a:xfrm>
+          <a:prstGeom prst="rect">
+            <a:avLst/>
+          </a:prstGeom>
+          <a:noFill/>
+          <a:ln/>
+        </p:spPr>
+        <p:txBody>
+          <a:bodyPr wrap="square" lIns="0" tIns="0" rIns="0" bIns="0" rtlCol="0" anchor="ctr">
+            <a:normAutofit/>
+          </a:bodyPr>
+          <a:lstStyle/>
+          <a:p>
+            <a:pPr algn="ctr" indent="0" marL="0">
+              <a:buNone/>
+            </a:pPr>
+            <a:r>
+              <a:rPr lang="en-US" sz="3600" b="1" dirty="0">
+                <a:solidFill>
+                  <a:srgbClr val="990011"/>
+                </a:solidFill>
+                <a:latin typeface="Times New Roman" pitchFamily="34" charset="0"/>
+                <a:ea typeface="Times New Roman" pitchFamily="34" charset="-122"/>
+                <a:cs typeface="Times New Roman" pitchFamily="34" charset="-120"/>
+              </a:rPr>
+              <a:t>Lesson Plan</a:t>
+            </a:r>
+            <a:endParaRPr lang="en-US" sz="3600" dirty="0"/>
+          </a:p>
+        </p:txBody>
+      </p:sp>
+      <p:sp>
+        <p:nvSpPr>
+          <p:cNvPr id="5" name="Text 2"/>
+          <p:cNvSpPr/>
+          <p:nvPr/>
+        </p:nvSpPr>
+        <p:spPr>
+          <a:xfrm>
+            <a:off x="2697480" y="1783080"/>
+            <a:ext cx="9174175" cy="4663440"/>
+          </a:xfrm>
+          <a:prstGeom prst="rect">
+            <a:avLst/>
+          </a:prstGeom>
+          <a:noFill/>
+          <a:ln/>
+        </p:spPr>
+        <p:txBody>
+          <a:bodyPr wrap="square" lIns="0" tIns="0" rIns="0" bIns="0" rtlCol="0" anchor="t"/>
+          <a:lstStyle/>
+          <a:p>
+            <a:pPr algn="l" marL="342900" indent="-342900">
+              <a:spcAft>
+                <a:spcPts val="800"/>
+              </a:spcAft>
+              <a:buSzPct val="100000"/>
+              <a:buFont typeface="+mj-lt"/>
+              <a:buAutoNum type="arabicPeriod" startAt="1"/>
+            </a:pPr>
+            <a:r>
+              <a:rPr lang="en-US" sz="4000" dirty="0">
+                <a:solidFill>
+                  <a:srgbClr val="111111"/>
+                </a:solidFill>
+                <a:latin typeface="Times New Roman" pitchFamily="34" charset="0"/>
+                <a:ea typeface="Times New Roman" pitchFamily="34" charset="-122"/>
+                <a:cs typeface="Times New Roman" pitchFamily="34" charset="-120"/>
+              </a:rPr>
+              <a:t>Correction of the homework</a:t>
+            </a:r>
+            <a:endParaRPr lang="en-US" sz="4000" dirty="0"/>
+          </a:p>
+          <a:p>
+            <a:pPr algn="l" marL="342900" indent="-342900">
+              <a:spcAft>
+                <a:spcPts val="800"/>
+              </a:spcAft>
+              <a:buSzPct val="100000"/>
+              <a:buFont typeface="+mj-lt"/>
+              <a:buAutoNum type="arabicPeriod" startAt="1"/>
+            </a:pPr>
+            <a:r>
+              <a:rPr lang="en-US" sz="4000" dirty="0">
+                <a:solidFill>
+                  <a:srgbClr val="111111"/>
+                </a:solidFill>
+                <a:latin typeface="Times New Roman" pitchFamily="34" charset="0"/>
+                <a:ea typeface="Times New Roman" pitchFamily="34" charset="-122"/>
+                <a:cs typeface="Times New Roman" pitchFamily="34" charset="-120"/>
+              </a:rPr>
+              <a:t>Objectives and recall</a:t>
+            </a:r>
+            <a:endParaRPr lang="en-US" sz="4000" dirty="0"/>
+          </a:p>
+          <a:p>
+            <a:pPr algn="l" marL="342900" indent="-342900">
+              <a:spcAft>
+                <a:spcPts val="800"/>
+              </a:spcAft>
+              <a:buSzPct val="100000"/>
+              <a:buFont typeface="+mj-lt"/>
+              <a:buAutoNum type="arabicPeriod" startAt="1"/>
+            </a:pPr>
+            <a:r>
+              <a:rPr lang="en-US" sz="4000" dirty="0">
+                <a:solidFill>
+                  <a:srgbClr val="111111"/>
+                </a:solidFill>
+                <a:latin typeface="Times New Roman" pitchFamily="34" charset="0"/>
+                <a:ea typeface="Times New Roman" pitchFamily="34" charset="-122"/>
+                <a:cs typeface="Times New Roman" pitchFamily="34" charset="-120"/>
+              </a:rPr>
+              <a:t>Real-life situation and action to take</a:t>
+            </a:r>
+            <a:endParaRPr lang="en-US" sz="4000" dirty="0"/>
+          </a:p>
+          <a:p>
+            <a:pPr algn="l" marL="342900" indent="-342900">
+              <a:spcAft>
+                <a:spcPts val="800"/>
+              </a:spcAft>
+              <a:buSzPct val="100000"/>
+              <a:buFont typeface="+mj-lt"/>
+              <a:buAutoNum type="arabicPeriod" startAt="1"/>
+            </a:pPr>
+            <a:r>
+              <a:rPr lang="en-US" sz="4000" dirty="0">
+                <a:solidFill>
+                  <a:srgbClr val="111111"/>
+                </a:solidFill>
+                <a:latin typeface="Times New Roman" pitchFamily="34" charset="0"/>
+                <a:ea typeface="Times New Roman" pitchFamily="34" charset="-122"/>
+                <a:cs typeface="Times New Roman" pitchFamily="34" charset="-120"/>
+              </a:rPr>
+              <a:t>Learning activities</a:t>
+            </a:r>
+            <a:endParaRPr lang="en-US" sz="4000" dirty="0"/>
+          </a:p>
+          <a:p>
+            <a:pPr algn="l" marL="342900" indent="-342900">
+              <a:spcAft>
+                <a:spcPts val="800"/>
+              </a:spcAft>
+              <a:buSzPct val="100000"/>
+              <a:buFont typeface="+mj-lt"/>
+              <a:buAutoNum type="arabicPeriod" startAt="1"/>
+            </a:pPr>
+            <a:r>
+              <a:rPr lang="en-US" sz="4000" dirty="0">
+                <a:solidFill>
+                  <a:srgbClr val="111111"/>
+                </a:solidFill>
+                <a:latin typeface="Times New Roman" pitchFamily="34" charset="0"/>
+                <a:ea typeface="Times New Roman" pitchFamily="34" charset="-122"/>
+                <a:cs typeface="Times New Roman" pitchFamily="34" charset="-120"/>
+              </a:rPr>
+              <a:t>Board summary</a:t>
+            </a:r>
+            <a:endParaRPr lang="en-US" sz="4000" dirty="0"/>
+          </a:p>
+          <a:p>
+            <a:pPr algn="l" marL="342900" indent="-342900">
+              <a:spcAft>
+                <a:spcPts val="800"/>
+              </a:spcAft>
+              <a:buSzPct val="100000"/>
+              <a:buFont typeface="+mj-lt"/>
+              <a:buAutoNum type="arabicPeriod" startAt="1"/>
+            </a:pPr>
+            <a:r>
+              <a:rPr lang="en-US" sz="4000" dirty="0">
+                <a:solidFill>
+                  <a:srgbClr val="111111"/>
+                </a:solidFill>
+                <a:latin typeface="Times New Roman" pitchFamily="34" charset="0"/>
+                <a:ea typeface="Times New Roman" pitchFamily="34" charset="-122"/>
+                <a:cs typeface="Times New Roman" pitchFamily="34" charset="-120"/>
+              </a:rPr>
+              <a:t>Evaluation, remediation and homework</a:t>
+            </a:r>
+            <a:endParaRPr lang="en-US" sz="4000" dirty="0"/>
+          </a:p>
+        </p:txBody>
+      </p:sp>
+      <p:sp>
+        <p:nvSpPr>
+          <p:cNvPr id="25" name="Slide Number Placeholder 0"/>
+          <p:cNvSpPr>
+            <a:spLocks noGrp="1"/>
+          </p:cNvSpPr>
+          <p:nvPr>
+            <p:ph type="sldNum" sz="quarter" idx="4294967295"/>
+          </p:nvPr>
+        </p:nvSpPr>
+        <p:spPr>
+          <a:xfrm>
+            <a:off x="27432" y="91440"/>
+            <a:ext cx="585216" cy="475488"/>
+          </a:xfrm>
+          <a:prstGeom prst="rect">
+            <a:avLst/>
+          </a:prstGeom>
+          <a:extLst>
+            <a:ext uri="{C572A759-6A51-4108-AA02-DFA0A04FC94B}">
+              <ma14:wrappingTextBoxFlag xmlns:ma14="http://schemas.microsoft.com/office/mac/drawingml/2011/main" val="0"/>
+            </a:ext>
+          </a:extLst>
+        </p:spPr>
+        <p:txBody>
+          <a:bodyPr/>
+          <a:lstStyle>
+            <a:lvl1pPr>
+              <a:defRPr sz="2000">
+                <a:solidFill>
+                  <a:srgbClr val="FFFFFF"/>
+                </a:solidFill>
+                <a:latin typeface="Calibri"/>
+                <a:ea typeface="Calibri"/>
+                <a:cs typeface="Calibri"/>
+              </a:defRPr>
+            </a:lvl1pPr>
+          </a:lstStyle>
+          <a:p>
+            <a:pPr algn="ctr"/>
+            <a:fld id="{F7021451-1387-4CA6-816F-3879F97B5CBC}" type="slidenum">
+              <a:rPr b="1" lang="en-US"/>
+              <a:t>6</a:t>
+            </a:fld>
+            <a:endParaRPr lang="en-US"/>
+          </a:p>
+        </p:txBody>
+      </p:sp>
+    </p:spTree>
+  </p:cSld>
+  <p:clrMapOvr>
+    <a:masterClrMapping/>
+  </p:clrMapOvr>
+</p:sld>
+</file>
+
+<file path=ppt/slides/slide60.xml><?xml version="1.0" encoding="utf-8"?>
+<p:sld xmlns:a="http://schemas.openxmlformats.org/drawingml/2006/main" xmlns:r="http://schemas.openxmlformats.org/officeDocument/2006/relationships" xmlns:p="http://schemas.openxmlformats.org/presentationml/2006/main">
+  <p:cSld name="Slide 60">
+    <p:spTree>
+      <p:nvGrpSpPr>
+        <p:cNvPr id="1" name=""/>
+        <p:cNvGrpSpPr/>
+        <p:nvPr/>
+      </p:nvGrpSpPr>
+      <p:grpSpPr>
+        <a:xfrm>
+          <a:off x="0" y="0"/>
+          <a:ext cx="0" cy="0"/>
+          <a:chOff x="0" y="0"/>
+          <a:chExt cx="0" cy="0"/>
+        </a:xfrm>
+      </p:grpSpPr>
+      <p:sp>
+        <p:nvSpPr>
+          <p:cNvPr id="2" name="Text 0"/>
+          <p:cNvSpPr/>
+          <p:nvPr/>
+        </p:nvSpPr>
+        <p:spPr>
+          <a:xfrm>
+            <a:off x="457200" y="713232"/>
+            <a:ext cx="11368735" cy="274320"/>
+          </a:xfrm>
+          <a:prstGeom prst="rect">
+            <a:avLst/>
+          </a:prstGeom>
+          <a:noFill/>
+          <a:ln/>
+        </p:spPr>
+        <p:txBody>
+          <a:bodyPr wrap="square" lIns="0" tIns="0" rIns="0" bIns="0" rtlCol="0" anchor="ctr"/>
+          <a:lstStyle/>
+          <a:p>
+            <a:pPr algn="r" indent="0" marL="0">
+              <a:buNone/>
+            </a:pPr>
+            <a:r>
+              <a:rPr lang="en-US" sz="1400" b="1" dirty="0">
+                <a:solidFill>
+                  <a:srgbClr val="1C3F6E"/>
+                </a:solidFill>
+                <a:latin typeface="Calibri" pitchFamily="34" charset="0"/>
+                <a:ea typeface="Calibri" pitchFamily="34" charset="-122"/>
+                <a:cs typeface="Calibri" pitchFamily="34" charset="-120"/>
+              </a:rPr>
+              <a:t>BILINGUAL GAME</a:t>
+            </a:r>
+            <a:endParaRPr lang="en-US" sz="1400" dirty="0"/>
+          </a:p>
+        </p:txBody>
+      </p:sp>
+      <p:sp>
+        <p:nvSpPr>
+          <p:cNvPr id="3" name="Text 1"/>
+          <p:cNvSpPr/>
+          <p:nvPr/>
+        </p:nvSpPr>
+        <p:spPr>
+          <a:xfrm>
+            <a:off x="457200" y="1005840"/>
+            <a:ext cx="11277295" cy="731520"/>
+          </a:xfrm>
+          <a:prstGeom prst="rect">
+            <a:avLst/>
+          </a:prstGeom>
+          <a:noFill/>
+          <a:ln/>
+        </p:spPr>
+        <p:txBody>
+          <a:bodyPr wrap="square" lIns="0" tIns="0" rIns="0" bIns="0" rtlCol="0" anchor="ctr"/>
+          <a:lstStyle/>
+          <a:p>
+            <a:pPr algn="ctr" indent="0" marL="0">
+              <a:buNone/>
+            </a:pPr>
+            <a:r>
+              <a:rPr lang="en-US" sz="3600" b="1" dirty="0">
+                <a:solidFill>
+                  <a:srgbClr val="990011"/>
+                </a:solidFill>
+                <a:latin typeface="Times New Roman" pitchFamily="34" charset="0"/>
+                <a:ea typeface="Times New Roman" pitchFamily="34" charset="-122"/>
+                <a:cs typeface="Times New Roman" pitchFamily="34" charset="-120"/>
+              </a:rPr>
               <a:t>Bilingual Game (Jeu Bilingue)</a:t>
             </a:r>
             <a:endParaRPr lang="en-US" sz="3600" dirty="0"/>
@@ -21183,7 +21802,7 @@
       </p:sp>
       <p:graphicFrame>
         <p:nvGraphicFramePr>
-          <p:cNvPr id="60" name="Table 0"/>
+          <p:cNvPr id="61" name="Table 0"/>
           <p:cNvGraphicFramePr>
             <a:graphicFrameLocks noGrp="1"/>
           </p:cNvGraphicFramePr>
@@ -22495,7 +23114,7 @@
             <a:pPr algn="ctr"/>
             <a:fld id="{F7021451-1387-4CA6-816F-3879F97B5CBC}" type="slidenum">
               <a:rPr b="1" lang="en-US"/>
-              <a:t>59</a:t>
+              <a:t>60</a:t>
             </a:fld>
             <a:endParaRPr lang="en-US"/>
           </a:p>
@@ -22509,9 +23128,9 @@
 </p:sld>
 </file>
 
-<file path=ppt/slides/slide6.xml><?xml version="1.0" encoding="utf-8"?>
+<file path=ppt/slides/slide61.xml><?xml version="1.0" encoding="utf-8"?>
 <p:sld xmlns:a="http://schemas.openxmlformats.org/drawingml/2006/main" xmlns:r="http://schemas.openxmlformats.org/officeDocument/2006/relationships" xmlns:p="http://schemas.openxmlformats.org/presentationml/2006/main">
-  <p:cSld name="Slide 6">
+  <p:cSld name="Slide 61">
     <p:spTree>
       <p:nvGrpSpPr>
         <p:cNvPr id="1" name=""/>
@@ -22559,46 +23178,22 @@
                 <a:ea typeface="Calibri" pitchFamily="34" charset="-122"/>
                 <a:cs typeface="Calibri" pitchFamily="34" charset="-120"/>
               </a:rPr>
-              <a:t>LESSON PLAN</a:t>
+              <a:t>LOGBOOK</a:t>
             </a:r>
             <a:endParaRPr lang="en-US" sz="1400" dirty="0"/>
           </a:p>
         </p:txBody>
       </p:sp>
-      <p:pic>
-        <p:nvPicPr>
-          <p:cNvPr id="3" name="Image 0" descr="/home/claude/f4/img/minesec_sheet.png">    </p:cNvPr>
-          <p:cNvPicPr>
-            <a:picLocks noChangeAspect="1"/>
-          </p:cNvPicPr>
-          <p:nvPr/>
-        </p:nvPicPr>
-        <p:blipFill>
-          <a:blip r:embed="rId1"/>
-          <a:stretch>
-            <a:fillRect/>
-          </a:stretch>
-        </p:blipFill>
-        <p:spPr>
-          <a:xfrm>
-            <a:off x="0" y="658368"/>
-            <a:ext cx="2468880" cy="5833872"/>
-          </a:xfrm>
-          <a:prstGeom prst="rect">
-            <a:avLst/>
-          </a:prstGeom>
-        </p:spPr>
-      </p:pic>
-      <p:sp>
-        <p:nvSpPr>
-          <p:cNvPr id="4" name="Text 1"/>
+      <p:sp>
+        <p:nvSpPr>
+          <p:cNvPr id="3" name="Text 1"/>
           <p:cNvSpPr/>
           <p:nvPr/>
         </p:nvSpPr>
         <p:spPr>
           <a:xfrm>
-            <a:off x="2697480" y="1005840"/>
-            <a:ext cx="9174175" cy="731520"/>
+            <a:off x="457200" y="1005840"/>
+            <a:ext cx="11277295" cy="731520"/>
           </a:xfrm>
           <a:prstGeom prst="rect">
             <a:avLst/>
@@ -22607,9 +23202,7 @@
           <a:ln/>
         </p:spPr>
         <p:txBody>
-          <a:bodyPr wrap="square" lIns="0" tIns="0" rIns="0" bIns="0" rtlCol="0" anchor="ctr">
-            <a:normAutofit/>
-          </a:bodyPr>
+          <a:bodyPr wrap="square" lIns="0" tIns="0" rIns="0" bIns="0" rtlCol="0" anchor="ctr"/>
           <a:lstStyle/>
           <a:p>
             <a:pPr algn="ctr" indent="0" marL="0">
@@ -22624,311 +23217,6 @@
                 <a:ea typeface="Times New Roman" pitchFamily="34" charset="-122"/>
                 <a:cs typeface="Times New Roman" pitchFamily="34" charset="-120"/>
               </a:rPr>
-              <a:t>Lesson Plan</a:t>
-            </a:r>
-            <a:endParaRPr lang="en-US" sz="3600" dirty="0"/>
-          </a:p>
-        </p:txBody>
-      </p:sp>
-      <p:sp>
-        <p:nvSpPr>
-          <p:cNvPr id="5" name="Text 2"/>
-          <p:cNvSpPr/>
-          <p:nvPr/>
-        </p:nvSpPr>
-        <p:spPr>
-          <a:xfrm>
-            <a:off x="2697480" y="1783080"/>
-            <a:ext cx="9174175" cy="4663440"/>
-          </a:xfrm>
-          <a:prstGeom prst="rect">
-            <a:avLst/>
-          </a:prstGeom>
-          <a:noFill/>
-          <a:ln/>
-        </p:spPr>
-        <p:txBody>
-          <a:bodyPr wrap="square" lIns="0" tIns="0" rIns="0" bIns="0" rtlCol="0" anchor="t"/>
-          <a:lstStyle/>
-          <a:p>
-            <a:pPr algn="l" marL="342900" indent="-342900">
-              <a:spcAft>
-                <a:spcPts val="800"/>
-              </a:spcAft>
-              <a:buSzPct val="100000"/>
-              <a:buFont typeface="+mj-lt"/>
-              <a:buAutoNum type="arabicPeriod" startAt="1"/>
-            </a:pPr>
-            <a:r>
-              <a:rPr lang="en-US" sz="4000" dirty="0">
-                <a:solidFill>
-                  <a:srgbClr val="111111"/>
-                </a:solidFill>
-                <a:latin typeface="Times New Roman" pitchFamily="34" charset="0"/>
-                <a:ea typeface="Times New Roman" pitchFamily="34" charset="-122"/>
-                <a:cs typeface="Times New Roman" pitchFamily="34" charset="-120"/>
-              </a:rPr>
-              <a:t>Correction of the homework</a:t>
-            </a:r>
-            <a:endParaRPr lang="en-US" sz="4000" dirty="0"/>
-          </a:p>
-          <a:p>
-            <a:pPr algn="l" marL="342900" indent="-342900">
-              <a:spcAft>
-                <a:spcPts val="800"/>
-              </a:spcAft>
-              <a:buSzPct val="100000"/>
-              <a:buFont typeface="+mj-lt"/>
-              <a:buAutoNum type="arabicPeriod" startAt="1"/>
-            </a:pPr>
-            <a:r>
-              <a:rPr lang="en-US" sz="4000" dirty="0">
-                <a:solidFill>
-                  <a:srgbClr val="111111"/>
-                </a:solidFill>
-                <a:latin typeface="Times New Roman" pitchFamily="34" charset="0"/>
-                <a:ea typeface="Times New Roman" pitchFamily="34" charset="-122"/>
-                <a:cs typeface="Times New Roman" pitchFamily="34" charset="-120"/>
-              </a:rPr>
-              <a:t>Objectives and recall</a:t>
-            </a:r>
-            <a:endParaRPr lang="en-US" sz="4000" dirty="0"/>
-          </a:p>
-          <a:p>
-            <a:pPr algn="l" marL="342900" indent="-342900">
-              <a:spcAft>
-                <a:spcPts val="800"/>
-              </a:spcAft>
-              <a:buSzPct val="100000"/>
-              <a:buFont typeface="+mj-lt"/>
-              <a:buAutoNum type="arabicPeriod" startAt="1"/>
-            </a:pPr>
-            <a:r>
-              <a:rPr lang="en-US" sz="4000" dirty="0">
-                <a:solidFill>
-                  <a:srgbClr val="111111"/>
-                </a:solidFill>
-                <a:latin typeface="Times New Roman" pitchFamily="34" charset="0"/>
-                <a:ea typeface="Times New Roman" pitchFamily="34" charset="-122"/>
-                <a:cs typeface="Times New Roman" pitchFamily="34" charset="-120"/>
-              </a:rPr>
-              <a:t>Real-life situation and action to take</a:t>
-            </a:r>
-            <a:endParaRPr lang="en-US" sz="4000" dirty="0"/>
-          </a:p>
-          <a:p>
-            <a:pPr algn="l" marL="342900" indent="-342900">
-              <a:spcAft>
-                <a:spcPts val="800"/>
-              </a:spcAft>
-              <a:buSzPct val="100000"/>
-              <a:buFont typeface="+mj-lt"/>
-              <a:buAutoNum type="arabicPeriod" startAt="1"/>
-            </a:pPr>
-            <a:r>
-              <a:rPr lang="en-US" sz="4000" dirty="0">
-                <a:solidFill>
-                  <a:srgbClr val="111111"/>
-                </a:solidFill>
-                <a:latin typeface="Times New Roman" pitchFamily="34" charset="0"/>
-                <a:ea typeface="Times New Roman" pitchFamily="34" charset="-122"/>
-                <a:cs typeface="Times New Roman" pitchFamily="34" charset="-120"/>
-              </a:rPr>
-              <a:t>Learning activities</a:t>
-            </a:r>
-            <a:endParaRPr lang="en-US" sz="4000" dirty="0"/>
-          </a:p>
-          <a:p>
-            <a:pPr algn="l" marL="342900" indent="-342900">
-              <a:spcAft>
-                <a:spcPts val="800"/>
-              </a:spcAft>
-              <a:buSzPct val="100000"/>
-              <a:buFont typeface="+mj-lt"/>
-              <a:buAutoNum type="arabicPeriod" startAt="1"/>
-            </a:pPr>
-            <a:r>
-              <a:rPr lang="en-US" sz="4000" dirty="0">
-                <a:solidFill>
-                  <a:srgbClr val="111111"/>
-                </a:solidFill>
-                <a:latin typeface="Times New Roman" pitchFamily="34" charset="0"/>
-                <a:ea typeface="Times New Roman" pitchFamily="34" charset="-122"/>
-                <a:cs typeface="Times New Roman" pitchFamily="34" charset="-120"/>
-              </a:rPr>
-              <a:t>Board summary</a:t>
-            </a:r>
-            <a:endParaRPr lang="en-US" sz="4000" dirty="0"/>
-          </a:p>
-          <a:p>
-            <a:pPr algn="l" marL="342900" indent="-342900">
-              <a:spcAft>
-                <a:spcPts val="800"/>
-              </a:spcAft>
-              <a:buSzPct val="100000"/>
-              <a:buFont typeface="+mj-lt"/>
-              <a:buAutoNum type="arabicPeriod" startAt="1"/>
-            </a:pPr>
-            <a:r>
-              <a:rPr lang="en-US" sz="4000" dirty="0">
-                <a:solidFill>
-                  <a:srgbClr val="111111"/>
-                </a:solidFill>
-                <a:latin typeface="Times New Roman" pitchFamily="34" charset="0"/>
-                <a:ea typeface="Times New Roman" pitchFamily="34" charset="-122"/>
-                <a:cs typeface="Times New Roman" pitchFamily="34" charset="-120"/>
-              </a:rPr>
-              <a:t>Evaluation, remediation and homework</a:t>
-            </a:r>
-            <a:endParaRPr lang="en-US" sz="4000" dirty="0"/>
-          </a:p>
-        </p:txBody>
-      </p:sp>
-      <p:sp>
-        <p:nvSpPr>
-          <p:cNvPr id="25" name="Slide Number Placeholder 0"/>
-          <p:cNvSpPr>
-            <a:spLocks noGrp="1"/>
-          </p:cNvSpPr>
-          <p:nvPr>
-            <p:ph type="sldNum" sz="quarter" idx="4294967295"/>
-          </p:nvPr>
-        </p:nvSpPr>
-        <p:spPr>
-          <a:xfrm>
-            <a:off x="27432" y="91440"/>
-            <a:ext cx="585216" cy="475488"/>
-          </a:xfrm>
-          <a:prstGeom prst="rect">
-            <a:avLst/>
-          </a:prstGeom>
-          <a:extLst>
-            <a:ext uri="{C572A759-6A51-4108-AA02-DFA0A04FC94B}">
-              <ma14:wrappingTextBoxFlag xmlns:ma14="http://schemas.microsoft.com/office/mac/drawingml/2011/main" val="0"/>
-            </a:ext>
-          </a:extLst>
-        </p:spPr>
-        <p:txBody>
-          <a:bodyPr/>
-          <a:lstStyle>
-            <a:lvl1pPr>
-              <a:defRPr sz="2000">
-                <a:solidFill>
-                  <a:srgbClr val="FFFFFF"/>
-                </a:solidFill>
-                <a:latin typeface="Calibri"/>
-                <a:ea typeface="Calibri"/>
-                <a:cs typeface="Calibri"/>
-              </a:defRPr>
-            </a:lvl1pPr>
-          </a:lstStyle>
-          <a:p>
-            <a:pPr algn="ctr"/>
-            <a:fld id="{F7021451-1387-4CA6-816F-3879F97B5CBC}" type="slidenum">
-              <a:rPr b="1" lang="en-US"/>
-              <a:t>6</a:t>
-            </a:fld>
-            <a:endParaRPr lang="en-US"/>
-          </a:p>
-        </p:txBody>
-      </p:sp>
-    </p:spTree>
-  </p:cSld>
-  <p:clrMapOvr>
-    <a:masterClrMapping/>
-  </p:clrMapOvr>
-</p:sld>
-</file>
-
-<file path=ppt/slides/slide60.xml><?xml version="1.0" encoding="utf-8"?>
-<p:sld xmlns:a="http://schemas.openxmlformats.org/drawingml/2006/main" xmlns:r="http://schemas.openxmlformats.org/officeDocument/2006/relationships" xmlns:p="http://schemas.openxmlformats.org/presentationml/2006/main">
-  <p:cSld name="Slide 60">
-    <p:spTree>
-      <p:nvGrpSpPr>
-        <p:cNvPr id="1" name=""/>
-        <p:cNvGrpSpPr/>
-        <p:nvPr/>
-      </p:nvGrpSpPr>
-      <p:grpSpPr>
-        <a:xfrm>
-          <a:off x="0" y="0"/>
-          <a:ext cx="0" cy="0"/>
-          <a:chOff x="0" y="0"/>
-          <a:chExt cx="0" cy="0"/>
-        </a:xfrm>
-      </p:grpSpPr>
-      <p:sp>
-        <p:nvSpPr>
-          <p:cNvPr id="2" name="Text 0"/>
-          <p:cNvSpPr/>
-          <p:nvPr/>
-        </p:nvSpPr>
-        <p:spPr>
-          <a:xfrm>
-            <a:off x="457200" y="713232"/>
-            <a:ext cx="11368735" cy="274320"/>
-          </a:xfrm>
-          <a:prstGeom prst="rect">
-            <a:avLst/>
-          </a:prstGeom>
-          <a:noFill/>
-          <a:ln/>
-        </p:spPr>
-        <p:txBody>
-          <a:bodyPr wrap="square" lIns="0" tIns="0" rIns="0" bIns="0" rtlCol="0" anchor="ctr"/>
-          <a:lstStyle/>
-          <a:p>
-            <a:pPr algn="r" indent="0" marL="0">
-              <a:buNone/>
-            </a:pPr>
-            <a:r>
-              <a:rPr lang="en-US" sz="1400" b="1" dirty="0">
-                <a:solidFill>
-                  <a:srgbClr val="1C3F6E"/>
-                </a:solidFill>
-                <a:latin typeface="Calibri" pitchFamily="34" charset="0"/>
-                <a:ea typeface="Calibri" pitchFamily="34" charset="-122"/>
-                <a:cs typeface="Calibri" pitchFamily="34" charset="-120"/>
-              </a:rPr>
-              <a:t>LOGBOOK</a:t>
-            </a:r>
-            <a:endParaRPr lang="en-US" sz="1400" dirty="0"/>
-          </a:p>
-        </p:txBody>
-      </p:sp>
-      <p:sp>
-        <p:nvSpPr>
-          <p:cNvPr id="3" name="Text 1"/>
-          <p:cNvSpPr/>
-          <p:nvPr/>
-        </p:nvSpPr>
-        <p:spPr>
-          <a:xfrm>
-            <a:off x="457200" y="1005840"/>
-            <a:ext cx="11277295" cy="731520"/>
-          </a:xfrm>
-          <a:prstGeom prst="rect">
-            <a:avLst/>
-          </a:prstGeom>
-          <a:noFill/>
-          <a:ln/>
-        </p:spPr>
-        <p:txBody>
-          <a:bodyPr wrap="square" lIns="0" tIns="0" rIns="0" bIns="0" rtlCol="0" anchor="ctr"/>
-          <a:lstStyle/>
-          <a:p>
-            <a:pPr algn="ctr" indent="0" marL="0">
-              <a:buNone/>
-            </a:pPr>
-            <a:r>
-              <a:rPr lang="en-US" sz="3600" b="1" dirty="0">
-                <a:solidFill>
-                  <a:srgbClr val="990011"/>
-                </a:solidFill>
-                <a:latin typeface="Times New Roman" pitchFamily="34" charset="0"/>
-                <a:ea typeface="Times New Roman" pitchFamily="34" charset="-122"/>
-                <a:cs typeface="Times New Roman" pitchFamily="34" charset="-120"/>
-              </a:rPr>
               <a:t>Official Logbook (1/2)</a:t>
             </a:r>
             <a:endParaRPr lang="en-US" sz="3600" dirty="0"/>
@@ -22937,7 +23225,7 @@
       </p:sp>
       <p:graphicFrame>
         <p:nvGraphicFramePr>
-          <p:cNvPr id="61" name="Table 0"/>
+          <p:cNvPr id="62" name="Table 0"/>
           <p:cNvGraphicFramePr>
             <a:graphicFrameLocks noGrp="1"/>
           </p:cNvGraphicFramePr>
@@ -23559,7 +23847,7 @@
             <a:pPr algn="ctr"/>
             <a:fld id="{F7021451-1387-4CA6-816F-3879F97B5CBC}" type="slidenum">
               <a:rPr b="1" lang="en-US"/>
-              <a:t>60</a:t>
+              <a:t>61</a:t>
             </a:fld>
             <a:endParaRPr lang="en-US"/>
           </a:p>
@@ -23573,9 +23861,9 @@
 </p:sld>
 </file>
 
-<file path=ppt/slides/slide61.xml><?xml version="1.0" encoding="utf-8"?>
+<file path=ppt/slides/slide62.xml><?xml version="1.0" encoding="utf-8"?>
 <p:sld xmlns:a="http://schemas.openxmlformats.org/drawingml/2006/main" xmlns:r="http://schemas.openxmlformats.org/officeDocument/2006/relationships" xmlns:p="http://schemas.openxmlformats.org/presentationml/2006/main">
-  <p:cSld name="Slide 61">
+  <p:cSld name="Slide 62">
     <p:spTree>
       <p:nvGrpSpPr>
         <p:cNvPr id="1" name=""/>
@@ -23670,7 +23958,7 @@
       </p:sp>
       <p:graphicFrame>
         <p:nvGraphicFramePr>
-          <p:cNvPr id="62" name="Table 0"/>
+          <p:cNvPr id="63" name="Table 0"/>
           <p:cNvGraphicFramePr>
             <a:graphicFrameLocks noGrp="1"/>
           </p:cNvGraphicFramePr>
@@ -24430,331 +24718,6 @@
             <a:pPr algn="ctr"/>
             <a:fld id="{F7021451-1387-4CA6-816F-3879F97B5CBC}" type="slidenum">
               <a:rPr b="1" lang="en-US"/>
-              <a:t>61</a:t>
-            </a:fld>
-            <a:endParaRPr lang="en-US"/>
-          </a:p>
-        </p:txBody>
-      </p:sp>
-    </p:spTree>
-  </p:cSld>
-  <p:clrMapOvr>
-    <a:masterClrMapping/>
-  </p:clrMapOvr>
-</p:sld>
-</file>
-
-<file path=ppt/slides/slide62.xml><?xml version="1.0" encoding="utf-8"?>
-<p:sld xmlns:a="http://schemas.openxmlformats.org/drawingml/2006/main" xmlns:r="http://schemas.openxmlformats.org/officeDocument/2006/relationships" xmlns:p="http://schemas.openxmlformats.org/presentationml/2006/main">
-  <p:cSld name="Slide 62">
-    <p:spTree>
-      <p:nvGrpSpPr>
-        <p:cNvPr id="1" name=""/>
-        <p:cNvGrpSpPr/>
-        <p:nvPr/>
-      </p:nvGrpSpPr>
-      <p:grpSpPr>
-        <a:xfrm>
-          <a:off x="0" y="0"/>
-          <a:ext cx="0" cy="0"/>
-          <a:chOff x="0" y="0"/>
-          <a:chExt cx="0" cy="0"/>
-        </a:xfrm>
-      </p:grpSpPr>
-      <p:sp>
-        <p:nvSpPr>
-          <p:cNvPr id="2" name="Text 0"/>
-          <p:cNvSpPr/>
-          <p:nvPr/>
-        </p:nvSpPr>
-        <p:spPr>
-          <a:xfrm>
-            <a:off x="457200" y="713232"/>
-            <a:ext cx="11368735" cy="274320"/>
-          </a:xfrm>
-          <a:prstGeom prst="rect">
-            <a:avLst/>
-          </a:prstGeom>
-          <a:noFill/>
-          <a:ln/>
-        </p:spPr>
-        <p:txBody>
-          <a:bodyPr wrap="square" lIns="0" tIns="0" rIns="0" bIns="0" rtlCol="0" anchor="ctr"/>
-          <a:lstStyle/>
-          <a:p>
-            <a:pPr algn="r" indent="0" marL="0">
-              <a:buNone/>
-            </a:pPr>
-            <a:r>
-              <a:rPr lang="en-US" sz="1400" b="1" dirty="0">
-                <a:solidFill>
-                  <a:srgbClr val="1C3F6E"/>
-                </a:solidFill>
-                <a:latin typeface="Calibri" pitchFamily="34" charset="0"/>
-                <a:ea typeface="Calibri" pitchFamily="34" charset="-122"/>
-                <a:cs typeface="Calibri" pitchFamily="34" charset="-120"/>
-              </a:rPr>
-              <a:t>TEACHER'S NOTE</a:t>
-            </a:r>
-            <a:endParaRPr lang="en-US" sz="1400" dirty="0"/>
-          </a:p>
-        </p:txBody>
-      </p:sp>
-      <p:pic>
-        <p:nvPicPr>
-          <p:cNvPr id="3" name="Image 0" descr="/home/claude/f4/img/minesec_sheet.png">    </p:cNvPr>
-          <p:cNvPicPr>
-            <a:picLocks noChangeAspect="1"/>
-          </p:cNvPicPr>
-          <p:nvPr/>
-        </p:nvPicPr>
-        <p:blipFill>
-          <a:blip r:embed="rId1"/>
-          <a:stretch>
-            <a:fillRect/>
-          </a:stretch>
-        </p:blipFill>
-        <p:spPr>
-          <a:xfrm>
-            <a:off x="0" y="658368"/>
-            <a:ext cx="3840480" cy="5833872"/>
-          </a:xfrm>
-          <a:prstGeom prst="rect">
-            <a:avLst/>
-          </a:prstGeom>
-        </p:spPr>
-      </p:pic>
-      <p:sp>
-        <p:nvSpPr>
-          <p:cNvPr id="4" name="Text 1"/>
-          <p:cNvSpPr/>
-          <p:nvPr/>
-        </p:nvSpPr>
-        <p:spPr>
-          <a:xfrm>
-            <a:off x="4069080" y="1005840"/>
-            <a:ext cx="7802575" cy="731520"/>
-          </a:xfrm>
-          <a:prstGeom prst="rect">
-            <a:avLst/>
-          </a:prstGeom>
-          <a:noFill/>
-          <a:ln/>
-        </p:spPr>
-        <p:txBody>
-          <a:bodyPr wrap="square" lIns="0" tIns="0" rIns="0" bIns="0" rtlCol="0" anchor="ctr">
-            <a:normAutofit/>
-          </a:bodyPr>
-          <a:lstStyle/>
-          <a:p>
-            <a:pPr algn="ctr" indent="0" marL="0">
-              <a:buNone/>
-            </a:pPr>
-            <a:r>
-              <a:rPr lang="en-US" sz="3600" b="1" dirty="0">
-                <a:solidFill>
-                  <a:srgbClr val="990011"/>
-                </a:solidFill>
-                <a:latin typeface="Times New Roman" pitchFamily="34" charset="0"/>
-                <a:ea typeface="Times New Roman" pitchFamily="34" charset="-122"/>
-                <a:cs typeface="Times New Roman" pitchFamily="34" charset="-120"/>
-              </a:rPr>
-              <a:t>Teacher's Note</a:t>
-            </a:r>
-            <a:endParaRPr lang="en-US" sz="3600" dirty="0"/>
-          </a:p>
-        </p:txBody>
-      </p:sp>
-      <p:sp>
-        <p:nvSpPr>
-          <p:cNvPr id="5" name="Text 2"/>
-          <p:cNvSpPr/>
-          <p:nvPr/>
-        </p:nvSpPr>
-        <p:spPr>
-          <a:xfrm>
-            <a:off x="4069080" y="1783080"/>
-            <a:ext cx="7802575" cy="4663440"/>
-          </a:xfrm>
-          <a:prstGeom prst="rect">
-            <a:avLst/>
-          </a:prstGeom>
-          <a:noFill/>
-          <a:ln/>
-        </p:spPr>
-        <p:txBody>
-          <a:bodyPr wrap="square" lIns="0" tIns="0" rIns="0" bIns="0" rtlCol="0" anchor="t"/>
-          <a:lstStyle/>
-          <a:p>
-            <a:pPr algn="l" marL="342900" indent="-342900">
-              <a:spcAft>
-                <a:spcPts val="800"/>
-              </a:spcAft>
-              <a:buSzPct val="100000"/>
-              <a:buChar char="•"/>
-            </a:pPr>
-            <a:r>
-              <a:rPr lang="en-US" sz="2000" dirty="0">
-                <a:solidFill>
-                  <a:srgbClr val="111111"/>
-                </a:solidFill>
-                <a:latin typeface="Calibri" pitchFamily="34" charset="0"/>
-                <a:ea typeface="Calibri" pitchFamily="34" charset="-122"/>
-                <a:cs typeface="Calibri" pitchFamily="34" charset="-120"/>
-              </a:rPr>
-              <a:t>Timing: Homework correction, plan, objectives 8 min | Recall, situation, action 10 min | 5 activities 30 min | Board summary (copying) 30 min | Evaluation, remediation 10 min | Homework, next lesson 5 min | Logbook 7 min</a:t>
-            </a:r>
-            <a:endParaRPr lang="en-US" sz="2000" dirty="0"/>
-          </a:p>
-          <a:p>
-            <a:pPr algn="l" marL="342900" indent="-342900">
-              <a:spcAft>
-                <a:spcPts val="800"/>
-              </a:spcAft>
-              <a:buSzPct val="100000"/>
-              <a:buChar char="•"/>
-            </a:pPr>
-            <a:r>
-              <a:rPr lang="en-US" sz="2000" dirty="0">
-                <a:solidFill>
-                  <a:srgbClr val="111111"/>
-                </a:solidFill>
-                <a:latin typeface="Calibri" pitchFamily="34" charset="0"/>
-                <a:ea typeface="Calibri" pitchFamily="34" charset="-122"/>
-                <a:cs typeface="Calibri" pitchFamily="34" charset="-120"/>
-              </a:rPr>
-              <a:t>Without the projector (Activity 1): draw a core and its periphery.</a:t>
-            </a:r>
-            <a:endParaRPr lang="en-US" sz="2000" dirty="0"/>
-          </a:p>
-          <a:p>
-            <a:pPr algn="l" marL="342900" indent="-342900">
-              <a:spcAft>
-                <a:spcPts val="800"/>
-              </a:spcAft>
-              <a:buSzPct val="100000"/>
-              <a:buChar char="•"/>
-            </a:pPr>
-            <a:r>
-              <a:rPr lang="en-US" sz="2000" dirty="0">
-                <a:solidFill>
-                  <a:srgbClr val="111111"/>
-                </a:solidFill>
-                <a:latin typeface="Calibri" pitchFamily="34" charset="0"/>
-                <a:ea typeface="Calibri" pitchFamily="34" charset="-122"/>
-                <a:cs typeface="Calibri" pitchFamily="34" charset="-120"/>
-              </a:rPr>
-              <a:t>Without the projector (Activity 2): mark cores and lagging regions.</a:t>
-            </a:r>
-            <a:endParaRPr lang="en-US" sz="2000" dirty="0"/>
-          </a:p>
-          <a:p>
-            <a:pPr algn="l" marL="342900" indent="-342900">
-              <a:spcAft>
-                <a:spcPts val="800"/>
-              </a:spcAft>
-              <a:buSzPct val="100000"/>
-              <a:buChar char="•"/>
-            </a:pPr>
-            <a:r>
-              <a:rPr lang="en-US" sz="2000" dirty="0">
-                <a:solidFill>
-                  <a:srgbClr val="111111"/>
-                </a:solidFill>
-                <a:latin typeface="Calibri" pitchFamily="34" charset="0"/>
-                <a:ea typeface="Calibri" pitchFamily="34" charset="-122"/>
-                <a:cs typeface="Calibri" pitchFamily="34" charset="-120"/>
-              </a:rPr>
-              <a:t>Without the projector (Activity 3): copy the table.</a:t>
-            </a:r>
-            <a:endParaRPr lang="en-US" sz="2000" dirty="0"/>
-          </a:p>
-          <a:p>
-            <a:pPr algn="l" marL="342900" indent="-342900">
-              <a:spcAft>
-                <a:spcPts val="800"/>
-              </a:spcAft>
-              <a:buSzPct val="100000"/>
-              <a:buChar char="•"/>
-            </a:pPr>
-            <a:r>
-              <a:rPr lang="en-US" sz="2000" dirty="0">
-                <a:solidFill>
-                  <a:srgbClr val="111111"/>
-                </a:solidFill>
-                <a:latin typeface="Calibri" pitchFamily="34" charset="0"/>
-                <a:ea typeface="Calibri" pitchFamily="34" charset="-122"/>
-                <a:cs typeface="Calibri" pitchFamily="34" charset="-120"/>
-              </a:rPr>
-              <a:t>Without the projector (Activity 4): compare Douala and Ngaoundéré.</a:t>
-            </a:r>
-            <a:endParaRPr lang="en-US" sz="2000" dirty="0"/>
-          </a:p>
-          <a:p>
-            <a:pPr algn="l" marL="342900" indent="-342900">
-              <a:spcAft>
-                <a:spcPts val="800"/>
-              </a:spcAft>
-              <a:buSzPct val="100000"/>
-              <a:buChar char="•"/>
-            </a:pPr>
-            <a:r>
-              <a:rPr lang="en-US" sz="2000" dirty="0">
-                <a:solidFill>
-                  <a:srgbClr val="111111"/>
-                </a:solidFill>
-                <a:latin typeface="Calibri" pitchFamily="34" charset="0"/>
-                <a:ea typeface="Calibri" pitchFamily="34" charset="-122"/>
-                <a:cs typeface="Calibri" pitchFamily="34" charset="-120"/>
-              </a:rPr>
-              <a:t>Without the projector (Activity 5): name new universities of the north.</a:t>
-            </a:r>
-            <a:endParaRPr lang="en-US" sz="2000" dirty="0"/>
-          </a:p>
-        </p:txBody>
-      </p:sp>
-      <p:sp>
-        <p:nvSpPr>
-          <p:cNvPr id="25" name="Slide Number Placeholder 0"/>
-          <p:cNvSpPr>
-            <a:spLocks noGrp="1"/>
-          </p:cNvSpPr>
-          <p:nvPr>
-            <p:ph type="sldNum" sz="quarter" idx="4294967295"/>
-          </p:nvPr>
-        </p:nvSpPr>
-        <p:spPr>
-          <a:xfrm>
-            <a:off x="27432" y="91440"/>
-            <a:ext cx="585216" cy="475488"/>
-          </a:xfrm>
-          <a:prstGeom prst="rect">
-            <a:avLst/>
-          </a:prstGeom>
-          <a:extLst>
-            <a:ext uri="{C572A759-6A51-4108-AA02-DFA0A04FC94B}">
-              <ma14:wrappingTextBoxFlag xmlns:ma14="http://schemas.microsoft.com/office/mac/drawingml/2011/main" val="0"/>
-            </a:ext>
-          </a:extLst>
-        </p:spPr>
-        <p:txBody>
-          <a:bodyPr/>
-          <a:lstStyle>
-            <a:lvl1pPr>
-              <a:defRPr sz="2000">
-                <a:solidFill>
-                  <a:srgbClr val="FFFFFF"/>
-                </a:solidFill>
-                <a:latin typeface="Calibri"/>
-                <a:ea typeface="Calibri"/>
-                <a:cs typeface="Calibri"/>
-              </a:defRPr>
-            </a:lvl1pPr>
-          </a:lstStyle>
-          <a:p>
-            <a:pPr algn="ctr"/>
-            <a:fld id="{F7021451-1387-4CA6-816F-3879F97B5CBC}" type="slidenum">
-              <a:rPr b="1" lang="en-US"/>
               <a:t>62</a:t>
             </a:fld>
             <a:endParaRPr lang="en-US"/>
@@ -24819,7 +24782,7 @@
                 <a:ea typeface="Calibri" pitchFamily="34" charset="-122"/>
                 <a:cs typeface="Calibri" pitchFamily="34" charset="-120"/>
               </a:rPr>
-              <a:t>REFERENCES</a:t>
+              <a:t>TEACHER'S NOTE</a:t>
             </a:r>
             <a:endParaRPr lang="en-US" sz="1400" dirty="0"/>
           </a:p>
@@ -24884,7 +24847,7 @@
                 <a:ea typeface="Times New Roman" pitchFamily="34" charset="-122"/>
                 <a:cs typeface="Times New Roman" pitchFamily="34" charset="-120"/>
               </a:rPr>
-              <a:t>References</a:t>
+              <a:t>Teacher's Note</a:t>
             </a:r>
             <a:endParaRPr lang="en-US" sz="3600" dirty="0"/>
           </a:p>
@@ -24919,7 +24882,7 @@
               <a:buChar char="•"/>
             </a:pPr>
             <a:r>
-              <a:rPr lang="en-US" sz="1800" dirty="0">
+              <a:rPr lang="en-US" sz="2000" dirty="0">
                 <a:solidFill>
                   <a:srgbClr val="111111"/>
                 </a:solidFill>
@@ -24927,9 +24890,9 @@
                 <a:ea typeface="Calibri" pitchFamily="34" charset="-122"/>
                 <a:cs typeface="Calibri" pitchFamily="34" charset="-120"/>
               </a:rPr>
-              <a:t>Geography Syllabus for Sixth Forms (Lower and Upper Sixth), MINESEC, 2019 — Geography of Cameroon.</a:t>
-            </a:r>
-            <a:endParaRPr lang="en-US" sz="1800" dirty="0"/>
+              <a:t>Timing: Homework correction, plan, objectives 8 min | Recall, situation, action 10 min | 5 activities 30 min | Board summary (copying) 30 min | Evaluation, remediation 10 min | Homework, next lesson 5 min | Logbook 7 min</a:t>
+            </a:r>
+            <a:endParaRPr lang="en-US" sz="2000" dirty="0"/>
           </a:p>
           <a:p>
             <a:pPr algn="l" marL="342900" indent="-342900">
@@ -24940,7 +24903,7 @@
               <a:buChar char="•"/>
             </a:pPr>
             <a:r>
-              <a:rPr lang="en-US" sz="1800" dirty="0">
+              <a:rPr lang="en-US" sz="2000" dirty="0">
                 <a:solidFill>
                   <a:srgbClr val="111111"/>
                 </a:solidFill>
@@ -24948,9 +24911,9 @@
                 <a:ea typeface="Calibri" pitchFamily="34" charset="-122"/>
                 <a:cs typeface="Calibri" pitchFamily="34" charset="-120"/>
               </a:rPr>
-              <a:t>Teacher's course notes: Mr KAMDEM E., Cameroon Geography (LSA and USA), GBHS Garoua, 2026.</a:t>
-            </a:r>
-            <a:endParaRPr lang="en-US" sz="1800" dirty="0"/>
+              <a:t>Without the projector (Activity 1): draw a core and its periphery.</a:t>
+            </a:r>
+            <a:endParaRPr lang="en-US" sz="2000" dirty="0"/>
           </a:p>
           <a:p>
             <a:pPr algn="l" marL="342900" indent="-342900">
@@ -24961,7 +24924,7 @@
               <a:buChar char="•"/>
             </a:pPr>
             <a:r>
-              <a:rPr lang="en-US" sz="1800" dirty="0">
+              <a:rPr lang="en-US" sz="2000" dirty="0">
                 <a:solidFill>
                   <a:srgbClr val="111111"/>
                 </a:solidFill>
@@ -24969,9 +24932,9 @@
                 <a:ea typeface="Calibri" pitchFamily="34" charset="-122"/>
                 <a:cs typeface="Calibri" pitchFamily="34" charset="-120"/>
               </a:rPr>
-              <a:t>INS, Fourth Cameroon Household Survey (ECAM 4), 2014.</a:t>
-            </a:r>
-            <a:endParaRPr lang="en-US" sz="1800" dirty="0"/>
+              <a:t>Without the projector (Activity 2): mark cores and lagging regions.</a:t>
+            </a:r>
+            <a:endParaRPr lang="en-US" sz="2000" dirty="0"/>
           </a:p>
           <a:p>
             <a:pPr algn="l" marL="342900" indent="-342900">
@@ -24982,7 +24945,7 @@
               <a:buChar char="•"/>
             </a:pPr>
             <a:r>
-              <a:rPr lang="en-US" sz="1800" dirty="0">
+              <a:rPr lang="en-US" sz="2000" dirty="0">
                 <a:solidFill>
                   <a:srgbClr val="111111"/>
                 </a:solidFill>
@@ -24990,9 +24953,9 @@
                 <a:ea typeface="Calibri" pitchFamily="34" charset="-122"/>
                 <a:cs typeface="Calibri" pitchFamily="34" charset="-120"/>
               </a:rPr>
-              <a:t>Photo, Activity 4: “Douala” by christing-O-, CC BY 2.0, via Flickr (https://www.flickr.com/photos/76187282@N00/7227535754)</a:t>
-            </a:r>
-            <a:endParaRPr lang="en-US" sz="1800" dirty="0"/>
+              <a:t>Without the projector (Activity 3): copy the table.</a:t>
+            </a:r>
+            <a:endParaRPr lang="en-US" sz="2000" dirty="0"/>
           </a:p>
           <a:p>
             <a:pPr algn="l" marL="342900" indent="-342900">
@@ -25003,7 +24966,7 @@
               <a:buChar char="•"/>
             </a:pPr>
             <a:r>
-              <a:rPr lang="en-US" sz="1800" dirty="0">
+              <a:rPr lang="en-US" sz="2000" dirty="0">
                 <a:solidFill>
                   <a:srgbClr val="111111"/>
                 </a:solidFill>
@@ -25011,9 +24974,9 @@
                 <a:ea typeface="Calibri" pitchFamily="34" charset="-122"/>
                 <a:cs typeface="Calibri" pitchFamily="34" charset="-120"/>
               </a:rPr>
-              <a:t>Photo, Activity 5: “Students in Primary Seven at Zanaki Primary School” by World Bank Photo Collection, CC BY-NC-ND 2.0, via Flickr (https://www.flickr.com/photos/10816734@N03/33423887921)</a:t>
-            </a:r>
-            <a:endParaRPr lang="en-US" sz="1800" dirty="0"/>
+              <a:t>Without the projector (Activity 4): compare Douala and Ngaoundéré.</a:t>
+            </a:r>
+            <a:endParaRPr lang="en-US" sz="2000" dirty="0"/>
           </a:p>
           <a:p>
             <a:pPr algn="l" marL="342900" indent="-342900">
@@ -25024,7 +24987,7 @@
               <a:buChar char="•"/>
             </a:pPr>
             <a:r>
-              <a:rPr lang="en-US" sz="1800" dirty="0">
+              <a:rPr lang="en-US" sz="2000" dirty="0">
                 <a:solidFill>
                   <a:srgbClr val="111111"/>
                 </a:solidFill>
@@ -25032,10 +24995,209 @@
                 <a:ea typeface="Calibri" pitchFamily="34" charset="-122"/>
                 <a:cs typeface="Calibri" pitchFamily="34" charset="-120"/>
               </a:rPr>
-              <a:t>Photo, board summary (Lagging region: the Adamawa): “At Dang and its livestock market” by 10b travelling / Carsten ten Brink, CC BY-NC-ND 2.0, via Flickr (https://www.flickr.com/photos/77334245@N00/7311224966)</a:t>
-            </a:r>
-            <a:endParaRPr lang="en-US" sz="1800" dirty="0"/>
-          </a:p>
+              <a:t>Without the projector (Activity 5): name new universities of the north.</a:t>
+            </a:r>
+            <a:endParaRPr lang="en-US" sz="2000" dirty="0"/>
+          </a:p>
+        </p:txBody>
+      </p:sp>
+      <p:sp>
+        <p:nvSpPr>
+          <p:cNvPr id="25" name="Slide Number Placeholder 0"/>
+          <p:cNvSpPr>
+            <a:spLocks noGrp="1"/>
+          </p:cNvSpPr>
+          <p:nvPr>
+            <p:ph type="sldNum" sz="quarter" idx="4294967295"/>
+          </p:nvPr>
+        </p:nvSpPr>
+        <p:spPr>
+          <a:xfrm>
+            <a:off x="27432" y="91440"/>
+            <a:ext cx="585216" cy="475488"/>
+          </a:xfrm>
+          <a:prstGeom prst="rect">
+            <a:avLst/>
+          </a:prstGeom>
+          <a:extLst>
+            <a:ext uri="{C572A759-6A51-4108-AA02-DFA0A04FC94B}">
+              <ma14:wrappingTextBoxFlag xmlns:ma14="http://schemas.microsoft.com/office/mac/drawingml/2011/main" val="0"/>
+            </a:ext>
+          </a:extLst>
+        </p:spPr>
+        <p:txBody>
+          <a:bodyPr/>
+          <a:lstStyle>
+            <a:lvl1pPr>
+              <a:defRPr sz="2000">
+                <a:solidFill>
+                  <a:srgbClr val="FFFFFF"/>
+                </a:solidFill>
+                <a:latin typeface="Calibri"/>
+                <a:ea typeface="Calibri"/>
+                <a:cs typeface="Calibri"/>
+              </a:defRPr>
+            </a:lvl1pPr>
+          </a:lstStyle>
+          <a:p>
+            <a:pPr algn="ctr"/>
+            <a:fld id="{F7021451-1387-4CA6-816F-3879F97B5CBC}" type="slidenum">
+              <a:rPr b="1" lang="en-US"/>
+              <a:t>63</a:t>
+            </a:fld>
+            <a:endParaRPr lang="en-US"/>
+          </a:p>
+        </p:txBody>
+      </p:sp>
+    </p:spTree>
+  </p:cSld>
+  <p:clrMapOvr>
+    <a:masterClrMapping/>
+  </p:clrMapOvr>
+</p:sld>
+</file>
+
+<file path=ppt/slides/slide64.xml><?xml version="1.0" encoding="utf-8"?>
+<p:sld xmlns:a="http://schemas.openxmlformats.org/drawingml/2006/main" xmlns:r="http://schemas.openxmlformats.org/officeDocument/2006/relationships" xmlns:p="http://schemas.openxmlformats.org/presentationml/2006/main">
+  <p:cSld name="Slide 64">
+    <p:spTree>
+      <p:nvGrpSpPr>
+        <p:cNvPr id="1" name=""/>
+        <p:cNvGrpSpPr/>
+        <p:nvPr/>
+      </p:nvGrpSpPr>
+      <p:grpSpPr>
+        <a:xfrm>
+          <a:off x="0" y="0"/>
+          <a:ext cx="0" cy="0"/>
+          <a:chOff x="0" y="0"/>
+          <a:chExt cx="0" cy="0"/>
+        </a:xfrm>
+      </p:grpSpPr>
+      <p:sp>
+        <p:nvSpPr>
+          <p:cNvPr id="2" name="Text 0"/>
+          <p:cNvSpPr/>
+          <p:nvPr/>
+        </p:nvSpPr>
+        <p:spPr>
+          <a:xfrm>
+            <a:off x="457200" y="713232"/>
+            <a:ext cx="11368735" cy="274320"/>
+          </a:xfrm>
+          <a:prstGeom prst="rect">
+            <a:avLst/>
+          </a:prstGeom>
+          <a:noFill/>
+          <a:ln/>
+        </p:spPr>
+        <p:txBody>
+          <a:bodyPr wrap="square" lIns="0" tIns="0" rIns="0" bIns="0" rtlCol="0" anchor="ctr"/>
+          <a:lstStyle/>
+          <a:p>
+            <a:pPr algn="r" indent="0" marL="0">
+              <a:buNone/>
+            </a:pPr>
+            <a:r>
+              <a:rPr lang="en-US" sz="1400" b="1" dirty="0">
+                <a:solidFill>
+                  <a:srgbClr val="1C3F6E"/>
+                </a:solidFill>
+                <a:latin typeface="Calibri" pitchFamily="34" charset="0"/>
+                <a:ea typeface="Calibri" pitchFamily="34" charset="-122"/>
+                <a:cs typeface="Calibri" pitchFamily="34" charset="-120"/>
+              </a:rPr>
+              <a:t>REFERENCES</a:t>
+            </a:r>
+            <a:endParaRPr lang="en-US" sz="1400" dirty="0"/>
+          </a:p>
+        </p:txBody>
+      </p:sp>
+      <p:pic>
+        <p:nvPicPr>
+          <p:cNvPr id="3" name="Image 0" descr="/home/claude/f4/img/minesec_sheet.png">    </p:cNvPr>
+          <p:cNvPicPr>
+            <a:picLocks noChangeAspect="1"/>
+          </p:cNvPicPr>
+          <p:nvPr/>
+        </p:nvPicPr>
+        <p:blipFill>
+          <a:blip r:embed="rId1"/>
+          <a:stretch>
+            <a:fillRect/>
+          </a:stretch>
+        </p:blipFill>
+        <p:spPr>
+          <a:xfrm>
+            <a:off x="0" y="658368"/>
+            <a:ext cx="3840480" cy="5833872"/>
+          </a:xfrm>
+          <a:prstGeom prst="rect">
+            <a:avLst/>
+          </a:prstGeom>
+        </p:spPr>
+      </p:pic>
+      <p:sp>
+        <p:nvSpPr>
+          <p:cNvPr id="4" name="Text 1"/>
+          <p:cNvSpPr/>
+          <p:nvPr/>
+        </p:nvSpPr>
+        <p:spPr>
+          <a:xfrm>
+            <a:off x="4069080" y="1005840"/>
+            <a:ext cx="7802575" cy="731520"/>
+          </a:xfrm>
+          <a:prstGeom prst="rect">
+            <a:avLst/>
+          </a:prstGeom>
+          <a:noFill/>
+          <a:ln/>
+        </p:spPr>
+        <p:txBody>
+          <a:bodyPr wrap="square" lIns="0" tIns="0" rIns="0" bIns="0" rtlCol="0" anchor="ctr">
+            <a:normAutofit/>
+          </a:bodyPr>
+          <a:lstStyle/>
+          <a:p>
+            <a:pPr algn="ctr" indent="0" marL="0">
+              <a:buNone/>
+            </a:pPr>
+            <a:r>
+              <a:rPr lang="en-US" sz="3600" b="1" dirty="0">
+                <a:solidFill>
+                  <a:srgbClr val="990011"/>
+                </a:solidFill>
+                <a:latin typeface="Times New Roman" pitchFamily="34" charset="0"/>
+                <a:ea typeface="Times New Roman" pitchFamily="34" charset="-122"/>
+                <a:cs typeface="Times New Roman" pitchFamily="34" charset="-120"/>
+              </a:rPr>
+              <a:t>References</a:t>
+            </a:r>
+            <a:endParaRPr lang="en-US" sz="3600" dirty="0"/>
+          </a:p>
+        </p:txBody>
+      </p:sp>
+      <p:sp>
+        <p:nvSpPr>
+          <p:cNvPr id="5" name="Text 2"/>
+          <p:cNvSpPr/>
+          <p:nvPr/>
+        </p:nvSpPr>
+        <p:spPr>
+          <a:xfrm>
+            <a:off x="4069080" y="1783080"/>
+            <a:ext cx="7802575" cy="4663440"/>
+          </a:xfrm>
+          <a:prstGeom prst="rect">
+            <a:avLst/>
+          </a:prstGeom>
+          <a:noFill/>
+          <a:ln/>
+        </p:spPr>
+        <p:txBody>
+          <a:bodyPr wrap="square" lIns="0" tIns="0" rIns="0" bIns="0" rtlCol="0" anchor="t"/>
+          <a:lstStyle/>
           <a:p>
             <a:pPr algn="l" marL="342900" indent="-342900">
               <a:spcAft>
@@ -25053,6 +25215,132 @@
                 <a:ea typeface="Calibri" pitchFamily="34" charset="-122"/>
                 <a:cs typeface="Calibri" pitchFamily="34" charset="-120"/>
               </a:rPr>
+              <a:t>Geography Syllabus for Sixth Forms (Lower and Upper Sixth), MINESEC, 2019 — Geography of Cameroon.</a:t>
+            </a:r>
+            <a:endParaRPr lang="en-US" sz="1800" dirty="0"/>
+          </a:p>
+          <a:p>
+            <a:pPr algn="l" marL="342900" indent="-342900">
+              <a:spcAft>
+                <a:spcPts val="800"/>
+              </a:spcAft>
+              <a:buSzPct val="100000"/>
+              <a:buChar char="•"/>
+            </a:pPr>
+            <a:r>
+              <a:rPr lang="en-US" sz="1800" dirty="0">
+                <a:solidFill>
+                  <a:srgbClr val="111111"/>
+                </a:solidFill>
+                <a:latin typeface="Calibri" pitchFamily="34" charset="0"/>
+                <a:ea typeface="Calibri" pitchFamily="34" charset="-122"/>
+                <a:cs typeface="Calibri" pitchFamily="34" charset="-120"/>
+              </a:rPr>
+              <a:t>Teacher's course notes: Mr KAMDEM E., Cameroon Geography (LSA and USA), GBHS Garoua, 2026.</a:t>
+            </a:r>
+            <a:endParaRPr lang="en-US" sz="1800" dirty="0"/>
+          </a:p>
+          <a:p>
+            <a:pPr algn="l" marL="342900" indent="-342900">
+              <a:spcAft>
+                <a:spcPts val="800"/>
+              </a:spcAft>
+              <a:buSzPct val="100000"/>
+              <a:buChar char="•"/>
+            </a:pPr>
+            <a:r>
+              <a:rPr lang="en-US" sz="1800" dirty="0">
+                <a:solidFill>
+                  <a:srgbClr val="111111"/>
+                </a:solidFill>
+                <a:latin typeface="Calibri" pitchFamily="34" charset="0"/>
+                <a:ea typeface="Calibri" pitchFamily="34" charset="-122"/>
+                <a:cs typeface="Calibri" pitchFamily="34" charset="-120"/>
+              </a:rPr>
+              <a:t>INS, Fourth Cameroon Household Survey (ECAM 4), 2014.</a:t>
+            </a:r>
+            <a:endParaRPr lang="en-US" sz="1800" dirty="0"/>
+          </a:p>
+          <a:p>
+            <a:pPr algn="l" marL="342900" indent="-342900">
+              <a:spcAft>
+                <a:spcPts val="800"/>
+              </a:spcAft>
+              <a:buSzPct val="100000"/>
+              <a:buChar char="•"/>
+            </a:pPr>
+            <a:r>
+              <a:rPr lang="en-US" sz="1800" dirty="0">
+                <a:solidFill>
+                  <a:srgbClr val="111111"/>
+                </a:solidFill>
+                <a:latin typeface="Calibri" pitchFamily="34" charset="0"/>
+                <a:ea typeface="Calibri" pitchFamily="34" charset="-122"/>
+                <a:cs typeface="Calibri" pitchFamily="34" charset="-120"/>
+              </a:rPr>
+              <a:t>Photo, Activity 4: “Douala” by christing-O-, CC BY 2.0, via Flickr (https://www.flickr.com/photos/76187282@N00/7227535754)</a:t>
+            </a:r>
+            <a:endParaRPr lang="en-US" sz="1800" dirty="0"/>
+          </a:p>
+          <a:p>
+            <a:pPr algn="l" marL="342900" indent="-342900">
+              <a:spcAft>
+                <a:spcPts val="800"/>
+              </a:spcAft>
+              <a:buSzPct val="100000"/>
+              <a:buChar char="•"/>
+            </a:pPr>
+            <a:r>
+              <a:rPr lang="en-US" sz="1800" dirty="0">
+                <a:solidFill>
+                  <a:srgbClr val="111111"/>
+                </a:solidFill>
+                <a:latin typeface="Calibri" pitchFamily="34" charset="0"/>
+                <a:ea typeface="Calibri" pitchFamily="34" charset="-122"/>
+                <a:cs typeface="Calibri" pitchFamily="34" charset="-120"/>
+              </a:rPr>
+              <a:t>Photo, Activity 5: “Students in Primary Seven at Zanaki Primary School” by World Bank Photo Collection, CC BY-NC-ND 2.0, via Flickr (https://www.flickr.com/photos/10816734@N03/33423887921)</a:t>
+            </a:r>
+            <a:endParaRPr lang="en-US" sz="1800" dirty="0"/>
+          </a:p>
+          <a:p>
+            <a:pPr algn="l" marL="342900" indent="-342900">
+              <a:spcAft>
+                <a:spcPts val="800"/>
+              </a:spcAft>
+              <a:buSzPct val="100000"/>
+              <a:buChar char="•"/>
+            </a:pPr>
+            <a:r>
+              <a:rPr lang="en-US" sz="1800" dirty="0">
+                <a:solidFill>
+                  <a:srgbClr val="111111"/>
+                </a:solidFill>
+                <a:latin typeface="Calibri" pitchFamily="34" charset="0"/>
+                <a:ea typeface="Calibri" pitchFamily="34" charset="-122"/>
+                <a:cs typeface="Calibri" pitchFamily="34" charset="-120"/>
+              </a:rPr>
+              <a:t>Photo, board summary (Lagging region: the Adamawa): “At Dang and its livestock market” by 10b travelling / Carsten ten Brink, CC BY-NC-ND 2.0, via Flickr (https://www.flickr.com/photos/77334245@N00/7311224966)</a:t>
+            </a:r>
+            <a:endParaRPr lang="en-US" sz="1800" dirty="0"/>
+          </a:p>
+          <a:p>
+            <a:pPr algn="l" marL="342900" indent="-342900">
+              <a:spcAft>
+                <a:spcPts val="800"/>
+              </a:spcAft>
+              <a:buSzPct val="100000"/>
+              <a:buChar char="•"/>
+            </a:pPr>
+            <a:r>
+              <a:rPr lang="en-US" sz="1800" dirty="0">
+                <a:solidFill>
+                  <a:srgbClr val="111111"/>
+                </a:solidFill>
+                <a:latin typeface="Calibri" pitchFamily="34" charset="0"/>
+                <a:ea typeface="Calibri" pitchFamily="34" charset="-122"/>
+                <a:cs typeface="Calibri" pitchFamily="34" charset="-120"/>
+              </a:rPr>
               <a:t>Diagrams and animations: drawn for this lesson (Geography Department).</a:t>
             </a:r>
             <a:endParaRPr lang="en-US" sz="1800" dirty="0"/>
@@ -25101,7 +25389,7 @@
             <a:pPr algn="ctr"/>
             <a:fld id="{F7021451-1387-4CA6-816F-3879F97B5CBC}" type="slidenum">
               <a:rPr b="1" lang="en-US"/>
-              <a:t>63</a:t>
+              <a:t>64</a:t>
             </a:fld>
             <a:endParaRPr lang="en-US"/>
           </a:p>
